--- a/docs/Gold-Price-Prediction-Presentation.pptx
+++ b/docs/Gold-Price-Prediction-Presentation.pptx
@@ -3152,8 +3152,8 @@
         </p:nvSpPr>
         <p:spPr>
           <a:xfrm>
-            <a:off x="0" y="4160520"/>
-            <a:ext cx="12191695" cy="73152"/>
+            <a:off x="0" y="3977639"/>
+            <a:ext cx="12191695" cy="54864"/>
           </a:xfrm>
           <a:prstGeom prst="rect">
             <a:avLst/>
@@ -3190,7 +3190,7 @@
       </p:sp>
       <p:pic>
         <p:nvPicPr>
-          <p:cNvPr id="4" name="Picture 3" descr="college_logo.jpg"/>
+          <p:cNvPr id="4" name="Picture 3" descr="college_logo_navy.png"/>
           <p:cNvPicPr>
             <a:picLocks noChangeAspect="1"/>
           </p:cNvPicPr>
@@ -3204,8 +3204,8 @@
         </p:blipFill>
         <p:spPr>
           <a:xfrm>
-            <a:off x="5318607" y="640080"/>
-            <a:ext cx="1554480" cy="1554480"/>
+            <a:off x="5227167" y="548640"/>
+            <a:ext cx="1737360" cy="1737360"/>
           </a:xfrm>
           <a:prstGeom prst="rect">
             <a:avLst/>
@@ -3220,7 +3220,7 @@
         </p:nvSpPr>
         <p:spPr>
           <a:xfrm>
-            <a:off x="731520" y="2377440"/>
+            <a:off x="731520" y="2331720"/>
             <a:ext cx="10728655" cy="1463040"/>
           </a:xfrm>
           <a:prstGeom prst="rect">
@@ -3233,6 +3233,93 @@
             <a:spAutoFit/>
           </a:bodyPr>
           <a:lstStyle/>
+          <a:p>
+            <a:pPr algn="ctr">
+              <a:spcAft>
+                <a:spcPts val="600"/>
+              </a:spcAft>
+            </a:pPr>
+            <a:r>
+              <a:rPr sz="3400" b="1">
+                <a:solidFill>
+                  <a:srgbClr val="FFFFFF"/>
+                </a:solidFill>
+                <a:latin typeface="Calibri"/>
+              </a:rPr>
+              <a:t>Gold Price Prediction using Machine Learning</a:t>
+            </a:r>
+          </a:p>
+          <a:p>
+            <a:pPr algn="ctr">
+              <a:spcAft>
+                <a:spcPts val="600"/>
+              </a:spcAft>
+            </a:pPr>
+            <a:r>
+              <a:rPr sz="1800" b="0">
+                <a:solidFill>
+                  <a:srgbClr val="C9A227"/>
+                </a:solidFill>
+                <a:latin typeface="Calibri"/>
+              </a:rPr>
+              <a:t>A Mini Project in Machine Learning</a:t>
+            </a:r>
+          </a:p>
+        </p:txBody>
+      </p:sp>
+      <p:sp>
+        <p:nvSpPr>
+          <p:cNvPr id="6" name="TextBox 5"/>
+          <p:cNvSpPr txBox="1"/>
+          <p:nvPr/>
+        </p:nvSpPr>
+        <p:spPr>
+          <a:xfrm>
+            <a:off x="914400" y="4297680"/>
+            <a:ext cx="10362895" cy="2194560"/>
+          </a:xfrm>
+          <a:prstGeom prst="rect">
+            <a:avLst/>
+          </a:prstGeom>
+          <a:noFill/>
+        </p:spPr>
+        <p:txBody>
+          <a:bodyPr wrap="square">
+            <a:spAutoFit/>
+          </a:bodyPr>
+          <a:lstStyle/>
+          <a:p>
+            <a:pPr algn="ctr">
+              <a:spcAft>
+                <a:spcPts val="200"/>
+              </a:spcAft>
+            </a:pPr>
+            <a:r>
+              <a:rPr sz="1300" b="1">
+                <a:solidFill>
+                  <a:srgbClr val="C9A227"/>
+                </a:solidFill>
+                <a:latin typeface="Calibri"/>
+              </a:rPr>
+              <a:t>Submitted by</a:t>
+            </a:r>
+          </a:p>
+          <a:p>
+            <a:pPr algn="ctr">
+              <a:spcAft>
+                <a:spcPts val="1400"/>
+              </a:spcAft>
+            </a:pPr>
+            <a:r>
+              <a:rPr sz="2200" b="1">
+                <a:solidFill>
+                  <a:srgbClr val="FFFFFF"/>
+                </a:solidFill>
+                <a:latin typeface="Calibri"/>
+              </a:rPr>
+              <a:t>Sanchay Bhardwaj  (2300650100104)</a:t>
+            </a:r>
+          </a:p>
           <a:p>
             <a:pPr algn="ctr">
               <a:spcAft>
@@ -3240,13 +3327,29 @@
               </a:spcAft>
             </a:pPr>
             <a:r>
-              <a:rPr sz="3400" b="1">
+              <a:rPr sz="1500" b="0">
                 <a:solidFill>
                   <a:srgbClr val="FFFFFF"/>
                 </a:solidFill>
                 <a:latin typeface="Calibri"/>
               </a:rPr>
-              <a:t>Gold Price Prediction using Machine Learning</a:t>
+              <a:t>Project Guide:  Mrs. Ashna Thakur</a:t>
+            </a:r>
+          </a:p>
+          <a:p>
+            <a:pPr algn="ctr">
+              <a:spcAft>
+                <a:spcPts val="400"/>
+              </a:spcAft>
+            </a:pPr>
+            <a:r>
+              <a:rPr sz="1400" b="0">
+                <a:solidFill>
+                  <a:srgbClr val="FFFFFF"/>
+                </a:solidFill>
+                <a:latin typeface="Calibri"/>
+              </a:rPr>
+              <a:t>B.S.A. College of Engineering &amp; Technology, Mathura</a:t>
             </a:r>
           </a:p>
           <a:p>
@@ -3256,112 +3359,9 @@
               </a:spcAft>
             </a:pPr>
             <a:r>
-              <a:rPr sz="1800" b="0">
+              <a:rPr sz="1200" b="0">
                 <a:solidFill>
                   <a:srgbClr val="C9A227"/>
-                </a:solidFill>
-                <a:latin typeface="Calibri"/>
-              </a:rPr>
-              <a:t>A Mini Project in Machine Learning</a:t>
-            </a:r>
-          </a:p>
-        </p:txBody>
-      </p:sp>
-      <p:sp>
-        <p:nvSpPr>
-          <p:cNvPr id="6" name="TextBox 5"/>
-          <p:cNvSpPr txBox="1"/>
-          <p:nvPr/>
-        </p:nvSpPr>
-        <p:spPr>
-          <a:xfrm>
-            <a:off x="731520" y="4389120"/>
-            <a:ext cx="10728655" cy="2103120"/>
-          </a:xfrm>
-          <a:prstGeom prst="rect">
-            <a:avLst/>
-          </a:prstGeom>
-          <a:noFill/>
-        </p:spPr>
-        <p:txBody>
-          <a:bodyPr wrap="square">
-            <a:spAutoFit/>
-          </a:bodyPr>
-          <a:lstStyle/>
-          <a:p>
-            <a:pPr algn="ctr">
-              <a:spcAft>
-                <a:spcPts val="300"/>
-              </a:spcAft>
-            </a:pPr>
-            <a:r>
-              <a:rPr sz="1300" b="0">
-                <a:solidFill>
-                  <a:srgbClr val="FFFFFF"/>
-                </a:solidFill>
-                <a:latin typeface="Calibri"/>
-              </a:rPr>
-              <a:t>Submitted by:  Tapesh Sharma   (2300650100118)</a:t>
-            </a:r>
-          </a:p>
-          <a:p>
-            <a:pPr algn="ctr">
-              <a:spcAft>
-                <a:spcPts val="300"/>
-              </a:spcAft>
-            </a:pPr>
-            <a:r>
-              <a:rPr sz="1300" b="0">
-                <a:solidFill>
-                  <a:srgbClr val="FFFFFF"/>
-                </a:solidFill>
-                <a:latin typeface="Calibri"/>
-              </a:rPr>
-              <a:t>Team:  Sanchay Bhardwaj (2300650100104)   |   Vivek (2300650100127)</a:t>
-            </a:r>
-          </a:p>
-          <a:p>
-            <a:pPr algn="ctr">
-              <a:spcAft>
-                <a:spcPts val="300"/>
-              </a:spcAft>
-            </a:pPr>
-            <a:r>
-              <a:rPr sz="1300" b="0">
-                <a:solidFill>
-                  <a:srgbClr val="FFFFFF"/>
-                </a:solidFill>
-                <a:latin typeface="Calibri"/>
-              </a:rPr>
-              <a:t>Project Guide:  Mrs. Ashna Thakur</a:t>
-            </a:r>
-          </a:p>
-          <a:p>
-            <a:pPr algn="ctr">
-              <a:spcAft>
-                <a:spcPts val="300"/>
-              </a:spcAft>
-            </a:pPr>
-            <a:r>
-              <a:rPr sz="1300" b="0">
-                <a:solidFill>
-                  <a:srgbClr val="FFFFFF"/>
-                </a:solidFill>
-                <a:latin typeface="Calibri"/>
-              </a:rPr>
-              <a:t>B.S.A. College of Engineering &amp; Technology, Mathura</a:t>
-            </a:r>
-          </a:p>
-          <a:p>
-            <a:pPr algn="ctr">
-              <a:spcAft>
-                <a:spcPts val="300"/>
-              </a:spcAft>
-            </a:pPr>
-            <a:r>
-              <a:rPr sz="1300" b="0">
-                <a:solidFill>
-                  <a:srgbClr val="FFFFFF"/>
                 </a:solidFill>
                 <a:latin typeface="Calibri"/>
               </a:rPr>
@@ -3441,7 +3441,7 @@
         <p:spPr>
           <a:xfrm>
             <a:off x="0" y="960120"/>
-            <a:ext cx="12191695" cy="54864"/>
+            <a:ext cx="12191695" cy="64008"/>
           </a:xfrm>
           <a:prstGeom prst="rect">
             <a:avLst/>
@@ -3484,8 +3484,8 @@
         </p:nvSpPr>
         <p:spPr>
           <a:xfrm>
-            <a:off x="457200" y="109728"/>
-            <a:ext cx="11277295" cy="777240"/>
+            <a:off x="457200" y="137160"/>
+            <a:ext cx="8351215" cy="731520"/>
           </a:xfrm>
           <a:prstGeom prst="rect">
             <a:avLst/>
@@ -3515,9 +3515,214 @@
           </a:p>
         </p:txBody>
       </p:sp>
+      <p:sp>
+        <p:nvSpPr>
+          <p:cNvPr id="5" name="TextBox 4"/>
+          <p:cNvSpPr txBox="1"/>
+          <p:nvPr/>
+        </p:nvSpPr>
+        <p:spPr>
+          <a:xfrm>
+            <a:off x="8534095" y="137160"/>
+            <a:ext cx="3200400" cy="731520"/>
+          </a:xfrm>
+          <a:prstGeom prst="rect">
+            <a:avLst/>
+          </a:prstGeom>
+          <a:noFill/>
+        </p:spPr>
+        <p:txBody>
+          <a:bodyPr wrap="square" anchor="ctr">
+            <a:spAutoFit/>
+          </a:bodyPr>
+          <a:lstStyle/>
+          <a:p>
+            <a:pPr algn="r">
+              <a:spcAft>
+                <a:spcPts val="600"/>
+              </a:spcAft>
+            </a:pPr>
+            <a:r>
+              <a:rPr sz="1200" b="1">
+                <a:solidFill>
+                  <a:srgbClr val="C9A227"/>
+                </a:solidFill>
+                <a:latin typeface="Calibri"/>
+              </a:rPr>
+              <a:t>Gold Price Prediction</a:t>
+            </a:r>
+          </a:p>
+        </p:txBody>
+      </p:sp>
+      <p:sp>
+        <p:nvSpPr>
+          <p:cNvPr id="6" name="Rectangle 5"/>
+          <p:cNvSpPr/>
+          <p:nvPr/>
+        </p:nvSpPr>
+        <p:spPr>
+          <a:xfrm>
+            <a:off x="0" y="6473952"/>
+            <a:ext cx="12191695" cy="384048"/>
+          </a:xfrm>
+          <a:prstGeom prst="rect">
+            <a:avLst/>
+          </a:prstGeom>
+          <a:solidFill>
+            <a:srgbClr val="1F3864"/>
+          </a:solidFill>
+          <a:ln>
+            <a:noFill/>
+          </a:ln>
+          <a:effectLst/>
+        </p:spPr>
+        <p:style>
+          <a:lnRef idx="1">
+            <a:schemeClr val="accent1"/>
+          </a:lnRef>
+          <a:fillRef idx="3">
+            <a:schemeClr val="accent1"/>
+          </a:fillRef>
+          <a:effectRef idx="2">
+            <a:schemeClr val="accent1"/>
+          </a:effectRef>
+          <a:fontRef idx="minor">
+            <a:schemeClr val="lt1"/>
+          </a:fontRef>
+        </p:style>
+        <p:txBody>
+          <a:bodyPr rtlCol="0" anchor="ctr"/>
+          <a:lstStyle/>
+          <a:p>
+            <a:pPr algn="ctr"/>
+          </a:p>
+        </p:txBody>
+      </p:sp>
+      <p:sp>
+        <p:nvSpPr>
+          <p:cNvPr id="7" name="Rectangle 6"/>
+          <p:cNvSpPr/>
+          <p:nvPr/>
+        </p:nvSpPr>
+        <p:spPr>
+          <a:xfrm>
+            <a:off x="0" y="6473952"/>
+            <a:ext cx="128016" cy="384048"/>
+          </a:xfrm>
+          <a:prstGeom prst="rect">
+            <a:avLst/>
+          </a:prstGeom>
+          <a:solidFill>
+            <a:srgbClr val="C9A227"/>
+          </a:solidFill>
+          <a:ln>
+            <a:noFill/>
+          </a:ln>
+          <a:effectLst/>
+        </p:spPr>
+        <p:style>
+          <a:lnRef idx="1">
+            <a:schemeClr val="accent1"/>
+          </a:lnRef>
+          <a:fillRef idx="3">
+            <a:schemeClr val="accent1"/>
+          </a:fillRef>
+          <a:effectRef idx="2">
+            <a:schemeClr val="accent1"/>
+          </a:effectRef>
+          <a:fontRef idx="minor">
+            <a:schemeClr val="lt1"/>
+          </a:fontRef>
+        </p:style>
+        <p:txBody>
+          <a:bodyPr rtlCol="0" anchor="ctr"/>
+          <a:lstStyle/>
+          <a:p>
+            <a:pPr algn="ctr"/>
+          </a:p>
+        </p:txBody>
+      </p:sp>
+      <p:sp>
+        <p:nvSpPr>
+          <p:cNvPr id="8" name="TextBox 7"/>
+          <p:cNvSpPr txBox="1"/>
+          <p:nvPr/>
+        </p:nvSpPr>
+        <p:spPr>
+          <a:xfrm>
+            <a:off x="274320" y="6473952"/>
+            <a:ext cx="10362895" cy="384048"/>
+          </a:xfrm>
+          <a:prstGeom prst="rect">
+            <a:avLst/>
+          </a:prstGeom>
+          <a:noFill/>
+        </p:spPr>
+        <p:txBody>
+          <a:bodyPr wrap="square" anchor="ctr">
+            <a:spAutoFit/>
+          </a:bodyPr>
+          <a:lstStyle/>
+          <a:p>
+            <a:pPr algn="l">
+              <a:spcAft>
+                <a:spcPts val="600"/>
+              </a:spcAft>
+            </a:pPr>
+            <a:r>
+              <a:rPr sz="900" b="0">
+                <a:solidFill>
+                  <a:srgbClr val="FFFFFF"/>
+                </a:solidFill>
+                <a:latin typeface="Calibri"/>
+              </a:rPr>
+              <a:t>Sanchay Bhardwaj (2300650100104)  |  B.S.A. College of Engineering &amp; Technology, Mathura</a:t>
+            </a:r>
+          </a:p>
+        </p:txBody>
+      </p:sp>
+      <p:sp>
+        <p:nvSpPr>
+          <p:cNvPr id="9" name="TextBox 8"/>
+          <p:cNvSpPr txBox="1"/>
+          <p:nvPr/>
+        </p:nvSpPr>
+        <p:spPr>
+          <a:xfrm>
+            <a:off x="10728655" y="6473952"/>
+            <a:ext cx="1188720" cy="384048"/>
+          </a:xfrm>
+          <a:prstGeom prst="rect">
+            <a:avLst/>
+          </a:prstGeom>
+          <a:noFill/>
+        </p:spPr>
+        <p:txBody>
+          <a:bodyPr wrap="square" anchor="ctr">
+            <a:spAutoFit/>
+          </a:bodyPr>
+          <a:lstStyle/>
+          <a:p>
+            <a:pPr algn="r">
+              <a:spcAft>
+                <a:spcPts val="600"/>
+              </a:spcAft>
+            </a:pPr>
+            <a:r>
+              <a:rPr sz="900" b="1">
+                <a:solidFill>
+                  <a:srgbClr val="C9A227"/>
+                </a:solidFill>
+                <a:latin typeface="Calibri"/>
+              </a:rPr>
+              <a:t>Slide 10</a:t>
+            </a:r>
+          </a:p>
+        </p:txBody>
+      </p:sp>
       <p:pic>
         <p:nvPicPr>
-          <p:cNvPr id="5" name="Picture 4" descr="screenshot_train.png"/>
+          <p:cNvPr id="10" name="Picture 9" descr="screenshot_train.png"/>
           <p:cNvPicPr>
             <a:picLocks noChangeAspect="1"/>
           </p:cNvPicPr>
@@ -3531,8 +3736,8 @@
         </p:blipFill>
         <p:spPr>
           <a:xfrm>
-            <a:off x="2426491" y="1371600"/>
-            <a:ext cx="7338713" cy="4846320"/>
+            <a:off x="2703423" y="1325880"/>
+            <a:ext cx="6784848" cy="4480560"/>
           </a:xfrm>
           <a:prstGeom prst="rect">
             <a:avLst/>
@@ -3541,14 +3746,14 @@
       </p:pic>
       <p:sp>
         <p:nvSpPr>
-          <p:cNvPr id="6" name="TextBox 5"/>
+          <p:cNvPr id="11" name="TextBox 10"/>
           <p:cNvSpPr txBox="1"/>
           <p:nvPr/>
         </p:nvSpPr>
         <p:spPr>
           <a:xfrm>
-            <a:off x="914400" y="6126480"/>
-            <a:ext cx="10362895" cy="548640"/>
+            <a:off x="914400" y="5623560"/>
+            <a:ext cx="10362895" cy="640080"/>
           </a:xfrm>
           <a:prstGeom prst="rect">
             <a:avLst/>
@@ -3573,7 +3778,7 @@
                 </a:solidFill>
                 <a:latin typeface="Calibri"/>
               </a:rPr>
-              <a:t>Train tab: accuracy table and the error comparison across models.</a:t>
+              <a:t>Train tab: accuracy table and the error comparison across all models.</a:t>
             </a:r>
           </a:p>
         </p:txBody>
@@ -3649,7 +3854,7 @@
         <p:spPr>
           <a:xfrm>
             <a:off x="0" y="960120"/>
-            <a:ext cx="12191695" cy="54864"/>
+            <a:ext cx="12191695" cy="64008"/>
           </a:xfrm>
           <a:prstGeom prst="rect">
             <a:avLst/>
@@ -3692,8 +3897,8 @@
         </p:nvSpPr>
         <p:spPr>
           <a:xfrm>
-            <a:off x="457200" y="109728"/>
-            <a:ext cx="11277295" cy="777240"/>
+            <a:off x="457200" y="137160"/>
+            <a:ext cx="8351215" cy="731520"/>
           </a:xfrm>
           <a:prstGeom prst="rect">
             <a:avLst/>
@@ -3731,8 +3936,8 @@
         </p:nvSpPr>
         <p:spPr>
           <a:xfrm>
-            <a:off x="640080" y="1371600"/>
-            <a:ext cx="10911535" cy="5029200"/>
+            <a:off x="8534095" y="137160"/>
+            <a:ext cx="3200400" cy="731520"/>
           </a:xfrm>
           <a:prstGeom prst="rect">
             <a:avLst/>
@@ -3740,18 +3945,267 @@
           <a:noFill/>
         </p:spPr>
         <p:txBody>
-          <a:bodyPr wrap="square">
+          <a:bodyPr wrap="square" anchor="ctr">
             <a:spAutoFit/>
           </a:bodyPr>
           <a:lstStyle/>
           <a:p>
+            <a:pPr algn="r">
+              <a:spcAft>
+                <a:spcPts val="600"/>
+              </a:spcAft>
+            </a:pPr>
+            <a:r>
+              <a:rPr sz="1200" b="1">
+                <a:solidFill>
+                  <a:srgbClr val="C9A227"/>
+                </a:solidFill>
+                <a:latin typeface="Calibri"/>
+              </a:rPr>
+              <a:t>Gold Price Prediction</a:t>
+            </a:r>
+          </a:p>
+        </p:txBody>
+      </p:sp>
+      <p:sp>
+        <p:nvSpPr>
+          <p:cNvPr id="6" name="Rectangle 5"/>
+          <p:cNvSpPr/>
+          <p:nvPr/>
+        </p:nvSpPr>
+        <p:spPr>
+          <a:xfrm>
+            <a:off x="0" y="6473952"/>
+            <a:ext cx="12191695" cy="384048"/>
+          </a:xfrm>
+          <a:prstGeom prst="rect">
+            <a:avLst/>
+          </a:prstGeom>
+          <a:solidFill>
+            <a:srgbClr val="1F3864"/>
+          </a:solidFill>
+          <a:ln>
+            <a:noFill/>
+          </a:ln>
+          <a:effectLst/>
+        </p:spPr>
+        <p:style>
+          <a:lnRef idx="1">
+            <a:schemeClr val="accent1"/>
+          </a:lnRef>
+          <a:fillRef idx="3">
+            <a:schemeClr val="accent1"/>
+          </a:fillRef>
+          <a:effectRef idx="2">
+            <a:schemeClr val="accent1"/>
+          </a:effectRef>
+          <a:fontRef idx="minor">
+            <a:schemeClr val="lt1"/>
+          </a:fontRef>
+        </p:style>
+        <p:txBody>
+          <a:bodyPr rtlCol="0" anchor="ctr"/>
+          <a:lstStyle/>
+          <a:p>
+            <a:pPr algn="ctr"/>
+          </a:p>
+        </p:txBody>
+      </p:sp>
+      <p:sp>
+        <p:nvSpPr>
+          <p:cNvPr id="7" name="Rectangle 6"/>
+          <p:cNvSpPr/>
+          <p:nvPr/>
+        </p:nvSpPr>
+        <p:spPr>
+          <a:xfrm>
+            <a:off x="0" y="6473952"/>
+            <a:ext cx="128016" cy="384048"/>
+          </a:xfrm>
+          <a:prstGeom prst="rect">
+            <a:avLst/>
+          </a:prstGeom>
+          <a:solidFill>
+            <a:srgbClr val="C9A227"/>
+          </a:solidFill>
+          <a:ln>
+            <a:noFill/>
+          </a:ln>
+          <a:effectLst/>
+        </p:spPr>
+        <p:style>
+          <a:lnRef idx="1">
+            <a:schemeClr val="accent1"/>
+          </a:lnRef>
+          <a:fillRef idx="3">
+            <a:schemeClr val="accent1"/>
+          </a:fillRef>
+          <a:effectRef idx="2">
+            <a:schemeClr val="accent1"/>
+          </a:effectRef>
+          <a:fontRef idx="minor">
+            <a:schemeClr val="lt1"/>
+          </a:fontRef>
+        </p:style>
+        <p:txBody>
+          <a:bodyPr rtlCol="0" anchor="ctr"/>
+          <a:lstStyle/>
+          <a:p>
+            <a:pPr algn="ctr"/>
+          </a:p>
+        </p:txBody>
+      </p:sp>
+      <p:sp>
+        <p:nvSpPr>
+          <p:cNvPr id="8" name="TextBox 7"/>
+          <p:cNvSpPr txBox="1"/>
+          <p:nvPr/>
+        </p:nvSpPr>
+        <p:spPr>
+          <a:xfrm>
+            <a:off x="274320" y="6473952"/>
+            <a:ext cx="10362895" cy="384048"/>
+          </a:xfrm>
+          <a:prstGeom prst="rect">
+            <a:avLst/>
+          </a:prstGeom>
+          <a:noFill/>
+        </p:spPr>
+        <p:txBody>
+          <a:bodyPr wrap="square" anchor="ctr">
+            <a:spAutoFit/>
+          </a:bodyPr>
+          <a:lstStyle/>
+          <a:p>
             <a:pPr algn="l">
               <a:spcAft>
-                <a:spcPts val="1400"/>
+                <a:spcPts val="600"/>
               </a:spcAft>
             </a:pPr>
             <a:r>
-              <a:rPr sz="1800" b="0">
+              <a:rPr sz="900" b="0">
+                <a:solidFill>
+                  <a:srgbClr val="FFFFFF"/>
+                </a:solidFill>
+                <a:latin typeface="Calibri"/>
+              </a:rPr>
+              <a:t>Sanchay Bhardwaj (2300650100104)  |  B.S.A. College of Engineering &amp; Technology, Mathura</a:t>
+            </a:r>
+          </a:p>
+        </p:txBody>
+      </p:sp>
+      <p:sp>
+        <p:nvSpPr>
+          <p:cNvPr id="9" name="TextBox 8"/>
+          <p:cNvSpPr txBox="1"/>
+          <p:nvPr/>
+        </p:nvSpPr>
+        <p:spPr>
+          <a:xfrm>
+            <a:off x="10728655" y="6473952"/>
+            <a:ext cx="1188720" cy="384048"/>
+          </a:xfrm>
+          <a:prstGeom prst="rect">
+            <a:avLst/>
+          </a:prstGeom>
+          <a:noFill/>
+        </p:spPr>
+        <p:txBody>
+          <a:bodyPr wrap="square" anchor="ctr">
+            <a:spAutoFit/>
+          </a:bodyPr>
+          <a:lstStyle/>
+          <a:p>
+            <a:pPr algn="r">
+              <a:spcAft>
+                <a:spcPts val="600"/>
+              </a:spcAft>
+            </a:pPr>
+            <a:r>
+              <a:rPr sz="900" b="1">
+                <a:solidFill>
+                  <a:srgbClr val="C9A227"/>
+                </a:solidFill>
+                <a:latin typeface="Calibri"/>
+              </a:rPr>
+              <a:t>Slide 11</a:t>
+            </a:r>
+          </a:p>
+        </p:txBody>
+      </p:sp>
+      <p:sp>
+        <p:nvSpPr>
+          <p:cNvPr id="10" name="Rectangle 9"/>
+          <p:cNvSpPr/>
+          <p:nvPr/>
+        </p:nvSpPr>
+        <p:spPr>
+          <a:xfrm>
+            <a:off x="502920" y="1554480"/>
+            <a:ext cx="82296" cy="4297680"/>
+          </a:xfrm>
+          <a:prstGeom prst="rect">
+            <a:avLst/>
+          </a:prstGeom>
+          <a:solidFill>
+            <a:srgbClr val="C9A227"/>
+          </a:solidFill>
+          <a:ln>
+            <a:noFill/>
+          </a:ln>
+          <a:effectLst/>
+        </p:spPr>
+        <p:style>
+          <a:lnRef idx="1">
+            <a:schemeClr val="accent1"/>
+          </a:lnRef>
+          <a:fillRef idx="3">
+            <a:schemeClr val="accent1"/>
+          </a:fillRef>
+          <a:effectRef idx="2">
+            <a:schemeClr val="accent1"/>
+          </a:effectRef>
+          <a:fontRef idx="minor">
+            <a:schemeClr val="lt1"/>
+          </a:fontRef>
+        </p:style>
+        <p:txBody>
+          <a:bodyPr rtlCol="0" anchor="ctr"/>
+          <a:lstStyle/>
+          <a:p>
+            <a:pPr algn="ctr"/>
+          </a:p>
+        </p:txBody>
+      </p:sp>
+      <p:sp>
+        <p:nvSpPr>
+          <p:cNvPr id="11" name="TextBox 10"/>
+          <p:cNvSpPr txBox="1"/>
+          <p:nvPr/>
+        </p:nvSpPr>
+        <p:spPr>
+          <a:xfrm>
+            <a:off x="868680" y="1371600"/>
+            <a:ext cx="10728655" cy="4663440"/>
+          </a:xfrm>
+          <a:prstGeom prst="rect">
+            <a:avLst/>
+          </a:prstGeom>
+          <a:noFill/>
+        </p:spPr>
+        <p:txBody>
+          <a:bodyPr wrap="square" anchor="ctr">
+            <a:spAutoFit/>
+          </a:bodyPr>
+          <a:lstStyle/>
+          <a:p>
+            <a:pPr algn="l">
+              <a:spcAft>
+                <a:spcPts val="2200"/>
+              </a:spcAft>
+            </a:pPr>
+            <a:r>
+              <a:rPr sz="2000" b="0">
                 <a:solidFill>
                   <a:srgbClr val="222222"/>
                 </a:solidFill>
@@ -3763,11 +4217,11 @@
           <a:p>
             <a:pPr algn="l">
               <a:spcAft>
-                <a:spcPts val="1400"/>
+                <a:spcPts val="2200"/>
               </a:spcAft>
             </a:pPr>
             <a:r>
-              <a:rPr sz="1800" b="0">
+              <a:rPr sz="2000" b="0">
                 <a:solidFill>
                   <a:srgbClr val="222222"/>
                 </a:solidFill>
@@ -3779,11 +4233,11 @@
           <a:p>
             <a:pPr algn="l">
               <a:spcAft>
-                <a:spcPts val="1400"/>
+                <a:spcPts val="2200"/>
               </a:spcAft>
             </a:pPr>
             <a:r>
-              <a:rPr sz="1800" b="0">
+              <a:rPr sz="2000" b="0">
                 <a:solidFill>
                   <a:srgbClr val="222222"/>
                 </a:solidFill>
@@ -3795,11 +4249,11 @@
           <a:p>
             <a:pPr algn="l">
               <a:spcAft>
-                <a:spcPts val="1400"/>
+                <a:spcPts val="2200"/>
               </a:spcAft>
             </a:pPr>
             <a:r>
-              <a:rPr sz="1800" b="0">
+              <a:rPr sz="2000" b="0">
                 <a:solidFill>
                   <a:srgbClr val="222222"/>
                 </a:solidFill>
@@ -3881,7 +4335,7 @@
         <p:spPr>
           <a:xfrm>
             <a:off x="0" y="960120"/>
-            <a:ext cx="12191695" cy="54864"/>
+            <a:ext cx="12191695" cy="64008"/>
           </a:xfrm>
           <a:prstGeom prst="rect">
             <a:avLst/>
@@ -3924,8 +4378,8 @@
         </p:nvSpPr>
         <p:spPr>
           <a:xfrm>
-            <a:off x="457200" y="109728"/>
-            <a:ext cx="11277295" cy="777240"/>
+            <a:off x="457200" y="137160"/>
+            <a:ext cx="8351215" cy="731520"/>
           </a:xfrm>
           <a:prstGeom prst="rect">
             <a:avLst/>
@@ -3963,8 +4417,8 @@
         </p:nvSpPr>
         <p:spPr>
           <a:xfrm>
-            <a:off x="640080" y="1371600"/>
-            <a:ext cx="10911535" cy="5029200"/>
+            <a:off x="8534095" y="137160"/>
+            <a:ext cx="3200400" cy="731520"/>
           </a:xfrm>
           <a:prstGeom prst="rect">
             <a:avLst/>
@@ -3972,18 +4426,267 @@
           <a:noFill/>
         </p:spPr>
         <p:txBody>
-          <a:bodyPr wrap="square">
+          <a:bodyPr wrap="square" anchor="ctr">
             <a:spAutoFit/>
           </a:bodyPr>
           <a:lstStyle/>
           <a:p>
+            <a:pPr algn="r">
+              <a:spcAft>
+                <a:spcPts val="600"/>
+              </a:spcAft>
+            </a:pPr>
+            <a:r>
+              <a:rPr sz="1200" b="1">
+                <a:solidFill>
+                  <a:srgbClr val="C9A227"/>
+                </a:solidFill>
+                <a:latin typeface="Calibri"/>
+              </a:rPr>
+              <a:t>Gold Price Prediction</a:t>
+            </a:r>
+          </a:p>
+        </p:txBody>
+      </p:sp>
+      <p:sp>
+        <p:nvSpPr>
+          <p:cNvPr id="6" name="Rectangle 5"/>
+          <p:cNvSpPr/>
+          <p:nvPr/>
+        </p:nvSpPr>
+        <p:spPr>
+          <a:xfrm>
+            <a:off x="0" y="6473952"/>
+            <a:ext cx="12191695" cy="384048"/>
+          </a:xfrm>
+          <a:prstGeom prst="rect">
+            <a:avLst/>
+          </a:prstGeom>
+          <a:solidFill>
+            <a:srgbClr val="1F3864"/>
+          </a:solidFill>
+          <a:ln>
+            <a:noFill/>
+          </a:ln>
+          <a:effectLst/>
+        </p:spPr>
+        <p:style>
+          <a:lnRef idx="1">
+            <a:schemeClr val="accent1"/>
+          </a:lnRef>
+          <a:fillRef idx="3">
+            <a:schemeClr val="accent1"/>
+          </a:fillRef>
+          <a:effectRef idx="2">
+            <a:schemeClr val="accent1"/>
+          </a:effectRef>
+          <a:fontRef idx="minor">
+            <a:schemeClr val="lt1"/>
+          </a:fontRef>
+        </p:style>
+        <p:txBody>
+          <a:bodyPr rtlCol="0" anchor="ctr"/>
+          <a:lstStyle/>
+          <a:p>
+            <a:pPr algn="ctr"/>
+          </a:p>
+        </p:txBody>
+      </p:sp>
+      <p:sp>
+        <p:nvSpPr>
+          <p:cNvPr id="7" name="Rectangle 6"/>
+          <p:cNvSpPr/>
+          <p:nvPr/>
+        </p:nvSpPr>
+        <p:spPr>
+          <a:xfrm>
+            <a:off x="0" y="6473952"/>
+            <a:ext cx="128016" cy="384048"/>
+          </a:xfrm>
+          <a:prstGeom prst="rect">
+            <a:avLst/>
+          </a:prstGeom>
+          <a:solidFill>
+            <a:srgbClr val="C9A227"/>
+          </a:solidFill>
+          <a:ln>
+            <a:noFill/>
+          </a:ln>
+          <a:effectLst/>
+        </p:spPr>
+        <p:style>
+          <a:lnRef idx="1">
+            <a:schemeClr val="accent1"/>
+          </a:lnRef>
+          <a:fillRef idx="3">
+            <a:schemeClr val="accent1"/>
+          </a:fillRef>
+          <a:effectRef idx="2">
+            <a:schemeClr val="accent1"/>
+          </a:effectRef>
+          <a:fontRef idx="minor">
+            <a:schemeClr val="lt1"/>
+          </a:fontRef>
+        </p:style>
+        <p:txBody>
+          <a:bodyPr rtlCol="0" anchor="ctr"/>
+          <a:lstStyle/>
+          <a:p>
+            <a:pPr algn="ctr"/>
+          </a:p>
+        </p:txBody>
+      </p:sp>
+      <p:sp>
+        <p:nvSpPr>
+          <p:cNvPr id="8" name="TextBox 7"/>
+          <p:cNvSpPr txBox="1"/>
+          <p:nvPr/>
+        </p:nvSpPr>
+        <p:spPr>
+          <a:xfrm>
+            <a:off x="274320" y="6473952"/>
+            <a:ext cx="10362895" cy="384048"/>
+          </a:xfrm>
+          <a:prstGeom prst="rect">
+            <a:avLst/>
+          </a:prstGeom>
+          <a:noFill/>
+        </p:spPr>
+        <p:txBody>
+          <a:bodyPr wrap="square" anchor="ctr">
+            <a:spAutoFit/>
+          </a:bodyPr>
+          <a:lstStyle/>
+          <a:p>
             <a:pPr algn="l">
               <a:spcAft>
-                <a:spcPts val="1400"/>
+                <a:spcPts val="600"/>
               </a:spcAft>
             </a:pPr>
             <a:r>
-              <a:rPr sz="1800" b="0">
+              <a:rPr sz="900" b="0">
+                <a:solidFill>
+                  <a:srgbClr val="FFFFFF"/>
+                </a:solidFill>
+                <a:latin typeface="Calibri"/>
+              </a:rPr>
+              <a:t>Sanchay Bhardwaj (2300650100104)  |  B.S.A. College of Engineering &amp; Technology, Mathura</a:t>
+            </a:r>
+          </a:p>
+        </p:txBody>
+      </p:sp>
+      <p:sp>
+        <p:nvSpPr>
+          <p:cNvPr id="9" name="TextBox 8"/>
+          <p:cNvSpPr txBox="1"/>
+          <p:nvPr/>
+        </p:nvSpPr>
+        <p:spPr>
+          <a:xfrm>
+            <a:off x="10728655" y="6473952"/>
+            <a:ext cx="1188720" cy="384048"/>
+          </a:xfrm>
+          <a:prstGeom prst="rect">
+            <a:avLst/>
+          </a:prstGeom>
+          <a:noFill/>
+        </p:spPr>
+        <p:txBody>
+          <a:bodyPr wrap="square" anchor="ctr">
+            <a:spAutoFit/>
+          </a:bodyPr>
+          <a:lstStyle/>
+          <a:p>
+            <a:pPr algn="r">
+              <a:spcAft>
+                <a:spcPts val="600"/>
+              </a:spcAft>
+            </a:pPr>
+            <a:r>
+              <a:rPr sz="900" b="1">
+                <a:solidFill>
+                  <a:srgbClr val="C9A227"/>
+                </a:solidFill>
+                <a:latin typeface="Calibri"/>
+              </a:rPr>
+              <a:t>Slide 12</a:t>
+            </a:r>
+          </a:p>
+        </p:txBody>
+      </p:sp>
+      <p:sp>
+        <p:nvSpPr>
+          <p:cNvPr id="10" name="Rectangle 9"/>
+          <p:cNvSpPr/>
+          <p:nvPr/>
+        </p:nvSpPr>
+        <p:spPr>
+          <a:xfrm>
+            <a:off x="502920" y="1554480"/>
+            <a:ext cx="82296" cy="4297680"/>
+          </a:xfrm>
+          <a:prstGeom prst="rect">
+            <a:avLst/>
+          </a:prstGeom>
+          <a:solidFill>
+            <a:srgbClr val="C9A227"/>
+          </a:solidFill>
+          <a:ln>
+            <a:noFill/>
+          </a:ln>
+          <a:effectLst/>
+        </p:spPr>
+        <p:style>
+          <a:lnRef idx="1">
+            <a:schemeClr val="accent1"/>
+          </a:lnRef>
+          <a:fillRef idx="3">
+            <a:schemeClr val="accent1"/>
+          </a:fillRef>
+          <a:effectRef idx="2">
+            <a:schemeClr val="accent1"/>
+          </a:effectRef>
+          <a:fontRef idx="minor">
+            <a:schemeClr val="lt1"/>
+          </a:fontRef>
+        </p:style>
+        <p:txBody>
+          <a:bodyPr rtlCol="0" anchor="ctr"/>
+          <a:lstStyle/>
+          <a:p>
+            <a:pPr algn="ctr"/>
+          </a:p>
+        </p:txBody>
+      </p:sp>
+      <p:sp>
+        <p:nvSpPr>
+          <p:cNvPr id="11" name="TextBox 10"/>
+          <p:cNvSpPr txBox="1"/>
+          <p:nvPr/>
+        </p:nvSpPr>
+        <p:spPr>
+          <a:xfrm>
+            <a:off x="868680" y="1371600"/>
+            <a:ext cx="10728655" cy="4663440"/>
+          </a:xfrm>
+          <a:prstGeom prst="rect">
+            <a:avLst/>
+          </a:prstGeom>
+          <a:noFill/>
+        </p:spPr>
+        <p:txBody>
+          <a:bodyPr wrap="square" anchor="ctr">
+            <a:spAutoFit/>
+          </a:bodyPr>
+          <a:lstStyle/>
+          <a:p>
+            <a:pPr algn="l">
+              <a:spcAft>
+                <a:spcPts val="2200"/>
+              </a:spcAft>
+            </a:pPr>
+            <a:r>
+              <a:rPr sz="2000" b="0">
                 <a:solidFill>
                   <a:srgbClr val="222222"/>
                 </a:solidFill>
@@ -3995,11 +4698,11 @@
           <a:p>
             <a:pPr algn="l">
               <a:spcAft>
-                <a:spcPts val="1400"/>
+                <a:spcPts val="2200"/>
               </a:spcAft>
             </a:pPr>
             <a:r>
-              <a:rPr sz="1800" b="0">
+              <a:rPr sz="2000" b="0">
                 <a:solidFill>
                   <a:srgbClr val="222222"/>
                 </a:solidFill>
@@ -4011,11 +4714,11 @@
           <a:p>
             <a:pPr algn="l">
               <a:spcAft>
-                <a:spcPts val="1400"/>
+                <a:spcPts val="2200"/>
               </a:spcAft>
             </a:pPr>
             <a:r>
-              <a:rPr sz="1800" b="0">
+              <a:rPr sz="2000" b="0">
                 <a:solidFill>
                   <a:srgbClr val="222222"/>
                 </a:solidFill>
@@ -4027,11 +4730,11 @@
           <a:p>
             <a:pPr algn="l">
               <a:spcAft>
-                <a:spcPts val="1400"/>
+                <a:spcPts val="2200"/>
               </a:spcAft>
             </a:pPr>
             <a:r>
-              <a:rPr sz="1800" b="0">
+              <a:rPr sz="2000" b="0">
                 <a:solidFill>
                   <a:srgbClr val="222222"/>
                 </a:solidFill>
@@ -4112,7 +4815,7 @@
         </p:nvSpPr>
         <p:spPr>
           <a:xfrm>
-            <a:off x="0" y="3566160"/>
+            <a:off x="0" y="3246120"/>
             <a:ext cx="12191695" cy="54864"/>
           </a:xfrm>
           <a:prstGeom prst="rect">
@@ -4148,16 +4851,40 @@
           </a:p>
         </p:txBody>
       </p:sp>
-      <p:sp>
-        <p:nvSpPr>
-          <p:cNvPr id="4" name="TextBox 3"/>
+      <p:pic>
+        <p:nvPicPr>
+          <p:cNvPr id="4" name="Picture 3" descr="college_logo_navy.png"/>
+          <p:cNvPicPr>
+            <a:picLocks noChangeAspect="1"/>
+          </p:cNvPicPr>
+          <p:nvPr/>
+        </p:nvPicPr>
+        <p:blipFill>
+          <a:blip r:embed="rId2"/>
+          <a:stretch>
+            <a:fillRect/>
+          </a:stretch>
+        </p:blipFill>
+        <p:spPr>
+          <a:xfrm>
+            <a:off x="5455767" y="822960"/>
+            <a:ext cx="1280160" cy="1280160"/>
+          </a:xfrm>
+          <a:prstGeom prst="rect">
+            <a:avLst/>
+          </a:prstGeom>
+        </p:spPr>
+      </p:pic>
+      <p:sp>
+        <p:nvSpPr>
+          <p:cNvPr id="5" name="TextBox 4"/>
           <p:cNvSpPr txBox="1"/>
           <p:nvPr/>
         </p:nvSpPr>
         <p:spPr>
           <a:xfrm>
-            <a:off x="914400" y="2377440"/>
-            <a:ext cx="10362895" cy="1280160"/>
+            <a:off x="914400" y="2468880"/>
+            <a:ext cx="10362895" cy="1097280"/>
           </a:xfrm>
           <a:prstGeom prst="rect">
             <a:avLst/>
@@ -4189,14 +4916,14 @@
       </p:sp>
       <p:sp>
         <p:nvSpPr>
-          <p:cNvPr id="5" name="TextBox 4"/>
+          <p:cNvPr id="6" name="TextBox 5"/>
           <p:cNvSpPr txBox="1"/>
           <p:nvPr/>
         </p:nvSpPr>
         <p:spPr>
           <a:xfrm>
-            <a:off x="914400" y="3840480"/>
-            <a:ext cx="10362895" cy="1097280"/>
+            <a:off x="914400" y="3657600"/>
+            <a:ext cx="10362895" cy="2377440"/>
           </a:xfrm>
           <a:prstGeom prst="rect">
             <a:avLst/>
@@ -4211,7 +4938,7 @@
           <a:p>
             <a:pPr algn="ctr">
               <a:spcAft>
-                <a:spcPts val="800"/>
+                <a:spcPts val="1600"/>
               </a:spcAft>
             </a:pPr>
             <a:r>
@@ -4222,6 +4949,38 @@
                 <a:latin typeface="Calibri"/>
               </a:rPr>
               <a:t>Questions &amp; suggestions are welcome</a:t>
+            </a:r>
+          </a:p>
+          <a:p>
+            <a:pPr algn="ctr">
+              <a:spcAft>
+                <a:spcPts val="300"/>
+              </a:spcAft>
+            </a:pPr>
+            <a:r>
+              <a:rPr sz="1500" b="0">
+                <a:solidFill>
+                  <a:srgbClr val="FFFFFF"/>
+                </a:solidFill>
+                <a:latin typeface="Calibri"/>
+              </a:rPr>
+              <a:t>Sanchay Bhardwaj  (2300650100104)</a:t>
+            </a:r>
+          </a:p>
+          <a:p>
+            <a:pPr algn="ctr">
+              <a:spcAft>
+                <a:spcPts val="300"/>
+              </a:spcAft>
+            </a:pPr>
+            <a:r>
+              <a:rPr sz="1400" b="0">
+                <a:solidFill>
+                  <a:srgbClr val="FFFFFF"/>
+                </a:solidFill>
+                <a:latin typeface="Calibri"/>
+              </a:rPr>
+              <a:t>Guide: Mrs. Ashna Thakur</a:t>
             </a:r>
           </a:p>
           <a:p>
@@ -4231,13 +4990,13 @@
               </a:spcAft>
             </a:pPr>
             <a:r>
-              <a:rPr sz="1400" b="0">
-                <a:solidFill>
-                  <a:srgbClr val="FFFFFF"/>
+              <a:rPr sz="1300" b="0">
+                <a:solidFill>
+                  <a:srgbClr val="C9A227"/>
                 </a:solidFill>
                 <a:latin typeface="Calibri"/>
               </a:rPr>
-              <a:t>Gold Price Prediction using Machine Learning</a:t>
+              <a:t>B.S.A. College of Engineering &amp; Technology, Mathura</a:t>
             </a:r>
           </a:p>
         </p:txBody>
@@ -4313,7 +5072,7 @@
         <p:spPr>
           <a:xfrm>
             <a:off x="0" y="960120"/>
-            <a:ext cx="12191695" cy="54864"/>
+            <a:ext cx="12191695" cy="64008"/>
           </a:xfrm>
           <a:prstGeom prst="rect">
             <a:avLst/>
@@ -4356,8 +5115,8 @@
         </p:nvSpPr>
         <p:spPr>
           <a:xfrm>
-            <a:off x="457200" y="109728"/>
-            <a:ext cx="11277295" cy="777240"/>
+            <a:off x="457200" y="137160"/>
+            <a:ext cx="8351215" cy="731520"/>
           </a:xfrm>
           <a:prstGeom prst="rect">
             <a:avLst/>
@@ -4395,8 +5154,8 @@
         </p:nvSpPr>
         <p:spPr>
           <a:xfrm>
-            <a:off x="640080" y="1371600"/>
-            <a:ext cx="10911535" cy="5029200"/>
+            <a:off x="8534095" y="137160"/>
+            <a:ext cx="3200400" cy="731520"/>
           </a:xfrm>
           <a:prstGeom prst="rect">
             <a:avLst/>
@@ -4404,18 +5163,267 @@
           <a:noFill/>
         </p:spPr>
         <p:txBody>
-          <a:bodyPr wrap="square">
+          <a:bodyPr wrap="square" anchor="ctr">
             <a:spAutoFit/>
           </a:bodyPr>
           <a:lstStyle/>
           <a:p>
+            <a:pPr algn="r">
+              <a:spcAft>
+                <a:spcPts val="600"/>
+              </a:spcAft>
+            </a:pPr>
+            <a:r>
+              <a:rPr sz="1200" b="1">
+                <a:solidFill>
+                  <a:srgbClr val="C9A227"/>
+                </a:solidFill>
+                <a:latin typeface="Calibri"/>
+              </a:rPr>
+              <a:t>Gold Price Prediction</a:t>
+            </a:r>
+          </a:p>
+        </p:txBody>
+      </p:sp>
+      <p:sp>
+        <p:nvSpPr>
+          <p:cNvPr id="6" name="Rectangle 5"/>
+          <p:cNvSpPr/>
+          <p:nvPr/>
+        </p:nvSpPr>
+        <p:spPr>
+          <a:xfrm>
+            <a:off x="0" y="6473952"/>
+            <a:ext cx="12191695" cy="384048"/>
+          </a:xfrm>
+          <a:prstGeom prst="rect">
+            <a:avLst/>
+          </a:prstGeom>
+          <a:solidFill>
+            <a:srgbClr val="1F3864"/>
+          </a:solidFill>
+          <a:ln>
+            <a:noFill/>
+          </a:ln>
+          <a:effectLst/>
+        </p:spPr>
+        <p:style>
+          <a:lnRef idx="1">
+            <a:schemeClr val="accent1"/>
+          </a:lnRef>
+          <a:fillRef idx="3">
+            <a:schemeClr val="accent1"/>
+          </a:fillRef>
+          <a:effectRef idx="2">
+            <a:schemeClr val="accent1"/>
+          </a:effectRef>
+          <a:fontRef idx="minor">
+            <a:schemeClr val="lt1"/>
+          </a:fontRef>
+        </p:style>
+        <p:txBody>
+          <a:bodyPr rtlCol="0" anchor="ctr"/>
+          <a:lstStyle/>
+          <a:p>
+            <a:pPr algn="ctr"/>
+          </a:p>
+        </p:txBody>
+      </p:sp>
+      <p:sp>
+        <p:nvSpPr>
+          <p:cNvPr id="7" name="Rectangle 6"/>
+          <p:cNvSpPr/>
+          <p:nvPr/>
+        </p:nvSpPr>
+        <p:spPr>
+          <a:xfrm>
+            <a:off x="0" y="6473952"/>
+            <a:ext cx="128016" cy="384048"/>
+          </a:xfrm>
+          <a:prstGeom prst="rect">
+            <a:avLst/>
+          </a:prstGeom>
+          <a:solidFill>
+            <a:srgbClr val="C9A227"/>
+          </a:solidFill>
+          <a:ln>
+            <a:noFill/>
+          </a:ln>
+          <a:effectLst/>
+        </p:spPr>
+        <p:style>
+          <a:lnRef idx="1">
+            <a:schemeClr val="accent1"/>
+          </a:lnRef>
+          <a:fillRef idx="3">
+            <a:schemeClr val="accent1"/>
+          </a:fillRef>
+          <a:effectRef idx="2">
+            <a:schemeClr val="accent1"/>
+          </a:effectRef>
+          <a:fontRef idx="minor">
+            <a:schemeClr val="lt1"/>
+          </a:fontRef>
+        </p:style>
+        <p:txBody>
+          <a:bodyPr rtlCol="0" anchor="ctr"/>
+          <a:lstStyle/>
+          <a:p>
+            <a:pPr algn="ctr"/>
+          </a:p>
+        </p:txBody>
+      </p:sp>
+      <p:sp>
+        <p:nvSpPr>
+          <p:cNvPr id="8" name="TextBox 7"/>
+          <p:cNvSpPr txBox="1"/>
+          <p:nvPr/>
+        </p:nvSpPr>
+        <p:spPr>
+          <a:xfrm>
+            <a:off x="274320" y="6473952"/>
+            <a:ext cx="10362895" cy="384048"/>
+          </a:xfrm>
+          <a:prstGeom prst="rect">
+            <a:avLst/>
+          </a:prstGeom>
+          <a:noFill/>
+        </p:spPr>
+        <p:txBody>
+          <a:bodyPr wrap="square" anchor="ctr">
+            <a:spAutoFit/>
+          </a:bodyPr>
+          <a:lstStyle/>
+          <a:p>
             <a:pPr algn="l">
               <a:spcAft>
-                <a:spcPts val="1400"/>
+                <a:spcPts val="600"/>
               </a:spcAft>
             </a:pPr>
             <a:r>
-              <a:rPr sz="1800" b="0">
+              <a:rPr sz="900" b="0">
+                <a:solidFill>
+                  <a:srgbClr val="FFFFFF"/>
+                </a:solidFill>
+                <a:latin typeface="Calibri"/>
+              </a:rPr>
+              <a:t>Sanchay Bhardwaj (2300650100104)  |  B.S.A. College of Engineering &amp; Technology, Mathura</a:t>
+            </a:r>
+          </a:p>
+        </p:txBody>
+      </p:sp>
+      <p:sp>
+        <p:nvSpPr>
+          <p:cNvPr id="9" name="TextBox 8"/>
+          <p:cNvSpPr txBox="1"/>
+          <p:nvPr/>
+        </p:nvSpPr>
+        <p:spPr>
+          <a:xfrm>
+            <a:off x="10728655" y="6473952"/>
+            <a:ext cx="1188720" cy="384048"/>
+          </a:xfrm>
+          <a:prstGeom prst="rect">
+            <a:avLst/>
+          </a:prstGeom>
+          <a:noFill/>
+        </p:spPr>
+        <p:txBody>
+          <a:bodyPr wrap="square" anchor="ctr">
+            <a:spAutoFit/>
+          </a:bodyPr>
+          <a:lstStyle/>
+          <a:p>
+            <a:pPr algn="r">
+              <a:spcAft>
+                <a:spcPts val="600"/>
+              </a:spcAft>
+            </a:pPr>
+            <a:r>
+              <a:rPr sz="900" b="1">
+                <a:solidFill>
+                  <a:srgbClr val="C9A227"/>
+                </a:solidFill>
+                <a:latin typeface="Calibri"/>
+              </a:rPr>
+              <a:t>Slide 2</a:t>
+            </a:r>
+          </a:p>
+        </p:txBody>
+      </p:sp>
+      <p:sp>
+        <p:nvSpPr>
+          <p:cNvPr id="10" name="Rectangle 9"/>
+          <p:cNvSpPr/>
+          <p:nvPr/>
+        </p:nvSpPr>
+        <p:spPr>
+          <a:xfrm>
+            <a:off x="502920" y="1554480"/>
+            <a:ext cx="82296" cy="4297680"/>
+          </a:xfrm>
+          <a:prstGeom prst="rect">
+            <a:avLst/>
+          </a:prstGeom>
+          <a:solidFill>
+            <a:srgbClr val="C9A227"/>
+          </a:solidFill>
+          <a:ln>
+            <a:noFill/>
+          </a:ln>
+          <a:effectLst/>
+        </p:spPr>
+        <p:style>
+          <a:lnRef idx="1">
+            <a:schemeClr val="accent1"/>
+          </a:lnRef>
+          <a:fillRef idx="3">
+            <a:schemeClr val="accent1"/>
+          </a:fillRef>
+          <a:effectRef idx="2">
+            <a:schemeClr val="accent1"/>
+          </a:effectRef>
+          <a:fontRef idx="minor">
+            <a:schemeClr val="lt1"/>
+          </a:fontRef>
+        </p:style>
+        <p:txBody>
+          <a:bodyPr rtlCol="0" anchor="ctr"/>
+          <a:lstStyle/>
+          <a:p>
+            <a:pPr algn="ctr"/>
+          </a:p>
+        </p:txBody>
+      </p:sp>
+      <p:sp>
+        <p:nvSpPr>
+          <p:cNvPr id="11" name="TextBox 10"/>
+          <p:cNvSpPr txBox="1"/>
+          <p:nvPr/>
+        </p:nvSpPr>
+        <p:spPr>
+          <a:xfrm>
+            <a:off x="868680" y="1371600"/>
+            <a:ext cx="10728655" cy="4663440"/>
+          </a:xfrm>
+          <a:prstGeom prst="rect">
+            <a:avLst/>
+          </a:prstGeom>
+          <a:noFill/>
+        </p:spPr>
+        <p:txBody>
+          <a:bodyPr wrap="square" anchor="ctr">
+            <a:spAutoFit/>
+          </a:bodyPr>
+          <a:lstStyle/>
+          <a:p>
+            <a:pPr algn="l">
+              <a:spcAft>
+                <a:spcPts val="2200"/>
+              </a:spcAft>
+            </a:pPr>
+            <a:r>
+              <a:rPr sz="2000" b="0">
                 <a:solidFill>
                   <a:srgbClr val="222222"/>
                 </a:solidFill>
@@ -4427,11 +5435,11 @@
           <a:p>
             <a:pPr algn="l">
               <a:spcAft>
-                <a:spcPts val="1400"/>
+                <a:spcPts val="2200"/>
               </a:spcAft>
             </a:pPr>
             <a:r>
-              <a:rPr sz="1800" b="0">
+              <a:rPr sz="2000" b="0">
                 <a:solidFill>
                   <a:srgbClr val="222222"/>
                 </a:solidFill>
@@ -4443,11 +5451,11 @@
           <a:p>
             <a:pPr algn="l">
               <a:spcAft>
-                <a:spcPts val="1400"/>
+                <a:spcPts val="2200"/>
               </a:spcAft>
             </a:pPr>
             <a:r>
-              <a:rPr sz="1800" b="0">
+              <a:rPr sz="2000" b="0">
                 <a:solidFill>
                   <a:srgbClr val="222222"/>
                 </a:solidFill>
@@ -4459,11 +5467,11 @@
           <a:p>
             <a:pPr algn="l">
               <a:spcAft>
-                <a:spcPts val="1400"/>
+                <a:spcPts val="2200"/>
               </a:spcAft>
             </a:pPr>
             <a:r>
-              <a:rPr sz="1800" b="0">
+              <a:rPr sz="2000" b="0">
                 <a:solidFill>
                   <a:srgbClr val="222222"/>
                 </a:solidFill>
@@ -4545,7 +5553,7 @@
         <p:spPr>
           <a:xfrm>
             <a:off x="0" y="960120"/>
-            <a:ext cx="12191695" cy="54864"/>
+            <a:ext cx="12191695" cy="64008"/>
           </a:xfrm>
           <a:prstGeom prst="rect">
             <a:avLst/>
@@ -4588,8 +5596,8 @@
         </p:nvSpPr>
         <p:spPr>
           <a:xfrm>
-            <a:off x="457200" y="109728"/>
-            <a:ext cx="11277295" cy="777240"/>
+            <a:off x="457200" y="137160"/>
+            <a:ext cx="8351215" cy="731520"/>
           </a:xfrm>
           <a:prstGeom prst="rect">
             <a:avLst/>
@@ -4627,8 +5635,8 @@
         </p:nvSpPr>
         <p:spPr>
           <a:xfrm>
-            <a:off x="640080" y="1371600"/>
-            <a:ext cx="10911535" cy="5029200"/>
+            <a:off x="8534095" y="137160"/>
+            <a:ext cx="3200400" cy="731520"/>
           </a:xfrm>
           <a:prstGeom prst="rect">
             <a:avLst/>
@@ -4636,18 +5644,267 @@
           <a:noFill/>
         </p:spPr>
         <p:txBody>
-          <a:bodyPr wrap="square">
+          <a:bodyPr wrap="square" anchor="ctr">
             <a:spAutoFit/>
           </a:bodyPr>
           <a:lstStyle/>
           <a:p>
+            <a:pPr algn="r">
+              <a:spcAft>
+                <a:spcPts val="600"/>
+              </a:spcAft>
+            </a:pPr>
+            <a:r>
+              <a:rPr sz="1200" b="1">
+                <a:solidFill>
+                  <a:srgbClr val="C9A227"/>
+                </a:solidFill>
+                <a:latin typeface="Calibri"/>
+              </a:rPr>
+              <a:t>Gold Price Prediction</a:t>
+            </a:r>
+          </a:p>
+        </p:txBody>
+      </p:sp>
+      <p:sp>
+        <p:nvSpPr>
+          <p:cNvPr id="6" name="Rectangle 5"/>
+          <p:cNvSpPr/>
+          <p:nvPr/>
+        </p:nvSpPr>
+        <p:spPr>
+          <a:xfrm>
+            <a:off x="0" y="6473952"/>
+            <a:ext cx="12191695" cy="384048"/>
+          </a:xfrm>
+          <a:prstGeom prst="rect">
+            <a:avLst/>
+          </a:prstGeom>
+          <a:solidFill>
+            <a:srgbClr val="1F3864"/>
+          </a:solidFill>
+          <a:ln>
+            <a:noFill/>
+          </a:ln>
+          <a:effectLst/>
+        </p:spPr>
+        <p:style>
+          <a:lnRef idx="1">
+            <a:schemeClr val="accent1"/>
+          </a:lnRef>
+          <a:fillRef idx="3">
+            <a:schemeClr val="accent1"/>
+          </a:fillRef>
+          <a:effectRef idx="2">
+            <a:schemeClr val="accent1"/>
+          </a:effectRef>
+          <a:fontRef idx="minor">
+            <a:schemeClr val="lt1"/>
+          </a:fontRef>
+        </p:style>
+        <p:txBody>
+          <a:bodyPr rtlCol="0" anchor="ctr"/>
+          <a:lstStyle/>
+          <a:p>
+            <a:pPr algn="ctr"/>
+          </a:p>
+        </p:txBody>
+      </p:sp>
+      <p:sp>
+        <p:nvSpPr>
+          <p:cNvPr id="7" name="Rectangle 6"/>
+          <p:cNvSpPr/>
+          <p:nvPr/>
+        </p:nvSpPr>
+        <p:spPr>
+          <a:xfrm>
+            <a:off x="0" y="6473952"/>
+            <a:ext cx="128016" cy="384048"/>
+          </a:xfrm>
+          <a:prstGeom prst="rect">
+            <a:avLst/>
+          </a:prstGeom>
+          <a:solidFill>
+            <a:srgbClr val="C9A227"/>
+          </a:solidFill>
+          <a:ln>
+            <a:noFill/>
+          </a:ln>
+          <a:effectLst/>
+        </p:spPr>
+        <p:style>
+          <a:lnRef idx="1">
+            <a:schemeClr val="accent1"/>
+          </a:lnRef>
+          <a:fillRef idx="3">
+            <a:schemeClr val="accent1"/>
+          </a:fillRef>
+          <a:effectRef idx="2">
+            <a:schemeClr val="accent1"/>
+          </a:effectRef>
+          <a:fontRef idx="minor">
+            <a:schemeClr val="lt1"/>
+          </a:fontRef>
+        </p:style>
+        <p:txBody>
+          <a:bodyPr rtlCol="0" anchor="ctr"/>
+          <a:lstStyle/>
+          <a:p>
+            <a:pPr algn="ctr"/>
+          </a:p>
+        </p:txBody>
+      </p:sp>
+      <p:sp>
+        <p:nvSpPr>
+          <p:cNvPr id="8" name="TextBox 7"/>
+          <p:cNvSpPr txBox="1"/>
+          <p:nvPr/>
+        </p:nvSpPr>
+        <p:spPr>
+          <a:xfrm>
+            <a:off x="274320" y="6473952"/>
+            <a:ext cx="10362895" cy="384048"/>
+          </a:xfrm>
+          <a:prstGeom prst="rect">
+            <a:avLst/>
+          </a:prstGeom>
+          <a:noFill/>
+        </p:spPr>
+        <p:txBody>
+          <a:bodyPr wrap="square" anchor="ctr">
+            <a:spAutoFit/>
+          </a:bodyPr>
+          <a:lstStyle/>
+          <a:p>
             <a:pPr algn="l">
               <a:spcAft>
-                <a:spcPts val="1400"/>
+                <a:spcPts val="600"/>
               </a:spcAft>
             </a:pPr>
             <a:r>
-              <a:rPr sz="1800" b="0">
+              <a:rPr sz="900" b="0">
+                <a:solidFill>
+                  <a:srgbClr val="FFFFFF"/>
+                </a:solidFill>
+                <a:latin typeface="Calibri"/>
+              </a:rPr>
+              <a:t>Sanchay Bhardwaj (2300650100104)  |  B.S.A. College of Engineering &amp; Technology, Mathura</a:t>
+            </a:r>
+          </a:p>
+        </p:txBody>
+      </p:sp>
+      <p:sp>
+        <p:nvSpPr>
+          <p:cNvPr id="9" name="TextBox 8"/>
+          <p:cNvSpPr txBox="1"/>
+          <p:nvPr/>
+        </p:nvSpPr>
+        <p:spPr>
+          <a:xfrm>
+            <a:off x="10728655" y="6473952"/>
+            <a:ext cx="1188720" cy="384048"/>
+          </a:xfrm>
+          <a:prstGeom prst="rect">
+            <a:avLst/>
+          </a:prstGeom>
+          <a:noFill/>
+        </p:spPr>
+        <p:txBody>
+          <a:bodyPr wrap="square" anchor="ctr">
+            <a:spAutoFit/>
+          </a:bodyPr>
+          <a:lstStyle/>
+          <a:p>
+            <a:pPr algn="r">
+              <a:spcAft>
+                <a:spcPts val="600"/>
+              </a:spcAft>
+            </a:pPr>
+            <a:r>
+              <a:rPr sz="900" b="1">
+                <a:solidFill>
+                  <a:srgbClr val="C9A227"/>
+                </a:solidFill>
+                <a:latin typeface="Calibri"/>
+              </a:rPr>
+              <a:t>Slide 3</a:t>
+            </a:r>
+          </a:p>
+        </p:txBody>
+      </p:sp>
+      <p:sp>
+        <p:nvSpPr>
+          <p:cNvPr id="10" name="Rectangle 9"/>
+          <p:cNvSpPr/>
+          <p:nvPr/>
+        </p:nvSpPr>
+        <p:spPr>
+          <a:xfrm>
+            <a:off x="502920" y="1554480"/>
+            <a:ext cx="82296" cy="4297680"/>
+          </a:xfrm>
+          <a:prstGeom prst="rect">
+            <a:avLst/>
+          </a:prstGeom>
+          <a:solidFill>
+            <a:srgbClr val="C9A227"/>
+          </a:solidFill>
+          <a:ln>
+            <a:noFill/>
+          </a:ln>
+          <a:effectLst/>
+        </p:spPr>
+        <p:style>
+          <a:lnRef idx="1">
+            <a:schemeClr val="accent1"/>
+          </a:lnRef>
+          <a:fillRef idx="3">
+            <a:schemeClr val="accent1"/>
+          </a:fillRef>
+          <a:effectRef idx="2">
+            <a:schemeClr val="accent1"/>
+          </a:effectRef>
+          <a:fontRef idx="minor">
+            <a:schemeClr val="lt1"/>
+          </a:fontRef>
+        </p:style>
+        <p:txBody>
+          <a:bodyPr rtlCol="0" anchor="ctr"/>
+          <a:lstStyle/>
+          <a:p>
+            <a:pPr algn="ctr"/>
+          </a:p>
+        </p:txBody>
+      </p:sp>
+      <p:sp>
+        <p:nvSpPr>
+          <p:cNvPr id="11" name="TextBox 10"/>
+          <p:cNvSpPr txBox="1"/>
+          <p:nvPr/>
+        </p:nvSpPr>
+        <p:spPr>
+          <a:xfrm>
+            <a:off x="868680" y="1371600"/>
+            <a:ext cx="10728655" cy="4663440"/>
+          </a:xfrm>
+          <a:prstGeom prst="rect">
+            <a:avLst/>
+          </a:prstGeom>
+          <a:noFill/>
+        </p:spPr>
+        <p:txBody>
+          <a:bodyPr wrap="square" anchor="ctr">
+            <a:spAutoFit/>
+          </a:bodyPr>
+          <a:lstStyle/>
+          <a:p>
+            <a:pPr algn="l">
+              <a:spcAft>
+                <a:spcPts val="2200"/>
+              </a:spcAft>
+            </a:pPr>
+            <a:r>
+              <a:rPr sz="2000" b="0">
                 <a:solidFill>
                   <a:srgbClr val="222222"/>
                 </a:solidFill>
@@ -4659,11 +5916,11 @@
           <a:p>
             <a:pPr algn="l">
               <a:spcAft>
-                <a:spcPts val="1400"/>
+                <a:spcPts val="2200"/>
               </a:spcAft>
             </a:pPr>
             <a:r>
-              <a:rPr sz="1800" b="0">
+              <a:rPr sz="2000" b="0">
                 <a:solidFill>
                   <a:srgbClr val="222222"/>
                 </a:solidFill>
@@ -4675,17 +5932,33 @@
           <a:p>
             <a:pPr algn="l">
               <a:spcAft>
-                <a:spcPts val="1400"/>
+                <a:spcPts val="2200"/>
               </a:spcAft>
             </a:pPr>
             <a:r>
-              <a:rPr sz="1800" b="0">
+              <a:rPr sz="2000" b="0">
                 <a:solidFill>
                   <a:srgbClr val="222222"/>
                 </a:solidFill>
                 <a:latin typeface="Calibri"/>
               </a:rPr>
               <a:t>•   Multiple models are trained and the most accurate one is kept for prediction.</a:t>
+            </a:r>
+          </a:p>
+          <a:p>
+            <a:pPr algn="l">
+              <a:spcAft>
+                <a:spcPts val="2200"/>
+              </a:spcAft>
+            </a:pPr>
+            <a:r>
+              <a:rPr sz="2000" b="0">
+                <a:solidFill>
+                  <a:srgbClr val="222222"/>
+                </a:solidFill>
+                <a:latin typeface="Calibri"/>
+              </a:rPr>
+              <a:t>•   The winning model is then wrapped in a simple desktop application.</a:t>
             </a:r>
           </a:p>
         </p:txBody>
@@ -4761,7 +6034,7 @@
         <p:spPr>
           <a:xfrm>
             <a:off x="0" y="960120"/>
-            <a:ext cx="12191695" cy="54864"/>
+            <a:ext cx="12191695" cy="64008"/>
           </a:xfrm>
           <a:prstGeom prst="rect">
             <a:avLst/>
@@ -4804,8 +6077,8 @@
         </p:nvSpPr>
         <p:spPr>
           <a:xfrm>
-            <a:off x="457200" y="109728"/>
-            <a:ext cx="11277295" cy="777240"/>
+            <a:off x="457200" y="137160"/>
+            <a:ext cx="8351215" cy="731520"/>
           </a:xfrm>
           <a:prstGeom prst="rect">
             <a:avLst/>
@@ -4843,8 +6116,8 @@
         </p:nvSpPr>
         <p:spPr>
           <a:xfrm>
-            <a:off x="640080" y="1371600"/>
-            <a:ext cx="10911535" cy="5029200"/>
+            <a:off x="8534095" y="137160"/>
+            <a:ext cx="3200400" cy="731520"/>
           </a:xfrm>
           <a:prstGeom prst="rect">
             <a:avLst/>
@@ -4852,18 +6125,267 @@
           <a:noFill/>
         </p:spPr>
         <p:txBody>
-          <a:bodyPr wrap="square">
+          <a:bodyPr wrap="square" anchor="ctr">
             <a:spAutoFit/>
           </a:bodyPr>
           <a:lstStyle/>
           <a:p>
+            <a:pPr algn="r">
+              <a:spcAft>
+                <a:spcPts val="600"/>
+              </a:spcAft>
+            </a:pPr>
+            <a:r>
+              <a:rPr sz="1200" b="1">
+                <a:solidFill>
+                  <a:srgbClr val="C9A227"/>
+                </a:solidFill>
+                <a:latin typeface="Calibri"/>
+              </a:rPr>
+              <a:t>Gold Price Prediction</a:t>
+            </a:r>
+          </a:p>
+        </p:txBody>
+      </p:sp>
+      <p:sp>
+        <p:nvSpPr>
+          <p:cNvPr id="6" name="Rectangle 5"/>
+          <p:cNvSpPr/>
+          <p:nvPr/>
+        </p:nvSpPr>
+        <p:spPr>
+          <a:xfrm>
+            <a:off x="0" y="6473952"/>
+            <a:ext cx="12191695" cy="384048"/>
+          </a:xfrm>
+          <a:prstGeom prst="rect">
+            <a:avLst/>
+          </a:prstGeom>
+          <a:solidFill>
+            <a:srgbClr val="1F3864"/>
+          </a:solidFill>
+          <a:ln>
+            <a:noFill/>
+          </a:ln>
+          <a:effectLst/>
+        </p:spPr>
+        <p:style>
+          <a:lnRef idx="1">
+            <a:schemeClr val="accent1"/>
+          </a:lnRef>
+          <a:fillRef idx="3">
+            <a:schemeClr val="accent1"/>
+          </a:fillRef>
+          <a:effectRef idx="2">
+            <a:schemeClr val="accent1"/>
+          </a:effectRef>
+          <a:fontRef idx="minor">
+            <a:schemeClr val="lt1"/>
+          </a:fontRef>
+        </p:style>
+        <p:txBody>
+          <a:bodyPr rtlCol="0" anchor="ctr"/>
+          <a:lstStyle/>
+          <a:p>
+            <a:pPr algn="ctr"/>
+          </a:p>
+        </p:txBody>
+      </p:sp>
+      <p:sp>
+        <p:nvSpPr>
+          <p:cNvPr id="7" name="Rectangle 6"/>
+          <p:cNvSpPr/>
+          <p:nvPr/>
+        </p:nvSpPr>
+        <p:spPr>
+          <a:xfrm>
+            <a:off x="0" y="6473952"/>
+            <a:ext cx="128016" cy="384048"/>
+          </a:xfrm>
+          <a:prstGeom prst="rect">
+            <a:avLst/>
+          </a:prstGeom>
+          <a:solidFill>
+            <a:srgbClr val="C9A227"/>
+          </a:solidFill>
+          <a:ln>
+            <a:noFill/>
+          </a:ln>
+          <a:effectLst/>
+        </p:spPr>
+        <p:style>
+          <a:lnRef idx="1">
+            <a:schemeClr val="accent1"/>
+          </a:lnRef>
+          <a:fillRef idx="3">
+            <a:schemeClr val="accent1"/>
+          </a:fillRef>
+          <a:effectRef idx="2">
+            <a:schemeClr val="accent1"/>
+          </a:effectRef>
+          <a:fontRef idx="minor">
+            <a:schemeClr val="lt1"/>
+          </a:fontRef>
+        </p:style>
+        <p:txBody>
+          <a:bodyPr rtlCol="0" anchor="ctr"/>
+          <a:lstStyle/>
+          <a:p>
+            <a:pPr algn="ctr"/>
+          </a:p>
+        </p:txBody>
+      </p:sp>
+      <p:sp>
+        <p:nvSpPr>
+          <p:cNvPr id="8" name="TextBox 7"/>
+          <p:cNvSpPr txBox="1"/>
+          <p:nvPr/>
+        </p:nvSpPr>
+        <p:spPr>
+          <a:xfrm>
+            <a:off x="274320" y="6473952"/>
+            <a:ext cx="10362895" cy="384048"/>
+          </a:xfrm>
+          <a:prstGeom prst="rect">
+            <a:avLst/>
+          </a:prstGeom>
+          <a:noFill/>
+        </p:spPr>
+        <p:txBody>
+          <a:bodyPr wrap="square" anchor="ctr">
+            <a:spAutoFit/>
+          </a:bodyPr>
+          <a:lstStyle/>
+          <a:p>
             <a:pPr algn="l">
               <a:spcAft>
-                <a:spcPts val="1400"/>
+                <a:spcPts val="600"/>
               </a:spcAft>
             </a:pPr>
             <a:r>
-              <a:rPr sz="1800" b="0">
+              <a:rPr sz="900" b="0">
+                <a:solidFill>
+                  <a:srgbClr val="FFFFFF"/>
+                </a:solidFill>
+                <a:latin typeface="Calibri"/>
+              </a:rPr>
+              <a:t>Sanchay Bhardwaj (2300650100104)  |  B.S.A. College of Engineering &amp; Technology, Mathura</a:t>
+            </a:r>
+          </a:p>
+        </p:txBody>
+      </p:sp>
+      <p:sp>
+        <p:nvSpPr>
+          <p:cNvPr id="9" name="TextBox 8"/>
+          <p:cNvSpPr txBox="1"/>
+          <p:nvPr/>
+        </p:nvSpPr>
+        <p:spPr>
+          <a:xfrm>
+            <a:off x="10728655" y="6473952"/>
+            <a:ext cx="1188720" cy="384048"/>
+          </a:xfrm>
+          <a:prstGeom prst="rect">
+            <a:avLst/>
+          </a:prstGeom>
+          <a:noFill/>
+        </p:spPr>
+        <p:txBody>
+          <a:bodyPr wrap="square" anchor="ctr">
+            <a:spAutoFit/>
+          </a:bodyPr>
+          <a:lstStyle/>
+          <a:p>
+            <a:pPr algn="r">
+              <a:spcAft>
+                <a:spcPts val="600"/>
+              </a:spcAft>
+            </a:pPr>
+            <a:r>
+              <a:rPr sz="900" b="1">
+                <a:solidFill>
+                  <a:srgbClr val="C9A227"/>
+                </a:solidFill>
+                <a:latin typeface="Calibri"/>
+              </a:rPr>
+              <a:t>Slide 4</a:t>
+            </a:r>
+          </a:p>
+        </p:txBody>
+      </p:sp>
+      <p:sp>
+        <p:nvSpPr>
+          <p:cNvPr id="10" name="Rectangle 9"/>
+          <p:cNvSpPr/>
+          <p:nvPr/>
+        </p:nvSpPr>
+        <p:spPr>
+          <a:xfrm>
+            <a:off x="502920" y="1554480"/>
+            <a:ext cx="82296" cy="4297680"/>
+          </a:xfrm>
+          <a:prstGeom prst="rect">
+            <a:avLst/>
+          </a:prstGeom>
+          <a:solidFill>
+            <a:srgbClr val="C9A227"/>
+          </a:solidFill>
+          <a:ln>
+            <a:noFill/>
+          </a:ln>
+          <a:effectLst/>
+        </p:spPr>
+        <p:style>
+          <a:lnRef idx="1">
+            <a:schemeClr val="accent1"/>
+          </a:lnRef>
+          <a:fillRef idx="3">
+            <a:schemeClr val="accent1"/>
+          </a:fillRef>
+          <a:effectRef idx="2">
+            <a:schemeClr val="accent1"/>
+          </a:effectRef>
+          <a:fontRef idx="minor">
+            <a:schemeClr val="lt1"/>
+          </a:fontRef>
+        </p:style>
+        <p:txBody>
+          <a:bodyPr rtlCol="0" anchor="ctr"/>
+          <a:lstStyle/>
+          <a:p>
+            <a:pPr algn="ctr"/>
+          </a:p>
+        </p:txBody>
+      </p:sp>
+      <p:sp>
+        <p:nvSpPr>
+          <p:cNvPr id="11" name="TextBox 10"/>
+          <p:cNvSpPr txBox="1"/>
+          <p:nvPr/>
+        </p:nvSpPr>
+        <p:spPr>
+          <a:xfrm>
+            <a:off x="868680" y="1371600"/>
+            <a:ext cx="10728655" cy="4663440"/>
+          </a:xfrm>
+          <a:prstGeom prst="rect">
+            <a:avLst/>
+          </a:prstGeom>
+          <a:noFill/>
+        </p:spPr>
+        <p:txBody>
+          <a:bodyPr wrap="square" anchor="ctr">
+            <a:spAutoFit/>
+          </a:bodyPr>
+          <a:lstStyle/>
+          <a:p>
+            <a:pPr algn="l">
+              <a:spcAft>
+                <a:spcPts val="2200"/>
+              </a:spcAft>
+            </a:pPr>
+            <a:r>
+              <a:rPr sz="2000" b="0">
                 <a:solidFill>
                   <a:srgbClr val="222222"/>
                 </a:solidFill>
@@ -4875,11 +6397,11 @@
           <a:p>
             <a:pPr algn="l">
               <a:spcAft>
-                <a:spcPts val="1400"/>
+                <a:spcPts val="2200"/>
               </a:spcAft>
             </a:pPr>
             <a:r>
-              <a:rPr sz="1800" b="0">
+              <a:rPr sz="2000" b="0">
                 <a:solidFill>
                   <a:srgbClr val="222222"/>
                 </a:solidFill>
@@ -4891,11 +6413,11 @@
           <a:p>
             <a:pPr algn="l">
               <a:spcAft>
-                <a:spcPts val="1400"/>
+                <a:spcPts val="2200"/>
               </a:spcAft>
             </a:pPr>
             <a:r>
-              <a:rPr sz="1800" b="0">
+              <a:rPr sz="2000" b="0">
                 <a:solidFill>
                   <a:srgbClr val="222222"/>
                 </a:solidFill>
@@ -4907,11 +6429,11 @@
           <a:p>
             <a:pPr algn="l">
               <a:spcAft>
-                <a:spcPts val="1400"/>
+                <a:spcPts val="2200"/>
               </a:spcAft>
             </a:pPr>
             <a:r>
-              <a:rPr sz="1800" b="0">
+              <a:rPr sz="2000" b="0">
                 <a:solidFill>
                   <a:srgbClr val="222222"/>
                 </a:solidFill>
@@ -4923,11 +6445,11 @@
           <a:p>
             <a:pPr algn="l">
               <a:spcAft>
-                <a:spcPts val="1400"/>
+                <a:spcPts val="2200"/>
               </a:spcAft>
             </a:pPr>
             <a:r>
-              <a:rPr sz="1800" b="0">
+              <a:rPr sz="2000" b="0">
                 <a:solidFill>
                   <a:srgbClr val="222222"/>
                 </a:solidFill>
@@ -5009,7 +6531,7 @@
         <p:spPr>
           <a:xfrm>
             <a:off x="0" y="960120"/>
-            <a:ext cx="12191695" cy="54864"/>
+            <a:ext cx="12191695" cy="64008"/>
           </a:xfrm>
           <a:prstGeom prst="rect">
             <a:avLst/>
@@ -5052,8 +6574,8 @@
         </p:nvSpPr>
         <p:spPr>
           <a:xfrm>
-            <a:off x="457200" y="109728"/>
-            <a:ext cx="11277295" cy="777240"/>
+            <a:off x="457200" y="137160"/>
+            <a:ext cx="8351215" cy="731520"/>
           </a:xfrm>
           <a:prstGeom prst="rect">
             <a:avLst/>
@@ -5091,8 +6613,8 @@
         </p:nvSpPr>
         <p:spPr>
           <a:xfrm>
-            <a:off x="640080" y="1371600"/>
-            <a:ext cx="10911535" cy="5029200"/>
+            <a:off x="8534095" y="137160"/>
+            <a:ext cx="3200400" cy="731520"/>
           </a:xfrm>
           <a:prstGeom prst="rect">
             <a:avLst/>
@@ -5100,18 +6622,267 @@
           <a:noFill/>
         </p:spPr>
         <p:txBody>
-          <a:bodyPr wrap="square">
+          <a:bodyPr wrap="square" anchor="ctr">
             <a:spAutoFit/>
           </a:bodyPr>
           <a:lstStyle/>
           <a:p>
+            <a:pPr algn="r">
+              <a:spcAft>
+                <a:spcPts val="600"/>
+              </a:spcAft>
+            </a:pPr>
+            <a:r>
+              <a:rPr sz="1200" b="1">
+                <a:solidFill>
+                  <a:srgbClr val="C9A227"/>
+                </a:solidFill>
+                <a:latin typeface="Calibri"/>
+              </a:rPr>
+              <a:t>Gold Price Prediction</a:t>
+            </a:r>
+          </a:p>
+        </p:txBody>
+      </p:sp>
+      <p:sp>
+        <p:nvSpPr>
+          <p:cNvPr id="6" name="Rectangle 5"/>
+          <p:cNvSpPr/>
+          <p:nvPr/>
+        </p:nvSpPr>
+        <p:spPr>
+          <a:xfrm>
+            <a:off x="0" y="6473952"/>
+            <a:ext cx="12191695" cy="384048"/>
+          </a:xfrm>
+          <a:prstGeom prst="rect">
+            <a:avLst/>
+          </a:prstGeom>
+          <a:solidFill>
+            <a:srgbClr val="1F3864"/>
+          </a:solidFill>
+          <a:ln>
+            <a:noFill/>
+          </a:ln>
+          <a:effectLst/>
+        </p:spPr>
+        <p:style>
+          <a:lnRef idx="1">
+            <a:schemeClr val="accent1"/>
+          </a:lnRef>
+          <a:fillRef idx="3">
+            <a:schemeClr val="accent1"/>
+          </a:fillRef>
+          <a:effectRef idx="2">
+            <a:schemeClr val="accent1"/>
+          </a:effectRef>
+          <a:fontRef idx="minor">
+            <a:schemeClr val="lt1"/>
+          </a:fontRef>
+        </p:style>
+        <p:txBody>
+          <a:bodyPr rtlCol="0" anchor="ctr"/>
+          <a:lstStyle/>
+          <a:p>
+            <a:pPr algn="ctr"/>
+          </a:p>
+        </p:txBody>
+      </p:sp>
+      <p:sp>
+        <p:nvSpPr>
+          <p:cNvPr id="7" name="Rectangle 6"/>
+          <p:cNvSpPr/>
+          <p:nvPr/>
+        </p:nvSpPr>
+        <p:spPr>
+          <a:xfrm>
+            <a:off x="0" y="6473952"/>
+            <a:ext cx="128016" cy="384048"/>
+          </a:xfrm>
+          <a:prstGeom prst="rect">
+            <a:avLst/>
+          </a:prstGeom>
+          <a:solidFill>
+            <a:srgbClr val="C9A227"/>
+          </a:solidFill>
+          <a:ln>
+            <a:noFill/>
+          </a:ln>
+          <a:effectLst/>
+        </p:spPr>
+        <p:style>
+          <a:lnRef idx="1">
+            <a:schemeClr val="accent1"/>
+          </a:lnRef>
+          <a:fillRef idx="3">
+            <a:schemeClr val="accent1"/>
+          </a:fillRef>
+          <a:effectRef idx="2">
+            <a:schemeClr val="accent1"/>
+          </a:effectRef>
+          <a:fontRef idx="minor">
+            <a:schemeClr val="lt1"/>
+          </a:fontRef>
+        </p:style>
+        <p:txBody>
+          <a:bodyPr rtlCol="0" anchor="ctr"/>
+          <a:lstStyle/>
+          <a:p>
+            <a:pPr algn="ctr"/>
+          </a:p>
+        </p:txBody>
+      </p:sp>
+      <p:sp>
+        <p:nvSpPr>
+          <p:cNvPr id="8" name="TextBox 7"/>
+          <p:cNvSpPr txBox="1"/>
+          <p:nvPr/>
+        </p:nvSpPr>
+        <p:spPr>
+          <a:xfrm>
+            <a:off x="274320" y="6473952"/>
+            <a:ext cx="10362895" cy="384048"/>
+          </a:xfrm>
+          <a:prstGeom prst="rect">
+            <a:avLst/>
+          </a:prstGeom>
+          <a:noFill/>
+        </p:spPr>
+        <p:txBody>
+          <a:bodyPr wrap="square" anchor="ctr">
+            <a:spAutoFit/>
+          </a:bodyPr>
+          <a:lstStyle/>
+          <a:p>
             <a:pPr algn="l">
               <a:spcAft>
-                <a:spcPts val="1400"/>
+                <a:spcPts val="600"/>
               </a:spcAft>
             </a:pPr>
             <a:r>
-              <a:rPr sz="1800" b="0">
+              <a:rPr sz="900" b="0">
+                <a:solidFill>
+                  <a:srgbClr val="FFFFFF"/>
+                </a:solidFill>
+                <a:latin typeface="Calibri"/>
+              </a:rPr>
+              <a:t>Sanchay Bhardwaj (2300650100104)  |  B.S.A. College of Engineering &amp; Technology, Mathura</a:t>
+            </a:r>
+          </a:p>
+        </p:txBody>
+      </p:sp>
+      <p:sp>
+        <p:nvSpPr>
+          <p:cNvPr id="9" name="TextBox 8"/>
+          <p:cNvSpPr txBox="1"/>
+          <p:nvPr/>
+        </p:nvSpPr>
+        <p:spPr>
+          <a:xfrm>
+            <a:off x="10728655" y="6473952"/>
+            <a:ext cx="1188720" cy="384048"/>
+          </a:xfrm>
+          <a:prstGeom prst="rect">
+            <a:avLst/>
+          </a:prstGeom>
+          <a:noFill/>
+        </p:spPr>
+        <p:txBody>
+          <a:bodyPr wrap="square" anchor="ctr">
+            <a:spAutoFit/>
+          </a:bodyPr>
+          <a:lstStyle/>
+          <a:p>
+            <a:pPr algn="r">
+              <a:spcAft>
+                <a:spcPts val="600"/>
+              </a:spcAft>
+            </a:pPr>
+            <a:r>
+              <a:rPr sz="900" b="1">
+                <a:solidFill>
+                  <a:srgbClr val="C9A227"/>
+                </a:solidFill>
+                <a:latin typeface="Calibri"/>
+              </a:rPr>
+              <a:t>Slide 5</a:t>
+            </a:r>
+          </a:p>
+        </p:txBody>
+      </p:sp>
+      <p:sp>
+        <p:nvSpPr>
+          <p:cNvPr id="10" name="Rectangle 9"/>
+          <p:cNvSpPr/>
+          <p:nvPr/>
+        </p:nvSpPr>
+        <p:spPr>
+          <a:xfrm>
+            <a:off x="502920" y="1554480"/>
+            <a:ext cx="82296" cy="4297680"/>
+          </a:xfrm>
+          <a:prstGeom prst="rect">
+            <a:avLst/>
+          </a:prstGeom>
+          <a:solidFill>
+            <a:srgbClr val="C9A227"/>
+          </a:solidFill>
+          <a:ln>
+            <a:noFill/>
+          </a:ln>
+          <a:effectLst/>
+        </p:spPr>
+        <p:style>
+          <a:lnRef idx="1">
+            <a:schemeClr val="accent1"/>
+          </a:lnRef>
+          <a:fillRef idx="3">
+            <a:schemeClr val="accent1"/>
+          </a:fillRef>
+          <a:effectRef idx="2">
+            <a:schemeClr val="accent1"/>
+          </a:effectRef>
+          <a:fontRef idx="minor">
+            <a:schemeClr val="lt1"/>
+          </a:fontRef>
+        </p:style>
+        <p:txBody>
+          <a:bodyPr rtlCol="0" anchor="ctr"/>
+          <a:lstStyle/>
+          <a:p>
+            <a:pPr algn="ctr"/>
+          </a:p>
+        </p:txBody>
+      </p:sp>
+      <p:sp>
+        <p:nvSpPr>
+          <p:cNvPr id="11" name="TextBox 10"/>
+          <p:cNvSpPr txBox="1"/>
+          <p:nvPr/>
+        </p:nvSpPr>
+        <p:spPr>
+          <a:xfrm>
+            <a:off x="868680" y="1371600"/>
+            <a:ext cx="10728655" cy="4663440"/>
+          </a:xfrm>
+          <a:prstGeom prst="rect">
+            <a:avLst/>
+          </a:prstGeom>
+          <a:noFill/>
+        </p:spPr>
+        <p:txBody>
+          <a:bodyPr wrap="square" anchor="ctr">
+            <a:spAutoFit/>
+          </a:bodyPr>
+          <a:lstStyle/>
+          <a:p>
+            <a:pPr algn="l">
+              <a:spcAft>
+                <a:spcPts val="2200"/>
+              </a:spcAft>
+            </a:pPr>
+            <a:r>
+              <a:rPr sz="2000" b="0">
                 <a:solidFill>
                   <a:srgbClr val="222222"/>
                 </a:solidFill>
@@ -5123,11 +6894,11 @@
           <a:p>
             <a:pPr algn="l">
               <a:spcAft>
-                <a:spcPts val="1400"/>
+                <a:spcPts val="2200"/>
               </a:spcAft>
             </a:pPr>
             <a:r>
-              <a:rPr sz="1800" b="0">
+              <a:rPr sz="2000" b="0">
                 <a:solidFill>
                   <a:srgbClr val="222222"/>
                 </a:solidFill>
@@ -5139,11 +6910,11 @@
           <a:p>
             <a:pPr algn="l">
               <a:spcAft>
-                <a:spcPts val="1400"/>
+                <a:spcPts val="2200"/>
               </a:spcAft>
             </a:pPr>
             <a:r>
-              <a:rPr sz="1800" b="0">
+              <a:rPr sz="2000" b="0">
                 <a:solidFill>
                   <a:srgbClr val="222222"/>
                 </a:solidFill>
@@ -5155,11 +6926,11 @@
           <a:p>
             <a:pPr algn="l">
               <a:spcAft>
-                <a:spcPts val="1400"/>
+                <a:spcPts val="2200"/>
               </a:spcAft>
             </a:pPr>
             <a:r>
-              <a:rPr sz="1800" b="0">
+              <a:rPr sz="2000" b="0">
                 <a:solidFill>
                   <a:srgbClr val="222222"/>
                 </a:solidFill>
@@ -5241,7 +7012,7 @@
         <p:spPr>
           <a:xfrm>
             <a:off x="0" y="960120"/>
-            <a:ext cx="12191695" cy="54864"/>
+            <a:ext cx="12191695" cy="64008"/>
           </a:xfrm>
           <a:prstGeom prst="rect">
             <a:avLst/>
@@ -5284,8 +7055,8 @@
         </p:nvSpPr>
         <p:spPr>
           <a:xfrm>
-            <a:off x="457200" y="109728"/>
-            <a:ext cx="11277295" cy="777240"/>
+            <a:off x="457200" y="137160"/>
+            <a:ext cx="8351215" cy="731520"/>
           </a:xfrm>
           <a:prstGeom prst="rect">
             <a:avLst/>
@@ -5323,8 +7094,8 @@
         </p:nvSpPr>
         <p:spPr>
           <a:xfrm>
-            <a:off x="640080" y="1371600"/>
-            <a:ext cx="10911535" cy="5029200"/>
+            <a:off x="8534095" y="137160"/>
+            <a:ext cx="3200400" cy="731520"/>
           </a:xfrm>
           <a:prstGeom prst="rect">
             <a:avLst/>
@@ -5332,18 +7103,267 @@
           <a:noFill/>
         </p:spPr>
         <p:txBody>
-          <a:bodyPr wrap="square">
+          <a:bodyPr wrap="square" anchor="ctr">
             <a:spAutoFit/>
           </a:bodyPr>
           <a:lstStyle/>
           <a:p>
+            <a:pPr algn="r">
+              <a:spcAft>
+                <a:spcPts val="600"/>
+              </a:spcAft>
+            </a:pPr>
+            <a:r>
+              <a:rPr sz="1200" b="1">
+                <a:solidFill>
+                  <a:srgbClr val="C9A227"/>
+                </a:solidFill>
+                <a:latin typeface="Calibri"/>
+              </a:rPr>
+              <a:t>Gold Price Prediction</a:t>
+            </a:r>
+          </a:p>
+        </p:txBody>
+      </p:sp>
+      <p:sp>
+        <p:nvSpPr>
+          <p:cNvPr id="6" name="Rectangle 5"/>
+          <p:cNvSpPr/>
+          <p:nvPr/>
+        </p:nvSpPr>
+        <p:spPr>
+          <a:xfrm>
+            <a:off x="0" y="6473952"/>
+            <a:ext cx="12191695" cy="384048"/>
+          </a:xfrm>
+          <a:prstGeom prst="rect">
+            <a:avLst/>
+          </a:prstGeom>
+          <a:solidFill>
+            <a:srgbClr val="1F3864"/>
+          </a:solidFill>
+          <a:ln>
+            <a:noFill/>
+          </a:ln>
+          <a:effectLst/>
+        </p:spPr>
+        <p:style>
+          <a:lnRef idx="1">
+            <a:schemeClr val="accent1"/>
+          </a:lnRef>
+          <a:fillRef idx="3">
+            <a:schemeClr val="accent1"/>
+          </a:fillRef>
+          <a:effectRef idx="2">
+            <a:schemeClr val="accent1"/>
+          </a:effectRef>
+          <a:fontRef idx="minor">
+            <a:schemeClr val="lt1"/>
+          </a:fontRef>
+        </p:style>
+        <p:txBody>
+          <a:bodyPr rtlCol="0" anchor="ctr"/>
+          <a:lstStyle/>
+          <a:p>
+            <a:pPr algn="ctr"/>
+          </a:p>
+        </p:txBody>
+      </p:sp>
+      <p:sp>
+        <p:nvSpPr>
+          <p:cNvPr id="7" name="Rectangle 6"/>
+          <p:cNvSpPr/>
+          <p:nvPr/>
+        </p:nvSpPr>
+        <p:spPr>
+          <a:xfrm>
+            <a:off x="0" y="6473952"/>
+            <a:ext cx="128016" cy="384048"/>
+          </a:xfrm>
+          <a:prstGeom prst="rect">
+            <a:avLst/>
+          </a:prstGeom>
+          <a:solidFill>
+            <a:srgbClr val="C9A227"/>
+          </a:solidFill>
+          <a:ln>
+            <a:noFill/>
+          </a:ln>
+          <a:effectLst/>
+        </p:spPr>
+        <p:style>
+          <a:lnRef idx="1">
+            <a:schemeClr val="accent1"/>
+          </a:lnRef>
+          <a:fillRef idx="3">
+            <a:schemeClr val="accent1"/>
+          </a:fillRef>
+          <a:effectRef idx="2">
+            <a:schemeClr val="accent1"/>
+          </a:effectRef>
+          <a:fontRef idx="minor">
+            <a:schemeClr val="lt1"/>
+          </a:fontRef>
+        </p:style>
+        <p:txBody>
+          <a:bodyPr rtlCol="0" anchor="ctr"/>
+          <a:lstStyle/>
+          <a:p>
+            <a:pPr algn="ctr"/>
+          </a:p>
+        </p:txBody>
+      </p:sp>
+      <p:sp>
+        <p:nvSpPr>
+          <p:cNvPr id="8" name="TextBox 7"/>
+          <p:cNvSpPr txBox="1"/>
+          <p:nvPr/>
+        </p:nvSpPr>
+        <p:spPr>
+          <a:xfrm>
+            <a:off x="274320" y="6473952"/>
+            <a:ext cx="10362895" cy="384048"/>
+          </a:xfrm>
+          <a:prstGeom prst="rect">
+            <a:avLst/>
+          </a:prstGeom>
+          <a:noFill/>
+        </p:spPr>
+        <p:txBody>
+          <a:bodyPr wrap="square" anchor="ctr">
+            <a:spAutoFit/>
+          </a:bodyPr>
+          <a:lstStyle/>
+          <a:p>
             <a:pPr algn="l">
               <a:spcAft>
-                <a:spcPts val="1400"/>
+                <a:spcPts val="600"/>
               </a:spcAft>
             </a:pPr>
             <a:r>
-              <a:rPr sz="1800" b="0">
+              <a:rPr sz="900" b="0">
+                <a:solidFill>
+                  <a:srgbClr val="FFFFFF"/>
+                </a:solidFill>
+                <a:latin typeface="Calibri"/>
+              </a:rPr>
+              <a:t>Sanchay Bhardwaj (2300650100104)  |  B.S.A. College of Engineering &amp; Technology, Mathura</a:t>
+            </a:r>
+          </a:p>
+        </p:txBody>
+      </p:sp>
+      <p:sp>
+        <p:nvSpPr>
+          <p:cNvPr id="9" name="TextBox 8"/>
+          <p:cNvSpPr txBox="1"/>
+          <p:nvPr/>
+        </p:nvSpPr>
+        <p:spPr>
+          <a:xfrm>
+            <a:off x="10728655" y="6473952"/>
+            <a:ext cx="1188720" cy="384048"/>
+          </a:xfrm>
+          <a:prstGeom prst="rect">
+            <a:avLst/>
+          </a:prstGeom>
+          <a:noFill/>
+        </p:spPr>
+        <p:txBody>
+          <a:bodyPr wrap="square" anchor="ctr">
+            <a:spAutoFit/>
+          </a:bodyPr>
+          <a:lstStyle/>
+          <a:p>
+            <a:pPr algn="r">
+              <a:spcAft>
+                <a:spcPts val="600"/>
+              </a:spcAft>
+            </a:pPr>
+            <a:r>
+              <a:rPr sz="900" b="1">
+                <a:solidFill>
+                  <a:srgbClr val="C9A227"/>
+                </a:solidFill>
+                <a:latin typeface="Calibri"/>
+              </a:rPr>
+              <a:t>Slide 6</a:t>
+            </a:r>
+          </a:p>
+        </p:txBody>
+      </p:sp>
+      <p:sp>
+        <p:nvSpPr>
+          <p:cNvPr id="10" name="Rectangle 9"/>
+          <p:cNvSpPr/>
+          <p:nvPr/>
+        </p:nvSpPr>
+        <p:spPr>
+          <a:xfrm>
+            <a:off x="502920" y="1554480"/>
+            <a:ext cx="82296" cy="4297680"/>
+          </a:xfrm>
+          <a:prstGeom prst="rect">
+            <a:avLst/>
+          </a:prstGeom>
+          <a:solidFill>
+            <a:srgbClr val="C9A227"/>
+          </a:solidFill>
+          <a:ln>
+            <a:noFill/>
+          </a:ln>
+          <a:effectLst/>
+        </p:spPr>
+        <p:style>
+          <a:lnRef idx="1">
+            <a:schemeClr val="accent1"/>
+          </a:lnRef>
+          <a:fillRef idx="3">
+            <a:schemeClr val="accent1"/>
+          </a:fillRef>
+          <a:effectRef idx="2">
+            <a:schemeClr val="accent1"/>
+          </a:effectRef>
+          <a:fontRef idx="minor">
+            <a:schemeClr val="lt1"/>
+          </a:fontRef>
+        </p:style>
+        <p:txBody>
+          <a:bodyPr rtlCol="0" anchor="ctr"/>
+          <a:lstStyle/>
+          <a:p>
+            <a:pPr algn="ctr"/>
+          </a:p>
+        </p:txBody>
+      </p:sp>
+      <p:sp>
+        <p:nvSpPr>
+          <p:cNvPr id="11" name="TextBox 10"/>
+          <p:cNvSpPr txBox="1"/>
+          <p:nvPr/>
+        </p:nvSpPr>
+        <p:spPr>
+          <a:xfrm>
+            <a:off x="868680" y="1371600"/>
+            <a:ext cx="10728655" cy="4663440"/>
+          </a:xfrm>
+          <a:prstGeom prst="rect">
+            <a:avLst/>
+          </a:prstGeom>
+          <a:noFill/>
+        </p:spPr>
+        <p:txBody>
+          <a:bodyPr wrap="square" anchor="ctr">
+            <a:spAutoFit/>
+          </a:bodyPr>
+          <a:lstStyle/>
+          <a:p>
+            <a:pPr algn="l">
+              <a:spcAft>
+                <a:spcPts val="2200"/>
+              </a:spcAft>
+            </a:pPr>
+            <a:r>
+              <a:rPr sz="2000" b="0">
                 <a:solidFill>
                   <a:srgbClr val="222222"/>
                 </a:solidFill>
@@ -5355,11 +7375,11 @@
           <a:p>
             <a:pPr algn="l">
               <a:spcAft>
-                <a:spcPts val="1400"/>
+                <a:spcPts val="2200"/>
               </a:spcAft>
             </a:pPr>
             <a:r>
-              <a:rPr sz="1800" b="0">
+              <a:rPr sz="2000" b="0">
                 <a:solidFill>
                   <a:srgbClr val="222222"/>
                 </a:solidFill>
@@ -5371,27 +7391,27 @@
           <a:p>
             <a:pPr algn="l">
               <a:spcAft>
-                <a:spcPts val="1400"/>
+                <a:spcPts val="2200"/>
               </a:spcAft>
             </a:pPr>
             <a:r>
-              <a:rPr sz="1800" b="0">
+              <a:rPr sz="2000" b="0">
                 <a:solidFill>
                   <a:srgbClr val="222222"/>
                 </a:solidFill>
                 <a:latin typeface="Calibri"/>
               </a:rPr>
-              <a:t>•   Price is rebuilt as:  next price = last price x (1 + predicted return).</a:t>
+              <a:t>•   Price is rebuilt as   next price = last price x (1 + predicted return).</a:t>
             </a:r>
           </a:p>
           <a:p>
             <a:pPr algn="l">
               <a:spcAft>
-                <a:spcPts val="1400"/>
+                <a:spcPts val="2200"/>
               </a:spcAft>
             </a:pPr>
             <a:r>
-              <a:rPr sz="1800" b="0">
+              <a:rPr sz="2000" b="0">
                 <a:solidFill>
                   <a:srgbClr val="222222"/>
                 </a:solidFill>
@@ -5403,11 +7423,11 @@
           <a:p>
             <a:pPr algn="l">
               <a:spcAft>
-                <a:spcPts val="1400"/>
+                <a:spcPts val="2200"/>
               </a:spcAft>
             </a:pPr>
             <a:r>
-              <a:rPr sz="1800" b="0">
+              <a:rPr sz="2000" b="0">
                 <a:solidFill>
                   <a:srgbClr val="222222"/>
                 </a:solidFill>
@@ -5489,7 +7509,7 @@
         <p:spPr>
           <a:xfrm>
             <a:off x="0" y="960120"/>
-            <a:ext cx="12191695" cy="54864"/>
+            <a:ext cx="12191695" cy="64008"/>
           </a:xfrm>
           <a:prstGeom prst="rect">
             <a:avLst/>
@@ -5532,8 +7552,8 @@
         </p:nvSpPr>
         <p:spPr>
           <a:xfrm>
-            <a:off x="457200" y="109728"/>
-            <a:ext cx="11277295" cy="777240"/>
+            <a:off x="457200" y="137160"/>
+            <a:ext cx="8351215" cy="731520"/>
           </a:xfrm>
           <a:prstGeom prst="rect">
             <a:avLst/>
@@ -5571,8 +7591,8 @@
         </p:nvSpPr>
         <p:spPr>
           <a:xfrm>
-            <a:off x="640080" y="1371600"/>
-            <a:ext cx="10911535" cy="5029200"/>
+            <a:off x="8534095" y="137160"/>
+            <a:ext cx="3200400" cy="731520"/>
           </a:xfrm>
           <a:prstGeom prst="rect">
             <a:avLst/>
@@ -5580,18 +7600,267 @@
           <a:noFill/>
         </p:spPr>
         <p:txBody>
-          <a:bodyPr wrap="square">
+          <a:bodyPr wrap="square" anchor="ctr">
             <a:spAutoFit/>
           </a:bodyPr>
           <a:lstStyle/>
           <a:p>
+            <a:pPr algn="r">
+              <a:spcAft>
+                <a:spcPts val="600"/>
+              </a:spcAft>
+            </a:pPr>
+            <a:r>
+              <a:rPr sz="1200" b="1">
+                <a:solidFill>
+                  <a:srgbClr val="C9A227"/>
+                </a:solidFill>
+                <a:latin typeface="Calibri"/>
+              </a:rPr>
+              <a:t>Gold Price Prediction</a:t>
+            </a:r>
+          </a:p>
+        </p:txBody>
+      </p:sp>
+      <p:sp>
+        <p:nvSpPr>
+          <p:cNvPr id="6" name="Rectangle 5"/>
+          <p:cNvSpPr/>
+          <p:nvPr/>
+        </p:nvSpPr>
+        <p:spPr>
+          <a:xfrm>
+            <a:off x="0" y="6473952"/>
+            <a:ext cx="12191695" cy="384048"/>
+          </a:xfrm>
+          <a:prstGeom prst="rect">
+            <a:avLst/>
+          </a:prstGeom>
+          <a:solidFill>
+            <a:srgbClr val="1F3864"/>
+          </a:solidFill>
+          <a:ln>
+            <a:noFill/>
+          </a:ln>
+          <a:effectLst/>
+        </p:spPr>
+        <p:style>
+          <a:lnRef idx="1">
+            <a:schemeClr val="accent1"/>
+          </a:lnRef>
+          <a:fillRef idx="3">
+            <a:schemeClr val="accent1"/>
+          </a:fillRef>
+          <a:effectRef idx="2">
+            <a:schemeClr val="accent1"/>
+          </a:effectRef>
+          <a:fontRef idx="minor">
+            <a:schemeClr val="lt1"/>
+          </a:fontRef>
+        </p:style>
+        <p:txBody>
+          <a:bodyPr rtlCol="0" anchor="ctr"/>
+          <a:lstStyle/>
+          <a:p>
+            <a:pPr algn="ctr"/>
+          </a:p>
+        </p:txBody>
+      </p:sp>
+      <p:sp>
+        <p:nvSpPr>
+          <p:cNvPr id="7" name="Rectangle 6"/>
+          <p:cNvSpPr/>
+          <p:nvPr/>
+        </p:nvSpPr>
+        <p:spPr>
+          <a:xfrm>
+            <a:off x="0" y="6473952"/>
+            <a:ext cx="128016" cy="384048"/>
+          </a:xfrm>
+          <a:prstGeom prst="rect">
+            <a:avLst/>
+          </a:prstGeom>
+          <a:solidFill>
+            <a:srgbClr val="C9A227"/>
+          </a:solidFill>
+          <a:ln>
+            <a:noFill/>
+          </a:ln>
+          <a:effectLst/>
+        </p:spPr>
+        <p:style>
+          <a:lnRef idx="1">
+            <a:schemeClr val="accent1"/>
+          </a:lnRef>
+          <a:fillRef idx="3">
+            <a:schemeClr val="accent1"/>
+          </a:fillRef>
+          <a:effectRef idx="2">
+            <a:schemeClr val="accent1"/>
+          </a:effectRef>
+          <a:fontRef idx="minor">
+            <a:schemeClr val="lt1"/>
+          </a:fontRef>
+        </p:style>
+        <p:txBody>
+          <a:bodyPr rtlCol="0" anchor="ctr"/>
+          <a:lstStyle/>
+          <a:p>
+            <a:pPr algn="ctr"/>
+          </a:p>
+        </p:txBody>
+      </p:sp>
+      <p:sp>
+        <p:nvSpPr>
+          <p:cNvPr id="8" name="TextBox 7"/>
+          <p:cNvSpPr txBox="1"/>
+          <p:nvPr/>
+        </p:nvSpPr>
+        <p:spPr>
+          <a:xfrm>
+            <a:off x="274320" y="6473952"/>
+            <a:ext cx="10362895" cy="384048"/>
+          </a:xfrm>
+          <a:prstGeom prst="rect">
+            <a:avLst/>
+          </a:prstGeom>
+          <a:noFill/>
+        </p:spPr>
+        <p:txBody>
+          <a:bodyPr wrap="square" anchor="ctr">
+            <a:spAutoFit/>
+          </a:bodyPr>
+          <a:lstStyle/>
+          <a:p>
             <a:pPr algn="l">
               <a:spcAft>
-                <a:spcPts val="1400"/>
+                <a:spcPts val="600"/>
               </a:spcAft>
             </a:pPr>
             <a:r>
-              <a:rPr sz="1800" b="0">
+              <a:rPr sz="900" b="0">
+                <a:solidFill>
+                  <a:srgbClr val="FFFFFF"/>
+                </a:solidFill>
+                <a:latin typeface="Calibri"/>
+              </a:rPr>
+              <a:t>Sanchay Bhardwaj (2300650100104)  |  B.S.A. College of Engineering &amp; Technology, Mathura</a:t>
+            </a:r>
+          </a:p>
+        </p:txBody>
+      </p:sp>
+      <p:sp>
+        <p:nvSpPr>
+          <p:cNvPr id="9" name="TextBox 8"/>
+          <p:cNvSpPr txBox="1"/>
+          <p:nvPr/>
+        </p:nvSpPr>
+        <p:spPr>
+          <a:xfrm>
+            <a:off x="10728655" y="6473952"/>
+            <a:ext cx="1188720" cy="384048"/>
+          </a:xfrm>
+          <a:prstGeom prst="rect">
+            <a:avLst/>
+          </a:prstGeom>
+          <a:noFill/>
+        </p:spPr>
+        <p:txBody>
+          <a:bodyPr wrap="square" anchor="ctr">
+            <a:spAutoFit/>
+          </a:bodyPr>
+          <a:lstStyle/>
+          <a:p>
+            <a:pPr algn="r">
+              <a:spcAft>
+                <a:spcPts val="600"/>
+              </a:spcAft>
+            </a:pPr>
+            <a:r>
+              <a:rPr sz="900" b="1">
+                <a:solidFill>
+                  <a:srgbClr val="C9A227"/>
+                </a:solidFill>
+                <a:latin typeface="Calibri"/>
+              </a:rPr>
+              <a:t>Slide 7</a:t>
+            </a:r>
+          </a:p>
+        </p:txBody>
+      </p:sp>
+      <p:sp>
+        <p:nvSpPr>
+          <p:cNvPr id="10" name="Rectangle 9"/>
+          <p:cNvSpPr/>
+          <p:nvPr/>
+        </p:nvSpPr>
+        <p:spPr>
+          <a:xfrm>
+            <a:off x="502920" y="1554480"/>
+            <a:ext cx="82296" cy="4297680"/>
+          </a:xfrm>
+          <a:prstGeom prst="rect">
+            <a:avLst/>
+          </a:prstGeom>
+          <a:solidFill>
+            <a:srgbClr val="C9A227"/>
+          </a:solidFill>
+          <a:ln>
+            <a:noFill/>
+          </a:ln>
+          <a:effectLst/>
+        </p:spPr>
+        <p:style>
+          <a:lnRef idx="1">
+            <a:schemeClr val="accent1"/>
+          </a:lnRef>
+          <a:fillRef idx="3">
+            <a:schemeClr val="accent1"/>
+          </a:fillRef>
+          <a:effectRef idx="2">
+            <a:schemeClr val="accent1"/>
+          </a:effectRef>
+          <a:fontRef idx="minor">
+            <a:schemeClr val="lt1"/>
+          </a:fontRef>
+        </p:style>
+        <p:txBody>
+          <a:bodyPr rtlCol="0" anchor="ctr"/>
+          <a:lstStyle/>
+          <a:p>
+            <a:pPr algn="ctr"/>
+          </a:p>
+        </p:txBody>
+      </p:sp>
+      <p:sp>
+        <p:nvSpPr>
+          <p:cNvPr id="11" name="TextBox 10"/>
+          <p:cNvSpPr txBox="1"/>
+          <p:nvPr/>
+        </p:nvSpPr>
+        <p:spPr>
+          <a:xfrm>
+            <a:off x="868680" y="1371600"/>
+            <a:ext cx="10728655" cy="4663440"/>
+          </a:xfrm>
+          <a:prstGeom prst="rect">
+            <a:avLst/>
+          </a:prstGeom>
+          <a:noFill/>
+        </p:spPr>
+        <p:txBody>
+          <a:bodyPr wrap="square" anchor="ctr">
+            <a:spAutoFit/>
+          </a:bodyPr>
+          <a:lstStyle/>
+          <a:p>
+            <a:pPr algn="l">
+              <a:spcAft>
+                <a:spcPts val="2200"/>
+              </a:spcAft>
+            </a:pPr>
+            <a:r>
+              <a:rPr sz="2000" b="0">
                 <a:solidFill>
                   <a:srgbClr val="222222"/>
                 </a:solidFill>
@@ -5603,11 +7872,11 @@
           <a:p>
             <a:pPr algn="l">
               <a:spcAft>
-                <a:spcPts val="1400"/>
+                <a:spcPts val="2200"/>
               </a:spcAft>
             </a:pPr>
             <a:r>
-              <a:rPr sz="1800" b="0">
+              <a:rPr sz="2000" b="0">
                 <a:solidFill>
                   <a:srgbClr val="222222"/>
                 </a:solidFill>
@@ -5619,11 +7888,11 @@
           <a:p>
             <a:pPr algn="l">
               <a:spcAft>
-                <a:spcPts val="1400"/>
+                <a:spcPts val="2200"/>
               </a:spcAft>
             </a:pPr>
             <a:r>
-              <a:rPr sz="1800" b="0">
+              <a:rPr sz="2000" b="0">
                 <a:solidFill>
                   <a:srgbClr val="222222"/>
                 </a:solidFill>
@@ -5635,17 +7904,33 @@
           <a:p>
             <a:pPr algn="l">
               <a:spcAft>
-                <a:spcPts val="1400"/>
+                <a:spcPts val="2200"/>
               </a:spcAft>
             </a:pPr>
             <a:r>
-              <a:rPr sz="1800" b="0">
+              <a:rPr sz="2000" b="0">
                 <a:solidFill>
                   <a:srgbClr val="222222"/>
                 </a:solidFill>
                 <a:latin typeface="Calibri"/>
               </a:rPr>
-              <a:t>•   Charts: Matplotlib.   Interface: Tkinter.   Save/Load: Joblib.</a:t>
+              <a:t>•   Charts: Matplotlib.</a:t>
+            </a:r>
+          </a:p>
+          <a:p>
+            <a:pPr algn="l">
+              <a:spcAft>
+                <a:spcPts val="2200"/>
+              </a:spcAft>
+            </a:pPr>
+            <a:r>
+              <a:rPr sz="2000" b="0">
+                <a:solidFill>
+                  <a:srgbClr val="222222"/>
+                </a:solidFill>
+                <a:latin typeface="Calibri"/>
+              </a:rPr>
+              <a:t>•   Interface: Tkinter.   Save / Load: Joblib.</a:t>
             </a:r>
           </a:p>
         </p:txBody>
@@ -5721,7 +8006,7 @@
         <p:spPr>
           <a:xfrm>
             <a:off x="0" y="960120"/>
-            <a:ext cx="12191695" cy="54864"/>
+            <a:ext cx="12191695" cy="64008"/>
           </a:xfrm>
           <a:prstGeom prst="rect">
             <a:avLst/>
@@ -5764,8 +8049,8 @@
         </p:nvSpPr>
         <p:spPr>
           <a:xfrm>
-            <a:off x="457200" y="109728"/>
-            <a:ext cx="11277295" cy="777240"/>
+            <a:off x="457200" y="137160"/>
+            <a:ext cx="8351215" cy="731520"/>
           </a:xfrm>
           <a:prstGeom prst="rect">
             <a:avLst/>
@@ -5795,17 +8080,222 @@
           </a:p>
         </p:txBody>
       </p:sp>
+      <p:sp>
+        <p:nvSpPr>
+          <p:cNvPr id="5" name="TextBox 4"/>
+          <p:cNvSpPr txBox="1"/>
+          <p:nvPr/>
+        </p:nvSpPr>
+        <p:spPr>
+          <a:xfrm>
+            <a:off x="8534095" y="137160"/>
+            <a:ext cx="3200400" cy="731520"/>
+          </a:xfrm>
+          <a:prstGeom prst="rect">
+            <a:avLst/>
+          </a:prstGeom>
+          <a:noFill/>
+        </p:spPr>
+        <p:txBody>
+          <a:bodyPr wrap="square" anchor="ctr">
+            <a:spAutoFit/>
+          </a:bodyPr>
+          <a:lstStyle/>
+          <a:p>
+            <a:pPr algn="r">
+              <a:spcAft>
+                <a:spcPts val="600"/>
+              </a:spcAft>
+            </a:pPr>
+            <a:r>
+              <a:rPr sz="1200" b="1">
+                <a:solidFill>
+                  <a:srgbClr val="C9A227"/>
+                </a:solidFill>
+                <a:latin typeface="Calibri"/>
+              </a:rPr>
+              <a:t>Gold Price Prediction</a:t>
+            </a:r>
+          </a:p>
+        </p:txBody>
+      </p:sp>
+      <p:sp>
+        <p:nvSpPr>
+          <p:cNvPr id="6" name="Rectangle 5"/>
+          <p:cNvSpPr/>
+          <p:nvPr/>
+        </p:nvSpPr>
+        <p:spPr>
+          <a:xfrm>
+            <a:off x="0" y="6473952"/>
+            <a:ext cx="12191695" cy="384048"/>
+          </a:xfrm>
+          <a:prstGeom prst="rect">
+            <a:avLst/>
+          </a:prstGeom>
+          <a:solidFill>
+            <a:srgbClr val="1F3864"/>
+          </a:solidFill>
+          <a:ln>
+            <a:noFill/>
+          </a:ln>
+          <a:effectLst/>
+        </p:spPr>
+        <p:style>
+          <a:lnRef idx="1">
+            <a:schemeClr val="accent1"/>
+          </a:lnRef>
+          <a:fillRef idx="3">
+            <a:schemeClr val="accent1"/>
+          </a:fillRef>
+          <a:effectRef idx="2">
+            <a:schemeClr val="accent1"/>
+          </a:effectRef>
+          <a:fontRef idx="minor">
+            <a:schemeClr val="lt1"/>
+          </a:fontRef>
+        </p:style>
+        <p:txBody>
+          <a:bodyPr rtlCol="0" anchor="ctr"/>
+          <a:lstStyle/>
+          <a:p>
+            <a:pPr algn="ctr"/>
+          </a:p>
+        </p:txBody>
+      </p:sp>
+      <p:sp>
+        <p:nvSpPr>
+          <p:cNvPr id="7" name="Rectangle 6"/>
+          <p:cNvSpPr/>
+          <p:nvPr/>
+        </p:nvSpPr>
+        <p:spPr>
+          <a:xfrm>
+            <a:off x="0" y="6473952"/>
+            <a:ext cx="128016" cy="384048"/>
+          </a:xfrm>
+          <a:prstGeom prst="rect">
+            <a:avLst/>
+          </a:prstGeom>
+          <a:solidFill>
+            <a:srgbClr val="C9A227"/>
+          </a:solidFill>
+          <a:ln>
+            <a:noFill/>
+          </a:ln>
+          <a:effectLst/>
+        </p:spPr>
+        <p:style>
+          <a:lnRef idx="1">
+            <a:schemeClr val="accent1"/>
+          </a:lnRef>
+          <a:fillRef idx="3">
+            <a:schemeClr val="accent1"/>
+          </a:fillRef>
+          <a:effectRef idx="2">
+            <a:schemeClr val="accent1"/>
+          </a:effectRef>
+          <a:fontRef idx="minor">
+            <a:schemeClr val="lt1"/>
+          </a:fontRef>
+        </p:style>
+        <p:txBody>
+          <a:bodyPr rtlCol="0" anchor="ctr"/>
+          <a:lstStyle/>
+          <a:p>
+            <a:pPr algn="ctr"/>
+          </a:p>
+        </p:txBody>
+      </p:sp>
+      <p:sp>
+        <p:nvSpPr>
+          <p:cNvPr id="8" name="TextBox 7"/>
+          <p:cNvSpPr txBox="1"/>
+          <p:nvPr/>
+        </p:nvSpPr>
+        <p:spPr>
+          <a:xfrm>
+            <a:off x="274320" y="6473952"/>
+            <a:ext cx="10362895" cy="384048"/>
+          </a:xfrm>
+          <a:prstGeom prst="rect">
+            <a:avLst/>
+          </a:prstGeom>
+          <a:noFill/>
+        </p:spPr>
+        <p:txBody>
+          <a:bodyPr wrap="square" anchor="ctr">
+            <a:spAutoFit/>
+          </a:bodyPr>
+          <a:lstStyle/>
+          <a:p>
+            <a:pPr algn="l">
+              <a:spcAft>
+                <a:spcPts val="600"/>
+              </a:spcAft>
+            </a:pPr>
+            <a:r>
+              <a:rPr sz="900" b="0">
+                <a:solidFill>
+                  <a:srgbClr val="FFFFFF"/>
+                </a:solidFill>
+                <a:latin typeface="Calibri"/>
+              </a:rPr>
+              <a:t>Sanchay Bhardwaj (2300650100104)  |  B.S.A. College of Engineering &amp; Technology, Mathura</a:t>
+            </a:r>
+          </a:p>
+        </p:txBody>
+      </p:sp>
+      <p:sp>
+        <p:nvSpPr>
+          <p:cNvPr id="9" name="TextBox 8"/>
+          <p:cNvSpPr txBox="1"/>
+          <p:nvPr/>
+        </p:nvSpPr>
+        <p:spPr>
+          <a:xfrm>
+            <a:off x="10728655" y="6473952"/>
+            <a:ext cx="1188720" cy="384048"/>
+          </a:xfrm>
+          <a:prstGeom prst="rect">
+            <a:avLst/>
+          </a:prstGeom>
+          <a:noFill/>
+        </p:spPr>
+        <p:txBody>
+          <a:bodyPr wrap="square" anchor="ctr">
+            <a:spAutoFit/>
+          </a:bodyPr>
+          <a:lstStyle/>
+          <a:p>
+            <a:pPr algn="r">
+              <a:spcAft>
+                <a:spcPts val="600"/>
+              </a:spcAft>
+            </a:pPr>
+            <a:r>
+              <a:rPr sz="900" b="1">
+                <a:solidFill>
+                  <a:srgbClr val="C9A227"/>
+                </a:solidFill>
+                <a:latin typeface="Calibri"/>
+              </a:rPr>
+              <a:t>Slide 8</a:t>
+            </a:r>
+          </a:p>
+        </p:txBody>
+      </p:sp>
       <p:graphicFrame>
         <p:nvGraphicFramePr>
-          <p:cNvPr id="5" name="Table 4"/>
+          <p:cNvPr id="10" name="Table 9"/>
           <p:cNvGraphicFramePr>
             <a:graphicFrameLocks noGrp="1"/>
           </p:cNvGraphicFramePr>
           <p:nvPr/>
         </p:nvGraphicFramePr>
         <p:xfrm>
-          <a:off x="1097280" y="1554480"/>
-          <a:ext cx="9997135" cy="3337560"/>
+          <a:off x="640080" y="1737360"/>
+          <a:ext cx="6675120" cy="3108960"/>
         </p:xfrm>
         <a:graphic>
           <a:graphicData uri="http://schemas.openxmlformats.org/drawingml/2006/table">
@@ -5814,15 +8304,15 @@
                 <a:tableStyleId>{5C22544A-7EE6-4342-B048-85BDC9FD1C3A}</a:tableStyleId>
               </a:tblPr>
               <a:tblGrid>
-                <a:gridCol w="2499283"/>
-                <a:gridCol w="2499283"/>
-                <a:gridCol w="2499283"/>
-                <a:gridCol w="2499286"/>
+                <a:gridCol w="1668780"/>
+                <a:gridCol w="1668780"/>
+                <a:gridCol w="1668780"/>
+                <a:gridCol w="1668780"/>
               </a:tblGrid>
-              <a:tr h="667512">
+              <a:tr h="621792">
                 <a:tc>
                   <a:txBody>
-                    <a:bodyPr/>
+                    <a:bodyPr anchor="ctr"/>
                     <a:lstStyle/>
                     <a:p>
                       <a:pPr algn="ctr">
@@ -5849,7 +8339,7 @@
                 </a:tc>
                 <a:tc>
                   <a:txBody>
-                    <a:bodyPr/>
+                    <a:bodyPr anchor="ctr"/>
                     <a:lstStyle/>
                     <a:p>
                       <a:pPr algn="ctr">
@@ -5876,7 +8366,7 @@
                 </a:tc>
                 <a:tc>
                   <a:txBody>
-                    <a:bodyPr/>
+                    <a:bodyPr anchor="ctr"/>
                     <a:lstStyle/>
                     <a:p>
                       <a:pPr algn="ctr">
@@ -5903,7 +8393,7 @@
                 </a:tc>
                 <a:tc>
                   <a:txBody>
-                    <a:bodyPr/>
+                    <a:bodyPr anchor="ctr"/>
                     <a:lstStyle/>
                     <a:p>
                       <a:pPr algn="ctr">
@@ -5929,10 +8419,37 @@
                   </a:tcPr>
                 </a:tc>
               </a:tr>
-              <a:tr h="667512">
+              <a:tr h="621792">
                 <a:tc>
                   <a:txBody>
-                    <a:bodyPr/>
+                    <a:bodyPr anchor="ctr"/>
+                    <a:lstStyle/>
+                    <a:p>
+                      <a:pPr algn="l">
+                        <a:spcAft>
+                          <a:spcPts val="600"/>
+                        </a:spcAft>
+                      </a:pPr>
+                      <a:r>
+                        <a:rPr sz="1400" b="1">
+                          <a:solidFill>
+                            <a:srgbClr val="C9A227"/>
+                          </a:solidFill>
+                          <a:latin typeface="Calibri"/>
+                        </a:rPr>
+                        <a:t>RandomForest</a:t>
+                      </a:r>
+                    </a:p>
+                  </a:txBody>
+                  <a:tcPr>
+                    <a:solidFill>
+                      <a:srgbClr val="EEF3FA"/>
+                    </a:solidFill>
+                  </a:tcPr>
+                </a:tc>
+                <a:tc>
+                  <a:txBody>
+                    <a:bodyPr anchor="ctr"/>
                     <a:lstStyle/>
                     <a:p>
                       <a:pPr algn="ctr">
@@ -5944,33 +8461,6 @@
                         <a:rPr sz="1400" b="1">
                           <a:solidFill>
                             <a:srgbClr val="C9A227"/>
-                          </a:solidFill>
-                          <a:latin typeface="Calibri"/>
-                        </a:rPr>
-                        <a:t>RandomForest (best)</a:t>
-                      </a:r>
-                    </a:p>
-                  </a:txBody>
-                  <a:tcPr>
-                    <a:solidFill>
-                      <a:srgbClr val="EEF3FA"/>
-                    </a:solidFill>
-                  </a:tcPr>
-                </a:tc>
-                <a:tc>
-                  <a:txBody>
-                    <a:bodyPr/>
-                    <a:lstStyle/>
-                    <a:p>
-                      <a:pPr algn="ctr">
-                        <a:spcAft>
-                          <a:spcPts val="600"/>
-                        </a:spcAft>
-                      </a:pPr>
-                      <a:r>
-                        <a:rPr sz="1400" b="0">
-                          <a:solidFill>
-                            <a:srgbClr val="222222"/>
                           </a:solidFill>
                           <a:latin typeface="Calibri"/>
                         </a:rPr>
@@ -5986,7 +8476,7 @@
                 </a:tc>
                 <a:tc>
                   <a:txBody>
-                    <a:bodyPr/>
+                    <a:bodyPr anchor="ctr"/>
                     <a:lstStyle/>
                     <a:p>
                       <a:pPr algn="ctr">
@@ -5995,9 +8485,9 @@
                         </a:spcAft>
                       </a:pPr>
                       <a:r>
-                        <a:rPr sz="1400" b="0">
+                        <a:rPr sz="1400" b="1">
                           <a:solidFill>
-                            <a:srgbClr val="222222"/>
+                            <a:srgbClr val="C9A227"/>
                           </a:solidFill>
                           <a:latin typeface="Calibri"/>
                         </a:rPr>
@@ -6013,7 +8503,7 @@
                 </a:tc>
                 <a:tc>
                   <a:txBody>
-                    <a:bodyPr/>
+                    <a:bodyPr anchor="ctr"/>
                     <a:lstStyle/>
                     <a:p>
                       <a:pPr algn="ctr">
@@ -6022,9 +8512,9 @@
                         </a:spcAft>
                       </a:pPr>
                       <a:r>
-                        <a:rPr sz="1400" b="0">
+                        <a:rPr sz="1400" b="1">
                           <a:solidFill>
-                            <a:srgbClr val="222222"/>
+                            <a:srgbClr val="C9A227"/>
                           </a:solidFill>
                           <a:latin typeface="Calibri"/>
                         </a:rPr>
@@ -6039,13 +8529,13 @@
                   </a:tcPr>
                 </a:tc>
               </a:tr>
-              <a:tr h="667512">
+              <a:tr h="621792">
                 <a:tc>
                   <a:txBody>
-                    <a:bodyPr/>
+                    <a:bodyPr anchor="ctr"/>
                     <a:lstStyle/>
                     <a:p>
-                      <a:pPr algn="ctr">
+                      <a:pPr algn="l">
                         <a:spcAft>
                           <a:spcPts val="600"/>
                         </a:spcAft>
@@ -6069,7 +8559,7 @@
                 </a:tc>
                 <a:tc>
                   <a:txBody>
-                    <a:bodyPr/>
+                    <a:bodyPr anchor="ctr"/>
                     <a:lstStyle/>
                     <a:p>
                       <a:pPr algn="ctr">
@@ -6096,7 +8586,7 @@
                 </a:tc>
                 <a:tc>
                   <a:txBody>
-                    <a:bodyPr/>
+                    <a:bodyPr anchor="ctr"/>
                     <a:lstStyle/>
                     <a:p>
                       <a:pPr algn="ctr">
@@ -6123,7 +8613,7 @@
                 </a:tc>
                 <a:tc>
                   <a:txBody>
-                    <a:bodyPr/>
+                    <a:bodyPr anchor="ctr"/>
                     <a:lstStyle/>
                     <a:p>
                       <a:pPr algn="ctr">
@@ -6149,13 +8639,13 @@
                   </a:tcPr>
                 </a:tc>
               </a:tr>
-              <a:tr h="667512">
+              <a:tr h="621792">
                 <a:tc>
                   <a:txBody>
-                    <a:bodyPr/>
+                    <a:bodyPr anchor="ctr"/>
                     <a:lstStyle/>
                     <a:p>
-                      <a:pPr algn="ctr">
+                      <a:pPr algn="l">
                         <a:spcAft>
                           <a:spcPts val="600"/>
                         </a:spcAft>
@@ -6179,7 +8669,7 @@
                 </a:tc>
                 <a:tc>
                   <a:txBody>
-                    <a:bodyPr/>
+                    <a:bodyPr anchor="ctr"/>
                     <a:lstStyle/>
                     <a:p>
                       <a:pPr algn="ctr">
@@ -6206,7 +8696,7 @@
                 </a:tc>
                 <a:tc>
                   <a:txBody>
-                    <a:bodyPr/>
+                    <a:bodyPr anchor="ctr"/>
                     <a:lstStyle/>
                     <a:p>
                       <a:pPr algn="ctr">
@@ -6233,7 +8723,7 @@
                 </a:tc>
                 <a:tc>
                   <a:txBody>
-                    <a:bodyPr/>
+                    <a:bodyPr anchor="ctr"/>
                     <a:lstStyle/>
                     <a:p>
                       <a:pPr algn="ctr">
@@ -6259,13 +8749,13 @@
                   </a:tcPr>
                 </a:tc>
               </a:tr>
-              <a:tr h="667512">
+              <a:tr h="621792">
                 <a:tc>
                   <a:txBody>
-                    <a:bodyPr/>
+                    <a:bodyPr anchor="ctr"/>
                     <a:lstStyle/>
                     <a:p>
-                      <a:pPr algn="ctr">
+                      <a:pPr algn="l">
                         <a:spcAft>
                           <a:spcPts val="600"/>
                         </a:spcAft>
@@ -6289,7 +8779,7 @@
                 </a:tc>
                 <a:tc>
                   <a:txBody>
-                    <a:bodyPr/>
+                    <a:bodyPr anchor="ctr"/>
                     <a:lstStyle/>
                     <a:p>
                       <a:pPr algn="ctr">
@@ -6316,7 +8806,7 @@
                 </a:tc>
                 <a:tc>
                   <a:txBody>
-                    <a:bodyPr/>
+                    <a:bodyPr anchor="ctr"/>
                     <a:lstStyle/>
                     <a:p>
                       <a:pPr algn="ctr">
@@ -6343,7 +8833,7 @@
                 </a:tc>
                 <a:tc>
                   <a:txBody>
-                    <a:bodyPr/>
+                    <a:bodyPr anchor="ctr"/>
                     <a:lstStyle/>
                     <a:p>
                       <a:pPr algn="ctr">
@@ -6373,16 +8863,40 @@
           </a:graphicData>
         </a:graphic>
       </p:graphicFrame>
-      <p:sp>
-        <p:nvSpPr>
-          <p:cNvPr id="6" name="TextBox 5"/>
+      <p:pic>
+        <p:nvPicPr>
+          <p:cNvPr id="11" name="Picture 10" descr="results_chart.png"/>
+          <p:cNvPicPr>
+            <a:picLocks noChangeAspect="1"/>
+          </p:cNvPicPr>
+          <p:nvPr/>
+        </p:nvPicPr>
+        <p:blipFill>
+          <a:blip r:embed="rId2"/>
+          <a:stretch>
+            <a:fillRect/>
+          </a:stretch>
+        </p:blipFill>
+        <p:spPr>
+          <a:xfrm>
+            <a:off x="7680960" y="1554480"/>
+            <a:ext cx="3931920" cy="3291840"/>
+          </a:xfrm>
+          <a:prstGeom prst="rect">
+            <a:avLst/>
+          </a:prstGeom>
+        </p:spPr>
+      </p:pic>
+      <p:sp>
+        <p:nvSpPr>
+          <p:cNvPr id="12" name="TextBox 11"/>
           <p:cNvSpPr txBox="1"/>
           <p:nvPr/>
         </p:nvSpPr>
         <p:spPr>
           <a:xfrm>
-            <a:off x="1097280" y="5394960"/>
-            <a:ext cx="9997135" cy="822960"/>
+            <a:off x="640080" y="5212080"/>
+            <a:ext cx="6675120" cy="914400"/>
           </a:xfrm>
           <a:prstGeom prst="rect">
             <a:avLst/>
@@ -6395,7 +8909,7 @@
           </a:bodyPr>
           <a:lstStyle/>
           <a:p>
-            <a:pPr algn="ctr">
+            <a:pPr algn="l">
               <a:spcAft>
                 <a:spcPts val="600"/>
               </a:spcAft>
@@ -6407,7 +8921,7 @@
                 </a:solidFill>
                 <a:latin typeface="Calibri"/>
               </a:rPr>
-              <a:t>Test window: last 60 months (from Jan 2020). Lower MAE / RMSE and higher R-squared are better.</a:t>
+              <a:t>RandomForest wins on every metric. Test window: last 60 months (from Jan 2020). Lower MAE / RMSE and higher R-squared are better.</a:t>
             </a:r>
           </a:p>
         </p:txBody>
@@ -6483,7 +8997,7 @@
         <p:spPr>
           <a:xfrm>
             <a:off x="0" y="960120"/>
-            <a:ext cx="12191695" cy="54864"/>
+            <a:ext cx="12191695" cy="64008"/>
           </a:xfrm>
           <a:prstGeom prst="rect">
             <a:avLst/>
@@ -6526,8 +9040,8 @@
         </p:nvSpPr>
         <p:spPr>
           <a:xfrm>
-            <a:off x="457200" y="109728"/>
-            <a:ext cx="11277295" cy="777240"/>
+            <a:off x="457200" y="137160"/>
+            <a:ext cx="8351215" cy="731520"/>
           </a:xfrm>
           <a:prstGeom prst="rect">
             <a:avLst/>
@@ -6557,9 +9071,214 @@
           </a:p>
         </p:txBody>
       </p:sp>
+      <p:sp>
+        <p:nvSpPr>
+          <p:cNvPr id="5" name="TextBox 4"/>
+          <p:cNvSpPr txBox="1"/>
+          <p:nvPr/>
+        </p:nvSpPr>
+        <p:spPr>
+          <a:xfrm>
+            <a:off x="8534095" y="137160"/>
+            <a:ext cx="3200400" cy="731520"/>
+          </a:xfrm>
+          <a:prstGeom prst="rect">
+            <a:avLst/>
+          </a:prstGeom>
+          <a:noFill/>
+        </p:spPr>
+        <p:txBody>
+          <a:bodyPr wrap="square" anchor="ctr">
+            <a:spAutoFit/>
+          </a:bodyPr>
+          <a:lstStyle/>
+          <a:p>
+            <a:pPr algn="r">
+              <a:spcAft>
+                <a:spcPts val="600"/>
+              </a:spcAft>
+            </a:pPr>
+            <a:r>
+              <a:rPr sz="1200" b="1">
+                <a:solidFill>
+                  <a:srgbClr val="C9A227"/>
+                </a:solidFill>
+                <a:latin typeface="Calibri"/>
+              </a:rPr>
+              <a:t>Gold Price Prediction</a:t>
+            </a:r>
+          </a:p>
+        </p:txBody>
+      </p:sp>
+      <p:sp>
+        <p:nvSpPr>
+          <p:cNvPr id="6" name="Rectangle 5"/>
+          <p:cNvSpPr/>
+          <p:nvPr/>
+        </p:nvSpPr>
+        <p:spPr>
+          <a:xfrm>
+            <a:off x="0" y="6473952"/>
+            <a:ext cx="12191695" cy="384048"/>
+          </a:xfrm>
+          <a:prstGeom prst="rect">
+            <a:avLst/>
+          </a:prstGeom>
+          <a:solidFill>
+            <a:srgbClr val="1F3864"/>
+          </a:solidFill>
+          <a:ln>
+            <a:noFill/>
+          </a:ln>
+          <a:effectLst/>
+        </p:spPr>
+        <p:style>
+          <a:lnRef idx="1">
+            <a:schemeClr val="accent1"/>
+          </a:lnRef>
+          <a:fillRef idx="3">
+            <a:schemeClr val="accent1"/>
+          </a:fillRef>
+          <a:effectRef idx="2">
+            <a:schemeClr val="accent1"/>
+          </a:effectRef>
+          <a:fontRef idx="minor">
+            <a:schemeClr val="lt1"/>
+          </a:fontRef>
+        </p:style>
+        <p:txBody>
+          <a:bodyPr rtlCol="0" anchor="ctr"/>
+          <a:lstStyle/>
+          <a:p>
+            <a:pPr algn="ctr"/>
+          </a:p>
+        </p:txBody>
+      </p:sp>
+      <p:sp>
+        <p:nvSpPr>
+          <p:cNvPr id="7" name="Rectangle 6"/>
+          <p:cNvSpPr/>
+          <p:nvPr/>
+        </p:nvSpPr>
+        <p:spPr>
+          <a:xfrm>
+            <a:off x="0" y="6473952"/>
+            <a:ext cx="128016" cy="384048"/>
+          </a:xfrm>
+          <a:prstGeom prst="rect">
+            <a:avLst/>
+          </a:prstGeom>
+          <a:solidFill>
+            <a:srgbClr val="C9A227"/>
+          </a:solidFill>
+          <a:ln>
+            <a:noFill/>
+          </a:ln>
+          <a:effectLst/>
+        </p:spPr>
+        <p:style>
+          <a:lnRef idx="1">
+            <a:schemeClr val="accent1"/>
+          </a:lnRef>
+          <a:fillRef idx="3">
+            <a:schemeClr val="accent1"/>
+          </a:fillRef>
+          <a:effectRef idx="2">
+            <a:schemeClr val="accent1"/>
+          </a:effectRef>
+          <a:fontRef idx="minor">
+            <a:schemeClr val="lt1"/>
+          </a:fontRef>
+        </p:style>
+        <p:txBody>
+          <a:bodyPr rtlCol="0" anchor="ctr"/>
+          <a:lstStyle/>
+          <a:p>
+            <a:pPr algn="ctr"/>
+          </a:p>
+        </p:txBody>
+      </p:sp>
+      <p:sp>
+        <p:nvSpPr>
+          <p:cNvPr id="8" name="TextBox 7"/>
+          <p:cNvSpPr txBox="1"/>
+          <p:nvPr/>
+        </p:nvSpPr>
+        <p:spPr>
+          <a:xfrm>
+            <a:off x="274320" y="6473952"/>
+            <a:ext cx="10362895" cy="384048"/>
+          </a:xfrm>
+          <a:prstGeom prst="rect">
+            <a:avLst/>
+          </a:prstGeom>
+          <a:noFill/>
+        </p:spPr>
+        <p:txBody>
+          <a:bodyPr wrap="square" anchor="ctr">
+            <a:spAutoFit/>
+          </a:bodyPr>
+          <a:lstStyle/>
+          <a:p>
+            <a:pPr algn="l">
+              <a:spcAft>
+                <a:spcPts val="600"/>
+              </a:spcAft>
+            </a:pPr>
+            <a:r>
+              <a:rPr sz="900" b="0">
+                <a:solidFill>
+                  <a:srgbClr val="FFFFFF"/>
+                </a:solidFill>
+                <a:latin typeface="Calibri"/>
+              </a:rPr>
+              <a:t>Sanchay Bhardwaj (2300650100104)  |  B.S.A. College of Engineering &amp; Technology, Mathura</a:t>
+            </a:r>
+          </a:p>
+        </p:txBody>
+      </p:sp>
+      <p:sp>
+        <p:nvSpPr>
+          <p:cNvPr id="9" name="TextBox 8"/>
+          <p:cNvSpPr txBox="1"/>
+          <p:nvPr/>
+        </p:nvSpPr>
+        <p:spPr>
+          <a:xfrm>
+            <a:off x="10728655" y="6473952"/>
+            <a:ext cx="1188720" cy="384048"/>
+          </a:xfrm>
+          <a:prstGeom prst="rect">
+            <a:avLst/>
+          </a:prstGeom>
+          <a:noFill/>
+        </p:spPr>
+        <p:txBody>
+          <a:bodyPr wrap="square" anchor="ctr">
+            <a:spAutoFit/>
+          </a:bodyPr>
+          <a:lstStyle/>
+          <a:p>
+            <a:pPr algn="r">
+              <a:spcAft>
+                <a:spcPts val="600"/>
+              </a:spcAft>
+            </a:pPr>
+            <a:r>
+              <a:rPr sz="900" b="1">
+                <a:solidFill>
+                  <a:srgbClr val="C9A227"/>
+                </a:solidFill>
+                <a:latin typeface="Calibri"/>
+              </a:rPr>
+              <a:t>Slide 9</a:t>
+            </a:r>
+          </a:p>
+        </p:txBody>
+      </p:sp>
       <p:pic>
         <p:nvPicPr>
-          <p:cNvPr id="5" name="Picture 4" descr="screenshot_predict.png"/>
+          <p:cNvPr id="10" name="Picture 9" descr="screenshot_predict.png"/>
           <p:cNvPicPr>
             <a:picLocks noChangeAspect="1"/>
           </p:cNvPicPr>
@@ -6573,8 +9292,8 @@
         </p:blipFill>
         <p:spPr>
           <a:xfrm>
-            <a:off x="2426491" y="1371600"/>
-            <a:ext cx="7338713" cy="4846320"/>
+            <a:off x="2703423" y="1325880"/>
+            <a:ext cx="6784848" cy="4480560"/>
           </a:xfrm>
           <a:prstGeom prst="rect">
             <a:avLst/>
@@ -6583,14 +9302,14 @@
       </p:pic>
       <p:sp>
         <p:nvSpPr>
-          <p:cNvPr id="6" name="TextBox 5"/>
+          <p:cNvPr id="11" name="TextBox 10"/>
           <p:cNvSpPr txBox="1"/>
           <p:nvPr/>
         </p:nvSpPr>
         <p:spPr>
           <a:xfrm>
-            <a:off x="914400" y="6126480"/>
-            <a:ext cx="10362895" cy="548640"/>
+            <a:off x="914400" y="5623560"/>
+            <a:ext cx="10362895" cy="640080"/>
           </a:xfrm>
           <a:prstGeom prst="rect">
             <a:avLst/>

--- a/docs/Gold-Price-Prediction-Presentation.pptx
+++ b/docs/Gold-Price-Prediction-Presentation.pptx
@@ -18,6 +18,8 @@
     <p:sldId id="266" r:id="rId17"/>
     <p:sldId id="267" r:id="rId18"/>
     <p:sldId id="268" r:id="rId19"/>
+    <p:sldId id="269" r:id="rId20"/>
+    <p:sldId id="270" r:id="rId21"/>
   </p:sldIdLst>
   <p:sldSz cx="12191695" cy="6858000" type="screen4x3"/>
   <p:notesSz cx="6858000" cy="9144000"/>
@@ -3240,13 +3242,13 @@
               </a:spcAft>
             </a:pPr>
             <a:r>
-              <a:rPr sz="3400" b="1">
+              <a:rPr sz="3200" b="1">
                 <a:solidFill>
                   <a:srgbClr val="FFFFFF"/>
                 </a:solidFill>
                 <a:latin typeface="Calibri"/>
               </a:rPr>
-              <a:t>Gold Price Prediction using Machine Learning</a:t>
+              <a:t>Live Gold &amp; Silver Price Prediction using Machine Learning</a:t>
             </a:r>
           </a:p>
           <a:p>
@@ -3510,7 +3512,7 @@
                 </a:solidFill>
                 <a:latin typeface="Calibri"/>
               </a:rPr>
-              <a:t>Application - Model Comparison</a:t>
+              <a:t>Application - Live Dashboard</a:t>
             </a:r>
           </a:p>
         </p:txBody>
@@ -3549,7 +3551,7 @@
                 </a:solidFill>
                 <a:latin typeface="Calibri"/>
               </a:rPr>
-              <a:t>Gold Price Prediction</a:t>
+              <a:t>Gold &amp; Silver Predictor</a:t>
             </a:r>
           </a:p>
         </p:txBody>
@@ -3722,7 +3724,7 @@
       </p:sp>
       <p:pic>
         <p:nvPicPr>
-          <p:cNvPr id="10" name="Picture 9" descr="screenshot_train.png"/>
+          <p:cNvPr id="10" name="Picture 9" descr="dashboard_overview.png"/>
           <p:cNvPicPr>
             <a:picLocks noChangeAspect="1"/>
           </p:cNvPicPr>
@@ -3736,8 +3738,8 @@
         </p:blipFill>
         <p:spPr>
           <a:xfrm>
-            <a:off x="2703423" y="1325880"/>
-            <a:ext cx="6784848" cy="4480560"/>
+            <a:off x="2053237" y="1325880"/>
+            <a:ext cx="8085221" cy="4480560"/>
           </a:xfrm>
           <a:prstGeom prst="rect">
             <a:avLst/>
@@ -3778,7 +3780,7 @@
                 </a:solidFill>
                 <a:latin typeface="Calibri"/>
               </a:rPr>
-              <a:t>Train tab: accuracy table and the error comparison across all models.</a:t>
+              <a:t>Today's live gold and silver price in rupees per gram, per kg and per 10 gram, with the monthly history since 2000.</a:t>
             </a:r>
           </a:p>
         </p:txBody>
@@ -3923,7 +3925,7 @@
                 </a:solidFill>
                 <a:latin typeface="Calibri"/>
               </a:rPr>
-              <a:t>Conclusion</a:t>
+              <a:t>Application - 12 Month Forecast</a:t>
             </a:r>
           </a:p>
         </p:txBody>
@@ -3962,7 +3964,7 @@
                 </a:solidFill>
                 <a:latin typeface="Calibri"/>
               </a:rPr>
-              <a:t>Gold Price Prediction</a:t>
+              <a:t>Gold &amp; Silver Predictor</a:t>
             </a:r>
           </a:p>
         </p:txBody>
@@ -4133,50 +4135,30 @@
           </a:p>
         </p:txBody>
       </p:sp>
-      <p:sp>
-        <p:nvSpPr>
-          <p:cNvPr id="10" name="Rectangle 9"/>
-          <p:cNvSpPr/>
-          <p:nvPr/>
-        </p:nvSpPr>
-        <p:spPr>
-          <a:xfrm>
-            <a:off x="502920" y="1554480"/>
-            <a:ext cx="82296" cy="4297680"/>
-          </a:xfrm>
-          <a:prstGeom prst="rect">
-            <a:avLst/>
-          </a:prstGeom>
-          <a:solidFill>
-            <a:srgbClr val="C9A227"/>
-          </a:solidFill>
-          <a:ln>
-            <a:noFill/>
-          </a:ln>
-          <a:effectLst/>
-        </p:spPr>
-        <p:style>
-          <a:lnRef idx="1">
-            <a:schemeClr val="accent1"/>
-          </a:lnRef>
-          <a:fillRef idx="3">
-            <a:schemeClr val="accent1"/>
-          </a:fillRef>
-          <a:effectRef idx="2">
-            <a:schemeClr val="accent1"/>
-          </a:effectRef>
-          <a:fontRef idx="minor">
-            <a:schemeClr val="lt1"/>
-          </a:fontRef>
-        </p:style>
-        <p:txBody>
-          <a:bodyPr rtlCol="0" anchor="ctr"/>
-          <a:lstStyle/>
-          <a:p>
-            <a:pPr algn="ctr"/>
-          </a:p>
-        </p:txBody>
-      </p:sp>
+      <p:pic>
+        <p:nvPicPr>
+          <p:cNvPr id="10" name="Picture 9" descr="dashboard_forecast.png"/>
+          <p:cNvPicPr>
+            <a:picLocks noChangeAspect="1"/>
+          </p:cNvPicPr>
+          <p:nvPr/>
+        </p:nvPicPr>
+        <p:blipFill>
+          <a:blip r:embed="rId2"/>
+          <a:stretch>
+            <a:fillRect/>
+          </a:stretch>
+        </p:blipFill>
+        <p:spPr>
+          <a:xfrm>
+            <a:off x="2535138" y="1325880"/>
+            <a:ext cx="7121419" cy="4480560"/>
+          </a:xfrm>
+          <a:prstGeom prst="rect">
+            <a:avLst/>
+          </a:prstGeom>
+        </p:spPr>
+      </p:pic>
       <p:sp>
         <p:nvSpPr>
           <p:cNvPr id="11" name="TextBox 10"/>
@@ -4185,8 +4167,8 @@
         </p:nvSpPr>
         <p:spPr>
           <a:xfrm>
-            <a:off x="868680" y="1371600"/>
-            <a:ext cx="10728655" cy="4663440"/>
+            <a:off x="914400" y="5623560"/>
+            <a:ext cx="10362895" cy="640080"/>
           </a:xfrm>
           <a:prstGeom prst="rect">
             <a:avLst/>
@@ -4194,72 +4176,24 @@
           <a:noFill/>
         </p:spPr>
         <p:txBody>
-          <a:bodyPr wrap="square" anchor="ctr">
+          <a:bodyPr wrap="square">
             <a:spAutoFit/>
           </a:bodyPr>
           <a:lstStyle/>
           <a:p>
-            <a:pPr algn="l">
-              <a:spcAft>
-                <a:spcPts val="2200"/>
-              </a:spcAft>
-            </a:pPr>
-            <a:r>
-              <a:rPr sz="2000" b="0">
-                <a:solidFill>
-                  <a:srgbClr val="222222"/>
-                </a:solidFill>
-                <a:latin typeface="Calibri"/>
-              </a:rPr>
-              <a:t>•   RandomForest gave the best accuracy and clearly beat the naive baseline.</a:t>
-            </a:r>
-          </a:p>
-          <a:p>
-            <a:pPr algn="l">
-              <a:spcAft>
-                <a:spcPts val="2200"/>
-              </a:spcAft>
-            </a:pPr>
-            <a:r>
-              <a:rPr sz="2000" b="0">
-                <a:solidFill>
-                  <a:srgbClr val="222222"/>
-                </a:solidFill>
-                <a:latin typeface="Calibri"/>
-              </a:rPr>
-              <a:t>•   Predicting returns instead of raw prices made the models reliable on a trending series.</a:t>
-            </a:r>
-          </a:p>
-          <a:p>
-            <a:pPr algn="l">
-              <a:spcAft>
-                <a:spcPts val="2200"/>
-              </a:spcAft>
-            </a:pPr>
-            <a:r>
-              <a:rPr sz="2000" b="0">
-                <a:solidFill>
-                  <a:srgbClr val="222222"/>
-                </a:solidFill>
-                <a:latin typeface="Calibri"/>
-              </a:rPr>
-              <a:t>•   The Tkinter GUI turns the trained model into an easy-to-use forecasting tool.</a:t>
-            </a:r>
-          </a:p>
-          <a:p>
-            <a:pPr algn="l">
-              <a:spcAft>
-                <a:spcPts val="2200"/>
-              </a:spcAft>
-            </a:pPr>
-            <a:r>
-              <a:rPr sz="2000" b="0">
-                <a:solidFill>
-                  <a:srgbClr val="222222"/>
-                </a:solidFill>
-                <a:latin typeface="Calibri"/>
-              </a:rPr>
-              <a:t>•   The project demonstrates a complete Machine Learning pipeline from data to interface.</a:t>
+            <a:pPr algn="ctr">
+              <a:spcAft>
+                <a:spcPts val="600"/>
+              </a:spcAft>
+            </a:pPr>
+            <a:r>
+              <a:rPr sz="1300" b="0">
+                <a:solidFill>
+                  <a:srgbClr val="6B7280"/>
+                </a:solidFill>
+                <a:latin typeface="Calibri"/>
+              </a:rPr>
+              <a:t>Solid line = actual price, dashed line = model forecast, plus the month by month expected price in rupees.</a:t>
             </a:r>
           </a:p>
         </p:txBody>
@@ -4404,7 +4338,7 @@
                 </a:solidFill>
                 <a:latin typeface="Calibri"/>
               </a:rPr>
-              <a:t>Future Scope</a:t>
+              <a:t>Application - Model Accuracy</a:t>
             </a:r>
           </a:p>
         </p:txBody>
@@ -4443,7 +4377,7 @@
                 </a:solidFill>
                 <a:latin typeface="Calibri"/>
               </a:rPr>
-              <a:t>Gold Price Prediction</a:t>
+              <a:t>Gold &amp; Silver Predictor</a:t>
             </a:r>
           </a:p>
         </p:txBody>
@@ -4614,50 +4548,30 @@
           </a:p>
         </p:txBody>
       </p:sp>
-      <p:sp>
-        <p:nvSpPr>
-          <p:cNvPr id="10" name="Rectangle 9"/>
-          <p:cNvSpPr/>
-          <p:nvPr/>
-        </p:nvSpPr>
-        <p:spPr>
-          <a:xfrm>
-            <a:off x="502920" y="1554480"/>
-            <a:ext cx="82296" cy="4297680"/>
-          </a:xfrm>
-          <a:prstGeom prst="rect">
-            <a:avLst/>
-          </a:prstGeom>
-          <a:solidFill>
-            <a:srgbClr val="C9A227"/>
-          </a:solidFill>
-          <a:ln>
-            <a:noFill/>
-          </a:ln>
-          <a:effectLst/>
-        </p:spPr>
-        <p:style>
-          <a:lnRef idx="1">
-            <a:schemeClr val="accent1"/>
-          </a:lnRef>
-          <a:fillRef idx="3">
-            <a:schemeClr val="accent1"/>
-          </a:fillRef>
-          <a:effectRef idx="2">
-            <a:schemeClr val="accent1"/>
-          </a:effectRef>
-          <a:fontRef idx="minor">
-            <a:schemeClr val="lt1"/>
-          </a:fontRef>
-        </p:style>
-        <p:txBody>
-          <a:bodyPr rtlCol="0" anchor="ctr"/>
-          <a:lstStyle/>
-          <a:p>
-            <a:pPr algn="ctr"/>
-          </a:p>
-        </p:txBody>
-      </p:sp>
+      <p:pic>
+        <p:nvPicPr>
+          <p:cNvPr id="10" name="Picture 9" descr="dashboard_accuracy.png"/>
+          <p:cNvPicPr>
+            <a:picLocks noChangeAspect="1"/>
+          </p:cNvPicPr>
+          <p:nvPr/>
+        </p:nvPicPr>
+        <p:blipFill>
+          <a:blip r:embed="rId2"/>
+          <a:stretch>
+            <a:fillRect/>
+          </a:stretch>
+        </p:blipFill>
+        <p:spPr>
+          <a:xfrm>
+            <a:off x="731520" y="1325880"/>
+            <a:ext cx="10728655" cy="4269110"/>
+          </a:xfrm>
+          <a:prstGeom prst="rect">
+            <a:avLst/>
+          </a:prstGeom>
+        </p:spPr>
+      </p:pic>
       <p:sp>
         <p:nvSpPr>
           <p:cNvPr id="11" name="TextBox 10"/>
@@ -4666,8 +4580,8 @@
         </p:nvSpPr>
         <p:spPr>
           <a:xfrm>
-            <a:off x="868680" y="1371600"/>
-            <a:ext cx="10728655" cy="4663440"/>
+            <a:off x="914400" y="5623560"/>
+            <a:ext cx="10362895" cy="640080"/>
           </a:xfrm>
           <a:prstGeom prst="rect">
             <a:avLst/>
@@ -4675,72 +4589,24 @@
           <a:noFill/>
         </p:spPr>
         <p:txBody>
-          <a:bodyPr wrap="square" anchor="ctr">
+          <a:bodyPr wrap="square">
             <a:spAutoFit/>
           </a:bodyPr>
           <a:lstStyle/>
           <a:p>
-            <a:pPr algn="l">
-              <a:spcAft>
-                <a:spcPts val="2200"/>
-              </a:spcAft>
-            </a:pPr>
-            <a:r>
-              <a:rPr sz="2000" b="0">
-                <a:solidFill>
-                  <a:srgbClr val="222222"/>
-                </a:solidFill>
-                <a:latin typeface="Calibri"/>
-              </a:rPr>
-              <a:t>•   Add real economic features such as inflation, USD index and interest rates.</a:t>
-            </a:r>
-          </a:p>
-          <a:p>
-            <a:pPr algn="l">
-              <a:spcAft>
-                <a:spcPts val="2200"/>
-              </a:spcAft>
-            </a:pPr>
-            <a:r>
-              <a:rPr sz="2000" b="0">
-                <a:solidFill>
-                  <a:srgbClr val="222222"/>
-                </a:solidFill>
-                <a:latin typeface="Calibri"/>
-              </a:rPr>
-              <a:t>•   Try deep-learning time-series models like LSTM for longer forecasts.</a:t>
-            </a:r>
-          </a:p>
-          <a:p>
-            <a:pPr algn="l">
-              <a:spcAft>
-                <a:spcPts val="2200"/>
-              </a:spcAft>
-            </a:pPr>
-            <a:r>
-              <a:rPr sz="2000" b="0">
-                <a:solidFill>
-                  <a:srgbClr val="222222"/>
-                </a:solidFill>
-                <a:latin typeface="Calibri"/>
-              </a:rPr>
-              <a:t>•   Connect a live gold price API so predictions always use current data.</a:t>
-            </a:r>
-          </a:p>
-          <a:p>
-            <a:pPr algn="l">
-              <a:spcAft>
-                <a:spcPts val="2200"/>
-              </a:spcAft>
-            </a:pPr>
-            <a:r>
-              <a:rPr sz="2000" b="0">
-                <a:solidFill>
-                  <a:srgbClr val="222222"/>
-                </a:solidFill>
-                <a:latin typeface="Calibri"/>
-              </a:rPr>
-              <a:t>•   Show a confidence range instead of a single predicted value.</a:t>
+            <a:pPr algn="ctr">
+              <a:spcAft>
+                <a:spcPts val="600"/>
+              </a:spcAft>
+            </a:pPr>
+            <a:r>
+              <a:rPr sz="1300" b="0">
+                <a:solidFill>
+                  <a:srgbClr val="6B7280"/>
+                </a:solidFill>
+                <a:latin typeface="Calibri"/>
+              </a:rPr>
+              <a:t>Error of every model on 60 unseen months, compared against the naive 'next month = this month' baseline.</a:t>
             </a:r>
           </a:p>
         </p:txBody>
@@ -4772,6 +4638,984 @@
         <p:spPr>
           <a:xfrm>
             <a:off x="0" y="0"/>
+            <a:ext cx="12191695" cy="960120"/>
+          </a:xfrm>
+          <a:prstGeom prst="rect">
+            <a:avLst/>
+          </a:prstGeom>
+          <a:solidFill>
+            <a:srgbClr val="1F3864"/>
+          </a:solidFill>
+          <a:ln>
+            <a:noFill/>
+          </a:ln>
+          <a:effectLst/>
+        </p:spPr>
+        <p:style>
+          <a:lnRef idx="1">
+            <a:schemeClr val="accent1"/>
+          </a:lnRef>
+          <a:fillRef idx="3">
+            <a:schemeClr val="accent1"/>
+          </a:fillRef>
+          <a:effectRef idx="2">
+            <a:schemeClr val="accent1"/>
+          </a:effectRef>
+          <a:fontRef idx="minor">
+            <a:schemeClr val="lt1"/>
+          </a:fontRef>
+        </p:style>
+        <p:txBody>
+          <a:bodyPr rtlCol="0" anchor="ctr"/>
+          <a:lstStyle/>
+          <a:p>
+            <a:pPr algn="ctr"/>
+          </a:p>
+        </p:txBody>
+      </p:sp>
+      <p:sp>
+        <p:nvSpPr>
+          <p:cNvPr id="3" name="Rectangle 2"/>
+          <p:cNvSpPr/>
+          <p:nvPr/>
+        </p:nvSpPr>
+        <p:spPr>
+          <a:xfrm>
+            <a:off x="0" y="960120"/>
+            <a:ext cx="12191695" cy="64008"/>
+          </a:xfrm>
+          <a:prstGeom prst="rect">
+            <a:avLst/>
+          </a:prstGeom>
+          <a:solidFill>
+            <a:srgbClr val="C9A227"/>
+          </a:solidFill>
+          <a:ln>
+            <a:noFill/>
+          </a:ln>
+          <a:effectLst/>
+        </p:spPr>
+        <p:style>
+          <a:lnRef idx="1">
+            <a:schemeClr val="accent1"/>
+          </a:lnRef>
+          <a:fillRef idx="3">
+            <a:schemeClr val="accent1"/>
+          </a:fillRef>
+          <a:effectRef idx="2">
+            <a:schemeClr val="accent1"/>
+          </a:effectRef>
+          <a:fontRef idx="minor">
+            <a:schemeClr val="lt1"/>
+          </a:fontRef>
+        </p:style>
+        <p:txBody>
+          <a:bodyPr rtlCol="0" anchor="ctr"/>
+          <a:lstStyle/>
+          <a:p>
+            <a:pPr algn="ctr"/>
+          </a:p>
+        </p:txBody>
+      </p:sp>
+      <p:sp>
+        <p:nvSpPr>
+          <p:cNvPr id="4" name="TextBox 3"/>
+          <p:cNvSpPr txBox="1"/>
+          <p:nvPr/>
+        </p:nvSpPr>
+        <p:spPr>
+          <a:xfrm>
+            <a:off x="457200" y="137160"/>
+            <a:ext cx="8351215" cy="731520"/>
+          </a:xfrm>
+          <a:prstGeom prst="rect">
+            <a:avLst/>
+          </a:prstGeom>
+          <a:noFill/>
+        </p:spPr>
+        <p:txBody>
+          <a:bodyPr wrap="square" anchor="ctr">
+            <a:spAutoFit/>
+          </a:bodyPr>
+          <a:lstStyle/>
+          <a:p>
+            <a:pPr algn="l">
+              <a:spcAft>
+                <a:spcPts val="600"/>
+              </a:spcAft>
+            </a:pPr>
+            <a:r>
+              <a:rPr sz="2600" b="1">
+                <a:solidFill>
+                  <a:srgbClr val="FFFFFF"/>
+                </a:solidFill>
+                <a:latin typeface="Calibri"/>
+              </a:rPr>
+              <a:t>Conclusion</a:t>
+            </a:r>
+          </a:p>
+        </p:txBody>
+      </p:sp>
+      <p:sp>
+        <p:nvSpPr>
+          <p:cNvPr id="5" name="TextBox 4"/>
+          <p:cNvSpPr txBox="1"/>
+          <p:nvPr/>
+        </p:nvSpPr>
+        <p:spPr>
+          <a:xfrm>
+            <a:off x="8534095" y="137160"/>
+            <a:ext cx="3200400" cy="731520"/>
+          </a:xfrm>
+          <a:prstGeom prst="rect">
+            <a:avLst/>
+          </a:prstGeom>
+          <a:noFill/>
+        </p:spPr>
+        <p:txBody>
+          <a:bodyPr wrap="square" anchor="ctr">
+            <a:spAutoFit/>
+          </a:bodyPr>
+          <a:lstStyle/>
+          <a:p>
+            <a:pPr algn="r">
+              <a:spcAft>
+                <a:spcPts val="600"/>
+              </a:spcAft>
+            </a:pPr>
+            <a:r>
+              <a:rPr sz="1200" b="1">
+                <a:solidFill>
+                  <a:srgbClr val="C9A227"/>
+                </a:solidFill>
+                <a:latin typeface="Calibri"/>
+              </a:rPr>
+              <a:t>Gold &amp; Silver Predictor</a:t>
+            </a:r>
+          </a:p>
+        </p:txBody>
+      </p:sp>
+      <p:sp>
+        <p:nvSpPr>
+          <p:cNvPr id="6" name="Rectangle 5"/>
+          <p:cNvSpPr/>
+          <p:nvPr/>
+        </p:nvSpPr>
+        <p:spPr>
+          <a:xfrm>
+            <a:off x="0" y="6473952"/>
+            <a:ext cx="12191695" cy="384048"/>
+          </a:xfrm>
+          <a:prstGeom prst="rect">
+            <a:avLst/>
+          </a:prstGeom>
+          <a:solidFill>
+            <a:srgbClr val="1F3864"/>
+          </a:solidFill>
+          <a:ln>
+            <a:noFill/>
+          </a:ln>
+          <a:effectLst/>
+        </p:spPr>
+        <p:style>
+          <a:lnRef idx="1">
+            <a:schemeClr val="accent1"/>
+          </a:lnRef>
+          <a:fillRef idx="3">
+            <a:schemeClr val="accent1"/>
+          </a:fillRef>
+          <a:effectRef idx="2">
+            <a:schemeClr val="accent1"/>
+          </a:effectRef>
+          <a:fontRef idx="minor">
+            <a:schemeClr val="lt1"/>
+          </a:fontRef>
+        </p:style>
+        <p:txBody>
+          <a:bodyPr rtlCol="0" anchor="ctr"/>
+          <a:lstStyle/>
+          <a:p>
+            <a:pPr algn="ctr"/>
+          </a:p>
+        </p:txBody>
+      </p:sp>
+      <p:sp>
+        <p:nvSpPr>
+          <p:cNvPr id="7" name="Rectangle 6"/>
+          <p:cNvSpPr/>
+          <p:nvPr/>
+        </p:nvSpPr>
+        <p:spPr>
+          <a:xfrm>
+            <a:off x="0" y="6473952"/>
+            <a:ext cx="128016" cy="384048"/>
+          </a:xfrm>
+          <a:prstGeom prst="rect">
+            <a:avLst/>
+          </a:prstGeom>
+          <a:solidFill>
+            <a:srgbClr val="C9A227"/>
+          </a:solidFill>
+          <a:ln>
+            <a:noFill/>
+          </a:ln>
+          <a:effectLst/>
+        </p:spPr>
+        <p:style>
+          <a:lnRef idx="1">
+            <a:schemeClr val="accent1"/>
+          </a:lnRef>
+          <a:fillRef idx="3">
+            <a:schemeClr val="accent1"/>
+          </a:fillRef>
+          <a:effectRef idx="2">
+            <a:schemeClr val="accent1"/>
+          </a:effectRef>
+          <a:fontRef idx="minor">
+            <a:schemeClr val="lt1"/>
+          </a:fontRef>
+        </p:style>
+        <p:txBody>
+          <a:bodyPr rtlCol="0" anchor="ctr"/>
+          <a:lstStyle/>
+          <a:p>
+            <a:pPr algn="ctr"/>
+          </a:p>
+        </p:txBody>
+      </p:sp>
+      <p:sp>
+        <p:nvSpPr>
+          <p:cNvPr id="8" name="TextBox 7"/>
+          <p:cNvSpPr txBox="1"/>
+          <p:nvPr/>
+        </p:nvSpPr>
+        <p:spPr>
+          <a:xfrm>
+            <a:off x="274320" y="6473952"/>
+            <a:ext cx="10362895" cy="384048"/>
+          </a:xfrm>
+          <a:prstGeom prst="rect">
+            <a:avLst/>
+          </a:prstGeom>
+          <a:noFill/>
+        </p:spPr>
+        <p:txBody>
+          <a:bodyPr wrap="square" anchor="ctr">
+            <a:spAutoFit/>
+          </a:bodyPr>
+          <a:lstStyle/>
+          <a:p>
+            <a:pPr algn="l">
+              <a:spcAft>
+                <a:spcPts val="600"/>
+              </a:spcAft>
+            </a:pPr>
+            <a:r>
+              <a:rPr sz="900" b="0">
+                <a:solidFill>
+                  <a:srgbClr val="FFFFFF"/>
+                </a:solidFill>
+                <a:latin typeface="Calibri"/>
+              </a:rPr>
+              <a:t>Sanchay Bhardwaj (2300650100104)  |  B.S.A. College of Engineering &amp; Technology, Mathura</a:t>
+            </a:r>
+          </a:p>
+        </p:txBody>
+      </p:sp>
+      <p:sp>
+        <p:nvSpPr>
+          <p:cNvPr id="9" name="TextBox 8"/>
+          <p:cNvSpPr txBox="1"/>
+          <p:nvPr/>
+        </p:nvSpPr>
+        <p:spPr>
+          <a:xfrm>
+            <a:off x="10728655" y="6473952"/>
+            <a:ext cx="1188720" cy="384048"/>
+          </a:xfrm>
+          <a:prstGeom prst="rect">
+            <a:avLst/>
+          </a:prstGeom>
+          <a:noFill/>
+        </p:spPr>
+        <p:txBody>
+          <a:bodyPr wrap="square" anchor="ctr">
+            <a:spAutoFit/>
+          </a:bodyPr>
+          <a:lstStyle/>
+          <a:p>
+            <a:pPr algn="r">
+              <a:spcAft>
+                <a:spcPts val="600"/>
+              </a:spcAft>
+            </a:pPr>
+            <a:r>
+              <a:rPr sz="900" b="1">
+                <a:solidFill>
+                  <a:srgbClr val="C9A227"/>
+                </a:solidFill>
+                <a:latin typeface="Calibri"/>
+              </a:rPr>
+              <a:t>Slide 13</a:t>
+            </a:r>
+          </a:p>
+        </p:txBody>
+      </p:sp>
+      <p:sp>
+        <p:nvSpPr>
+          <p:cNvPr id="10" name="Rectangle 9"/>
+          <p:cNvSpPr/>
+          <p:nvPr/>
+        </p:nvSpPr>
+        <p:spPr>
+          <a:xfrm>
+            <a:off x="502920" y="1554480"/>
+            <a:ext cx="82296" cy="4297680"/>
+          </a:xfrm>
+          <a:prstGeom prst="rect">
+            <a:avLst/>
+          </a:prstGeom>
+          <a:solidFill>
+            <a:srgbClr val="C9A227"/>
+          </a:solidFill>
+          <a:ln>
+            <a:noFill/>
+          </a:ln>
+          <a:effectLst/>
+        </p:spPr>
+        <p:style>
+          <a:lnRef idx="1">
+            <a:schemeClr val="accent1"/>
+          </a:lnRef>
+          <a:fillRef idx="3">
+            <a:schemeClr val="accent1"/>
+          </a:fillRef>
+          <a:effectRef idx="2">
+            <a:schemeClr val="accent1"/>
+          </a:effectRef>
+          <a:fontRef idx="minor">
+            <a:schemeClr val="lt1"/>
+          </a:fontRef>
+        </p:style>
+        <p:txBody>
+          <a:bodyPr rtlCol="0" anchor="ctr"/>
+          <a:lstStyle/>
+          <a:p>
+            <a:pPr algn="ctr"/>
+          </a:p>
+        </p:txBody>
+      </p:sp>
+      <p:sp>
+        <p:nvSpPr>
+          <p:cNvPr id="11" name="TextBox 10"/>
+          <p:cNvSpPr txBox="1"/>
+          <p:nvPr/>
+        </p:nvSpPr>
+        <p:spPr>
+          <a:xfrm>
+            <a:off x="868680" y="1371600"/>
+            <a:ext cx="10728655" cy="4663440"/>
+          </a:xfrm>
+          <a:prstGeom prst="rect">
+            <a:avLst/>
+          </a:prstGeom>
+          <a:noFill/>
+        </p:spPr>
+        <p:txBody>
+          <a:bodyPr wrap="square" anchor="ctr">
+            <a:spAutoFit/>
+          </a:bodyPr>
+          <a:lstStyle/>
+          <a:p>
+            <a:pPr algn="l">
+              <a:spcAft>
+                <a:spcPts val="1800"/>
+              </a:spcAft>
+            </a:pPr>
+            <a:r>
+              <a:rPr sz="1900" b="0">
+                <a:solidFill>
+                  <a:srgbClr val="222222"/>
+                </a:solidFill>
+                <a:latin typeface="Calibri"/>
+              </a:rPr>
+              <a:t>•   Random Forest gave the lowest error on both metals and beat the naive baseline.</a:t>
+            </a:r>
+          </a:p>
+          <a:p>
+            <a:pPr algn="l">
+              <a:spcAft>
+                <a:spcPts val="1800"/>
+              </a:spcAft>
+            </a:pPr>
+            <a:r>
+              <a:rPr sz="1900" b="0">
+                <a:solidFill>
+                  <a:srgbClr val="222222"/>
+                </a:solidFill>
+                <a:latin typeface="Calibri"/>
+              </a:rPr>
+              <a:t>•   Predicting returns instead of raw prices made the models reliable on a strongly trending series.</a:t>
+            </a:r>
+          </a:p>
+          <a:p>
+            <a:pPr algn="l">
+              <a:spcAft>
+                <a:spcPts val="1800"/>
+              </a:spcAft>
+            </a:pPr>
+            <a:r>
+              <a:rPr sz="1900" b="0">
+                <a:solidFill>
+                  <a:srgbClr val="222222"/>
+                </a:solidFill>
+                <a:latin typeface="Calibri"/>
+              </a:rPr>
+              <a:t>•   Live prices, rupee conversion and the forecast are combined in one self-explanatory dashboard.</a:t>
+            </a:r>
+          </a:p>
+          <a:p>
+            <a:pPr algn="l">
+              <a:spcAft>
+                <a:spcPts val="1800"/>
+              </a:spcAft>
+            </a:pPr>
+            <a:r>
+              <a:rPr sz="1900" b="0">
+                <a:solidFill>
+                  <a:srgbClr val="222222"/>
+                </a:solidFill>
+                <a:latin typeface="Calibri"/>
+              </a:rPr>
+              <a:t>•   The project demonstrates a complete Machine Learning pipeline - data, model, API, interface.</a:t>
+            </a:r>
+          </a:p>
+        </p:txBody>
+      </p:sp>
+    </p:spTree>
+  </p:cSld>
+  <p:clrMapOvr>
+    <a:masterClrMapping/>
+  </p:clrMapOvr>
+</p:sld>
+</file>
+
+<file path=ppt/slides/slide14.xml><?xml version="1.0" encoding="utf-8"?>
+<p:sld xmlns:a="http://schemas.openxmlformats.org/drawingml/2006/main" xmlns:p="http://schemas.openxmlformats.org/presentationml/2006/main" xmlns:r="http://schemas.openxmlformats.org/officeDocument/2006/relationships">
+  <p:cSld>
+    <p:spTree>
+      <p:nvGrpSpPr>
+        <p:cNvPr id="1" name=""/>
+        <p:cNvGrpSpPr/>
+        <p:nvPr/>
+      </p:nvGrpSpPr>
+      <p:grpSpPr/>
+      <p:sp>
+        <p:nvSpPr>
+          <p:cNvPr id="2" name="Rectangle 1"/>
+          <p:cNvSpPr/>
+          <p:nvPr/>
+        </p:nvSpPr>
+        <p:spPr>
+          <a:xfrm>
+            <a:off x="0" y="0"/>
+            <a:ext cx="12191695" cy="960120"/>
+          </a:xfrm>
+          <a:prstGeom prst="rect">
+            <a:avLst/>
+          </a:prstGeom>
+          <a:solidFill>
+            <a:srgbClr val="1F3864"/>
+          </a:solidFill>
+          <a:ln>
+            <a:noFill/>
+          </a:ln>
+          <a:effectLst/>
+        </p:spPr>
+        <p:style>
+          <a:lnRef idx="1">
+            <a:schemeClr val="accent1"/>
+          </a:lnRef>
+          <a:fillRef idx="3">
+            <a:schemeClr val="accent1"/>
+          </a:fillRef>
+          <a:effectRef idx="2">
+            <a:schemeClr val="accent1"/>
+          </a:effectRef>
+          <a:fontRef idx="minor">
+            <a:schemeClr val="lt1"/>
+          </a:fontRef>
+        </p:style>
+        <p:txBody>
+          <a:bodyPr rtlCol="0" anchor="ctr"/>
+          <a:lstStyle/>
+          <a:p>
+            <a:pPr algn="ctr"/>
+          </a:p>
+        </p:txBody>
+      </p:sp>
+      <p:sp>
+        <p:nvSpPr>
+          <p:cNvPr id="3" name="Rectangle 2"/>
+          <p:cNvSpPr/>
+          <p:nvPr/>
+        </p:nvSpPr>
+        <p:spPr>
+          <a:xfrm>
+            <a:off x="0" y="960120"/>
+            <a:ext cx="12191695" cy="64008"/>
+          </a:xfrm>
+          <a:prstGeom prst="rect">
+            <a:avLst/>
+          </a:prstGeom>
+          <a:solidFill>
+            <a:srgbClr val="C9A227"/>
+          </a:solidFill>
+          <a:ln>
+            <a:noFill/>
+          </a:ln>
+          <a:effectLst/>
+        </p:spPr>
+        <p:style>
+          <a:lnRef idx="1">
+            <a:schemeClr val="accent1"/>
+          </a:lnRef>
+          <a:fillRef idx="3">
+            <a:schemeClr val="accent1"/>
+          </a:fillRef>
+          <a:effectRef idx="2">
+            <a:schemeClr val="accent1"/>
+          </a:effectRef>
+          <a:fontRef idx="minor">
+            <a:schemeClr val="lt1"/>
+          </a:fontRef>
+        </p:style>
+        <p:txBody>
+          <a:bodyPr rtlCol="0" anchor="ctr"/>
+          <a:lstStyle/>
+          <a:p>
+            <a:pPr algn="ctr"/>
+          </a:p>
+        </p:txBody>
+      </p:sp>
+      <p:sp>
+        <p:nvSpPr>
+          <p:cNvPr id="4" name="TextBox 3"/>
+          <p:cNvSpPr txBox="1"/>
+          <p:nvPr/>
+        </p:nvSpPr>
+        <p:spPr>
+          <a:xfrm>
+            <a:off x="457200" y="137160"/>
+            <a:ext cx="8351215" cy="731520"/>
+          </a:xfrm>
+          <a:prstGeom prst="rect">
+            <a:avLst/>
+          </a:prstGeom>
+          <a:noFill/>
+        </p:spPr>
+        <p:txBody>
+          <a:bodyPr wrap="square" anchor="ctr">
+            <a:spAutoFit/>
+          </a:bodyPr>
+          <a:lstStyle/>
+          <a:p>
+            <a:pPr algn="l">
+              <a:spcAft>
+                <a:spcPts val="600"/>
+              </a:spcAft>
+            </a:pPr>
+            <a:r>
+              <a:rPr sz="2600" b="1">
+                <a:solidFill>
+                  <a:srgbClr val="FFFFFF"/>
+                </a:solidFill>
+                <a:latin typeface="Calibri"/>
+              </a:rPr>
+              <a:t>Future Scope</a:t>
+            </a:r>
+          </a:p>
+        </p:txBody>
+      </p:sp>
+      <p:sp>
+        <p:nvSpPr>
+          <p:cNvPr id="5" name="TextBox 4"/>
+          <p:cNvSpPr txBox="1"/>
+          <p:nvPr/>
+        </p:nvSpPr>
+        <p:spPr>
+          <a:xfrm>
+            <a:off x="8534095" y="137160"/>
+            <a:ext cx="3200400" cy="731520"/>
+          </a:xfrm>
+          <a:prstGeom prst="rect">
+            <a:avLst/>
+          </a:prstGeom>
+          <a:noFill/>
+        </p:spPr>
+        <p:txBody>
+          <a:bodyPr wrap="square" anchor="ctr">
+            <a:spAutoFit/>
+          </a:bodyPr>
+          <a:lstStyle/>
+          <a:p>
+            <a:pPr algn="r">
+              <a:spcAft>
+                <a:spcPts val="600"/>
+              </a:spcAft>
+            </a:pPr>
+            <a:r>
+              <a:rPr sz="1200" b="1">
+                <a:solidFill>
+                  <a:srgbClr val="C9A227"/>
+                </a:solidFill>
+                <a:latin typeface="Calibri"/>
+              </a:rPr>
+              <a:t>Gold &amp; Silver Predictor</a:t>
+            </a:r>
+          </a:p>
+        </p:txBody>
+      </p:sp>
+      <p:sp>
+        <p:nvSpPr>
+          <p:cNvPr id="6" name="Rectangle 5"/>
+          <p:cNvSpPr/>
+          <p:nvPr/>
+        </p:nvSpPr>
+        <p:spPr>
+          <a:xfrm>
+            <a:off x="0" y="6473952"/>
+            <a:ext cx="12191695" cy="384048"/>
+          </a:xfrm>
+          <a:prstGeom prst="rect">
+            <a:avLst/>
+          </a:prstGeom>
+          <a:solidFill>
+            <a:srgbClr val="1F3864"/>
+          </a:solidFill>
+          <a:ln>
+            <a:noFill/>
+          </a:ln>
+          <a:effectLst/>
+        </p:spPr>
+        <p:style>
+          <a:lnRef idx="1">
+            <a:schemeClr val="accent1"/>
+          </a:lnRef>
+          <a:fillRef idx="3">
+            <a:schemeClr val="accent1"/>
+          </a:fillRef>
+          <a:effectRef idx="2">
+            <a:schemeClr val="accent1"/>
+          </a:effectRef>
+          <a:fontRef idx="minor">
+            <a:schemeClr val="lt1"/>
+          </a:fontRef>
+        </p:style>
+        <p:txBody>
+          <a:bodyPr rtlCol="0" anchor="ctr"/>
+          <a:lstStyle/>
+          <a:p>
+            <a:pPr algn="ctr"/>
+          </a:p>
+        </p:txBody>
+      </p:sp>
+      <p:sp>
+        <p:nvSpPr>
+          <p:cNvPr id="7" name="Rectangle 6"/>
+          <p:cNvSpPr/>
+          <p:nvPr/>
+        </p:nvSpPr>
+        <p:spPr>
+          <a:xfrm>
+            <a:off x="0" y="6473952"/>
+            <a:ext cx="128016" cy="384048"/>
+          </a:xfrm>
+          <a:prstGeom prst="rect">
+            <a:avLst/>
+          </a:prstGeom>
+          <a:solidFill>
+            <a:srgbClr val="C9A227"/>
+          </a:solidFill>
+          <a:ln>
+            <a:noFill/>
+          </a:ln>
+          <a:effectLst/>
+        </p:spPr>
+        <p:style>
+          <a:lnRef idx="1">
+            <a:schemeClr val="accent1"/>
+          </a:lnRef>
+          <a:fillRef idx="3">
+            <a:schemeClr val="accent1"/>
+          </a:fillRef>
+          <a:effectRef idx="2">
+            <a:schemeClr val="accent1"/>
+          </a:effectRef>
+          <a:fontRef idx="minor">
+            <a:schemeClr val="lt1"/>
+          </a:fontRef>
+        </p:style>
+        <p:txBody>
+          <a:bodyPr rtlCol="0" anchor="ctr"/>
+          <a:lstStyle/>
+          <a:p>
+            <a:pPr algn="ctr"/>
+          </a:p>
+        </p:txBody>
+      </p:sp>
+      <p:sp>
+        <p:nvSpPr>
+          <p:cNvPr id="8" name="TextBox 7"/>
+          <p:cNvSpPr txBox="1"/>
+          <p:nvPr/>
+        </p:nvSpPr>
+        <p:spPr>
+          <a:xfrm>
+            <a:off x="274320" y="6473952"/>
+            <a:ext cx="10362895" cy="384048"/>
+          </a:xfrm>
+          <a:prstGeom prst="rect">
+            <a:avLst/>
+          </a:prstGeom>
+          <a:noFill/>
+        </p:spPr>
+        <p:txBody>
+          <a:bodyPr wrap="square" anchor="ctr">
+            <a:spAutoFit/>
+          </a:bodyPr>
+          <a:lstStyle/>
+          <a:p>
+            <a:pPr algn="l">
+              <a:spcAft>
+                <a:spcPts val="600"/>
+              </a:spcAft>
+            </a:pPr>
+            <a:r>
+              <a:rPr sz="900" b="0">
+                <a:solidFill>
+                  <a:srgbClr val="FFFFFF"/>
+                </a:solidFill>
+                <a:latin typeface="Calibri"/>
+              </a:rPr>
+              <a:t>Sanchay Bhardwaj (2300650100104)  |  B.S.A. College of Engineering &amp; Technology, Mathura</a:t>
+            </a:r>
+          </a:p>
+        </p:txBody>
+      </p:sp>
+      <p:sp>
+        <p:nvSpPr>
+          <p:cNvPr id="9" name="TextBox 8"/>
+          <p:cNvSpPr txBox="1"/>
+          <p:nvPr/>
+        </p:nvSpPr>
+        <p:spPr>
+          <a:xfrm>
+            <a:off x="10728655" y="6473952"/>
+            <a:ext cx="1188720" cy="384048"/>
+          </a:xfrm>
+          <a:prstGeom prst="rect">
+            <a:avLst/>
+          </a:prstGeom>
+          <a:noFill/>
+        </p:spPr>
+        <p:txBody>
+          <a:bodyPr wrap="square" anchor="ctr">
+            <a:spAutoFit/>
+          </a:bodyPr>
+          <a:lstStyle/>
+          <a:p>
+            <a:pPr algn="r">
+              <a:spcAft>
+                <a:spcPts val="600"/>
+              </a:spcAft>
+            </a:pPr>
+            <a:r>
+              <a:rPr sz="900" b="1">
+                <a:solidFill>
+                  <a:srgbClr val="C9A227"/>
+                </a:solidFill>
+                <a:latin typeface="Calibri"/>
+              </a:rPr>
+              <a:t>Slide 14</a:t>
+            </a:r>
+          </a:p>
+        </p:txBody>
+      </p:sp>
+      <p:sp>
+        <p:nvSpPr>
+          <p:cNvPr id="10" name="Rectangle 9"/>
+          <p:cNvSpPr/>
+          <p:nvPr/>
+        </p:nvSpPr>
+        <p:spPr>
+          <a:xfrm>
+            <a:off x="502920" y="1554480"/>
+            <a:ext cx="82296" cy="4297680"/>
+          </a:xfrm>
+          <a:prstGeom prst="rect">
+            <a:avLst/>
+          </a:prstGeom>
+          <a:solidFill>
+            <a:srgbClr val="C9A227"/>
+          </a:solidFill>
+          <a:ln>
+            <a:noFill/>
+          </a:ln>
+          <a:effectLst/>
+        </p:spPr>
+        <p:style>
+          <a:lnRef idx="1">
+            <a:schemeClr val="accent1"/>
+          </a:lnRef>
+          <a:fillRef idx="3">
+            <a:schemeClr val="accent1"/>
+          </a:fillRef>
+          <a:effectRef idx="2">
+            <a:schemeClr val="accent1"/>
+          </a:effectRef>
+          <a:fontRef idx="minor">
+            <a:schemeClr val="lt1"/>
+          </a:fontRef>
+        </p:style>
+        <p:txBody>
+          <a:bodyPr rtlCol="0" anchor="ctr"/>
+          <a:lstStyle/>
+          <a:p>
+            <a:pPr algn="ctr"/>
+          </a:p>
+        </p:txBody>
+      </p:sp>
+      <p:sp>
+        <p:nvSpPr>
+          <p:cNvPr id="11" name="TextBox 10"/>
+          <p:cNvSpPr txBox="1"/>
+          <p:nvPr/>
+        </p:nvSpPr>
+        <p:spPr>
+          <a:xfrm>
+            <a:off x="868680" y="1371600"/>
+            <a:ext cx="10728655" cy="4663440"/>
+          </a:xfrm>
+          <a:prstGeom prst="rect">
+            <a:avLst/>
+          </a:prstGeom>
+          <a:noFill/>
+        </p:spPr>
+        <p:txBody>
+          <a:bodyPr wrap="square" anchor="ctr">
+            <a:spAutoFit/>
+          </a:bodyPr>
+          <a:lstStyle/>
+          <a:p>
+            <a:pPr algn="l">
+              <a:spcAft>
+                <a:spcPts val="1800"/>
+              </a:spcAft>
+            </a:pPr>
+            <a:r>
+              <a:rPr sz="1900" b="0">
+                <a:solidFill>
+                  <a:srgbClr val="222222"/>
+                </a:solidFill>
+                <a:latin typeface="Calibri"/>
+              </a:rPr>
+              <a:t>•   Add real economic features such as inflation, the dollar index and interest rates.</a:t>
+            </a:r>
+          </a:p>
+          <a:p>
+            <a:pPr algn="l">
+              <a:spcAft>
+                <a:spcPts val="1800"/>
+              </a:spcAft>
+            </a:pPr>
+            <a:r>
+              <a:rPr sz="1900" b="0">
+                <a:solidFill>
+                  <a:srgbClr val="222222"/>
+                </a:solidFill>
+                <a:latin typeface="Calibri"/>
+              </a:rPr>
+              <a:t>•   Try deep-learning time-series models like LSTM for longer horizons.</a:t>
+            </a:r>
+          </a:p>
+          <a:p>
+            <a:pPr algn="l">
+              <a:spcAft>
+                <a:spcPts val="1800"/>
+              </a:spcAft>
+            </a:pPr>
+            <a:r>
+              <a:rPr sz="1900" b="0">
+                <a:solidFill>
+                  <a:srgbClr val="222222"/>
+                </a:solidFill>
+                <a:latin typeface="Calibri"/>
+              </a:rPr>
+              <a:t>•   Show a confidence range around the forecast instead of a single number.</a:t>
+            </a:r>
+          </a:p>
+          <a:p>
+            <a:pPr algn="l">
+              <a:spcAft>
+                <a:spcPts val="1800"/>
+              </a:spcAft>
+            </a:pPr>
+            <a:r>
+              <a:rPr sz="1900" b="0">
+                <a:solidFill>
+                  <a:srgbClr val="222222"/>
+                </a:solidFill>
+                <a:latin typeface="Calibri"/>
+              </a:rPr>
+              <a:t>•   Extend to other metals and to jewelers' rate cards used in the local market.</a:t>
+            </a:r>
+          </a:p>
+          <a:p>
+            <a:pPr algn="l">
+              <a:spcAft>
+                <a:spcPts val="1800"/>
+              </a:spcAft>
+            </a:pPr>
+            <a:r>
+              <a:rPr sz="1900" b="0">
+                <a:solidFill>
+                  <a:srgbClr val="222222"/>
+                </a:solidFill>
+                <a:latin typeface="Calibri"/>
+              </a:rPr>
+              <a:t>•   Publish the dashboard online with a scheduled daily data refresh.</a:t>
+            </a:r>
+          </a:p>
+        </p:txBody>
+      </p:sp>
+    </p:spTree>
+  </p:cSld>
+  <p:clrMapOvr>
+    <a:masterClrMapping/>
+  </p:clrMapOvr>
+</p:sld>
+</file>
+
+<file path=ppt/slides/slide15.xml><?xml version="1.0" encoding="utf-8"?>
+<p:sld xmlns:a="http://schemas.openxmlformats.org/drawingml/2006/main" xmlns:p="http://schemas.openxmlformats.org/presentationml/2006/main" xmlns:r="http://schemas.openxmlformats.org/officeDocument/2006/relationships">
+  <p:cSld>
+    <p:spTree>
+      <p:nvGrpSpPr>
+        <p:cNvPr id="1" name=""/>
+        <p:cNvGrpSpPr/>
+        <p:nvPr/>
+      </p:nvGrpSpPr>
+      <p:grpSpPr/>
+      <p:sp>
+        <p:nvSpPr>
+          <p:cNvPr id="2" name="Rectangle 1"/>
+          <p:cNvSpPr/>
+          <p:nvPr/>
+        </p:nvSpPr>
+        <p:spPr>
+          <a:xfrm>
+            <a:off x="0" y="0"/>
             <a:ext cx="12191695" cy="6858000"/>
           </a:xfrm>
           <a:prstGeom prst="rect">
@@ -5180,7 +6024,7 @@
                 </a:solidFill>
                 <a:latin typeface="Calibri"/>
               </a:rPr>
-              <a:t>Gold Price Prediction</a:t>
+              <a:t>Gold &amp; Silver Predictor</a:t>
             </a:r>
           </a:p>
         </p:txBody>
@@ -5419,65 +6263,81 @@
           <a:p>
             <a:pPr algn="l">
               <a:spcAft>
-                <a:spcPts val="2200"/>
-              </a:spcAft>
-            </a:pPr>
-            <a:r>
-              <a:rPr sz="2000" b="0">
+                <a:spcPts val="1800"/>
+              </a:spcAft>
+            </a:pPr>
+            <a:r>
+              <a:rPr sz="1900" b="0">
                 <a:solidFill>
                   <a:srgbClr val="222222"/>
                 </a:solidFill>
                 <a:latin typeface="Calibri"/>
               </a:rPr>
-              <a:t>•   Gold is a globally traded precious metal and a traditional safe-haven asset.</a:t>
+              <a:t>•   Gold and silver are the two most tracked precious metals, priced in US dollars per troy ounce.</a:t>
             </a:r>
           </a:p>
           <a:p>
             <a:pPr algn="l">
               <a:spcAft>
-                <a:spcPts val="2200"/>
-              </a:spcAft>
-            </a:pPr>
-            <a:r>
-              <a:rPr sz="2000" b="0">
+                <a:spcPts val="1800"/>
+              </a:spcAft>
+            </a:pPr>
+            <a:r>
+              <a:rPr sz="1900" b="0">
                 <a:solidFill>
                   <a:srgbClr val="222222"/>
                 </a:solidFill>
                 <a:latin typeface="Calibri"/>
               </a:rPr>
-              <a:t>•   Its price is affected by demand, inflation, currency value and market sentiment.</a:t>
+              <a:t>•   Their prices move with demand, inflation, the dollar and global market sentiment.</a:t>
             </a:r>
           </a:p>
           <a:p>
             <a:pPr algn="l">
               <a:spcAft>
-                <a:spcPts val="2200"/>
-              </a:spcAft>
-            </a:pPr>
-            <a:r>
-              <a:rPr sz="2000" b="0">
+                <a:spcPts val="1800"/>
+              </a:spcAft>
+            </a:pPr>
+            <a:r>
+              <a:rPr sz="1900" b="0">
                 <a:solidFill>
                   <a:srgbClr val="222222"/>
                 </a:solidFill>
                 <a:latin typeface="Calibri"/>
               </a:rPr>
-              <a:t>•   Being able to forecast gold prices helps investors and analysts take better decisions.</a:t>
+              <a:t>•   This project fetches the LIVE price of both metals and converts it into Indian Rupees per gram.</a:t>
             </a:r>
           </a:p>
           <a:p>
             <a:pPr algn="l">
               <a:spcAft>
-                <a:spcPts val="2200"/>
-              </a:spcAft>
-            </a:pPr>
-            <a:r>
-              <a:rPr sz="2000" b="0">
+                <a:spcPts val="1800"/>
+              </a:spcAft>
+            </a:pPr>
+            <a:r>
+              <a:rPr sz="1900" b="0">
                 <a:solidFill>
                   <a:srgbClr val="222222"/>
                 </a:solidFill>
                 <a:latin typeface="Calibri"/>
               </a:rPr>
-              <a:t>•   This project builds a Machine Learning model that predicts the monthly price of gold.</a:t>
+              <a:t>•   A Machine Learning model then forecasts the price for the next 12 months.</a:t>
+            </a:r>
+          </a:p>
+          <a:p>
+            <a:pPr algn="l">
+              <a:spcAft>
+                <a:spcPts val="1800"/>
+              </a:spcAft>
+            </a:pPr>
+            <a:r>
+              <a:rPr sz="1900" b="0">
+                <a:solidFill>
+                  <a:srgbClr val="222222"/>
+                </a:solidFill>
+                <a:latin typeface="Calibri"/>
+              </a:rPr>
+              <a:t>•   Everything is shown on one web dashboard, so the numbers can be read without any training.</a:t>
             </a:r>
           </a:p>
         </p:txBody>
@@ -5661,7 +6521,7 @@
                 </a:solidFill>
                 <a:latin typeface="Calibri"/>
               </a:rPr>
-              <a:t>Gold Price Prediction</a:t>
+              <a:t>Gold &amp; Silver Predictor</a:t>
             </a:r>
           </a:p>
         </p:txBody>
@@ -5900,27 +6760,27 @@
           <a:p>
             <a:pPr algn="l">
               <a:spcAft>
-                <a:spcPts val="2200"/>
-              </a:spcAft>
-            </a:pPr>
-            <a:r>
-              <a:rPr sz="2000" b="0">
+                <a:spcPts val="1800"/>
+              </a:spcAft>
+            </a:pPr>
+            <a:r>
+              <a:rPr sz="1900" b="0">
                 <a:solidFill>
                   <a:srgbClr val="222222"/>
                 </a:solidFill>
                 <a:latin typeface="Calibri"/>
               </a:rPr>
-              <a:t>•   Given the historical monthly price of gold, predict its price for the coming months.</a:t>
+              <a:t>•   Given the historical monthly price of gold and silver, predict their price for the coming months.</a:t>
             </a:r>
           </a:p>
           <a:p>
             <a:pPr algn="l">
               <a:spcAft>
-                <a:spcPts val="2200"/>
-              </a:spcAft>
-            </a:pPr>
-            <a:r>
-              <a:rPr sz="2000" b="0">
+                <a:spcPts val="1800"/>
+              </a:spcAft>
+            </a:pPr>
+            <a:r>
+              <a:rPr sz="1900" b="0">
                 <a:solidFill>
                   <a:srgbClr val="222222"/>
                 </a:solidFill>
@@ -5932,33 +6792,33 @@
           <a:p>
             <a:pPr algn="l">
               <a:spcAft>
-                <a:spcPts val="2200"/>
-              </a:spcAft>
-            </a:pPr>
-            <a:r>
-              <a:rPr sz="2000" b="0">
+                <a:spcPts val="1800"/>
+              </a:spcAft>
+            </a:pPr>
+            <a:r>
+              <a:rPr sz="1900" b="0">
                 <a:solidFill>
                   <a:srgbClr val="222222"/>
                 </a:solidFill>
                 <a:latin typeface="Calibri"/>
               </a:rPr>
-              <a:t>•   Multiple models are trained and the most accurate one is kept for prediction.</a:t>
+              <a:t>•   Several models are trained, scored on data they have never seen, and the best one is kept.</a:t>
             </a:r>
           </a:p>
           <a:p>
             <a:pPr algn="l">
               <a:spcAft>
-                <a:spcPts val="2200"/>
-              </a:spcAft>
-            </a:pPr>
-            <a:r>
-              <a:rPr sz="2000" b="0">
+                <a:spcPts val="1800"/>
+              </a:spcAft>
+            </a:pPr>
+            <a:r>
+              <a:rPr sz="1900" b="0">
                 <a:solidFill>
                   <a:srgbClr val="222222"/>
                 </a:solidFill>
                 <a:latin typeface="Calibri"/>
               </a:rPr>
-              <a:t>•   The winning model is then wrapped in a simple desktop application.</a:t>
+              <a:t>•   The winning model is connected to a live price feed and presented on a dashboard in rupees.</a:t>
             </a:r>
           </a:p>
         </p:txBody>
@@ -6142,7 +7002,7 @@
                 </a:solidFill>
                 <a:latin typeface="Calibri"/>
               </a:rPr>
-              <a:t>Gold Price Prediction</a:t>
+              <a:t>Gold &amp; Silver Predictor</a:t>
             </a:r>
           </a:p>
         </p:txBody>
@@ -6381,81 +7241,81 @@
           <a:p>
             <a:pPr algn="l">
               <a:spcAft>
-                <a:spcPts val="2200"/>
-              </a:spcAft>
-            </a:pPr>
-            <a:r>
-              <a:rPr sz="2000" b="0">
+                <a:spcPts val="1800"/>
+              </a:spcAft>
+            </a:pPr>
+            <a:r>
+              <a:rPr sz="1900" b="0">
                 <a:solidFill>
                   <a:srgbClr val="222222"/>
                 </a:solidFill>
                 <a:latin typeface="Calibri"/>
               </a:rPr>
-              <a:t>•   Prepare a clean monthly gold price dataset for the years 2000 to 2024.</a:t>
+              <a:t>•   Build a clean monthly price dataset for gold and silver from the year 2000 up to today.</a:t>
             </a:r>
           </a:p>
           <a:p>
             <a:pPr algn="l">
               <a:spcAft>
-                <a:spcPts val="2200"/>
-              </a:spcAft>
-            </a:pPr>
-            <a:r>
-              <a:rPr sz="2000" b="0">
+                <a:spcPts val="1800"/>
+              </a:spcAft>
+            </a:pPr>
+            <a:r>
+              <a:rPr sz="1900" b="0">
                 <a:solidFill>
                   <a:srgbClr val="222222"/>
                 </a:solidFill>
                 <a:latin typeface="Calibri"/>
               </a:rPr>
-              <a:t>•   Engineer features that capture the trend and the short-term momentum of prices.</a:t>
+              <a:t>•   Read the live price of both metals and the US dollar to rupee rate from public APIs.</a:t>
             </a:r>
           </a:p>
           <a:p>
             <a:pPr algn="l">
               <a:spcAft>
-                <a:spcPts val="2200"/>
-              </a:spcAft>
-            </a:pPr>
-            <a:r>
-              <a:rPr sz="2000" b="0">
+                <a:spcPts val="1800"/>
+              </a:spcAft>
+            </a:pPr>
+            <a:r>
+              <a:rPr sz="1900" b="0">
                 <a:solidFill>
                   <a:srgbClr val="222222"/>
                 </a:solidFill>
                 <a:latin typeface="Calibri"/>
               </a:rPr>
-              <a:t>•   Train and compare RandomForest, Linear Regression and Ridge models.</a:t>
+              <a:t>•   Engineer features that capture short-term momentum instead of raw price levels.</a:t>
             </a:r>
           </a:p>
           <a:p>
             <a:pPr algn="l">
               <a:spcAft>
-                <a:spcPts val="2200"/>
-              </a:spcAft>
-            </a:pPr>
-            <a:r>
-              <a:rPr sz="2000" b="0">
+                <a:spcPts val="1800"/>
+              </a:spcAft>
+            </a:pPr>
+            <a:r>
+              <a:rPr sz="1900" b="0">
                 <a:solidFill>
                   <a:srgbClr val="222222"/>
                 </a:solidFill>
                 <a:latin typeface="Calibri"/>
               </a:rPr>
-              <a:t>•   Measure accuracy using MAE, RMSE and R-squared against a naive baseline.</a:t>
+              <a:t>•   Compare Random Forest, Linear Regression and Ridge against a naive baseline.</a:t>
             </a:r>
           </a:p>
           <a:p>
             <a:pPr algn="l">
               <a:spcAft>
-                <a:spcPts val="2200"/>
-              </a:spcAft>
-            </a:pPr>
-            <a:r>
-              <a:rPr sz="2000" b="0">
+                <a:spcPts val="1800"/>
+              </a:spcAft>
+            </a:pPr>
+            <a:r>
+              <a:rPr sz="1900" b="0">
                 <a:solidFill>
                   <a:srgbClr val="222222"/>
                 </a:solidFill>
                 <a:latin typeface="Calibri"/>
               </a:rPr>
-              <a:t>•   Provide a simple desktop GUI so anyone can run a prediction.</a:t>
+              <a:t>•   Deliver an attractive dashboard showing present and future prices in Indian Rupees.</a:t>
             </a:r>
           </a:p>
         </p:txBody>
@@ -6600,7 +7460,7 @@
                 </a:solidFill>
                 <a:latin typeface="Calibri"/>
               </a:rPr>
-              <a:t>Dataset</a:t>
+              <a:t>Live Data Sources</a:t>
             </a:r>
           </a:p>
         </p:txBody>
@@ -6639,7 +7499,7 @@
                 </a:solidFill>
                 <a:latin typeface="Calibri"/>
               </a:rPr>
-              <a:t>Gold Price Prediction</a:t>
+              <a:t>Gold &amp; Silver Predictor</a:t>
             </a:r>
           </a:p>
         </p:txBody>
@@ -6878,65 +7738,81 @@
           <a:p>
             <a:pPr algn="l">
               <a:spcAft>
-                <a:spcPts val="2200"/>
-              </a:spcAft>
-            </a:pPr>
-            <a:r>
-              <a:rPr sz="2000" b="0">
+                <a:spcPts val="1800"/>
+              </a:spcAft>
+            </a:pPr>
+            <a:r>
+              <a:rPr sz="1900" b="0">
                 <a:solidFill>
                   <a:srgbClr val="222222"/>
                 </a:solidFill>
                 <a:latin typeface="Calibri"/>
               </a:rPr>
-              <a:t>•   Monthly gold price in USD per troy ounce, from 2000 to 2024 (300 records).</a:t>
+              <a:t>•   api.gold-api.com/price/XAU  -  live gold price in US dollars per troy ounce.</a:t>
             </a:r>
           </a:p>
           <a:p>
             <a:pPr algn="l">
               <a:spcAft>
-                <a:spcPts val="2200"/>
-              </a:spcAft>
-            </a:pPr>
-            <a:r>
-              <a:rPr sz="2000" b="0">
+                <a:spcPts val="1800"/>
+              </a:spcAft>
+            </a:pPr>
+            <a:r>
+              <a:rPr sz="1900" b="0">
                 <a:solidFill>
                   <a:srgbClr val="222222"/>
                 </a:solidFill>
                 <a:latin typeface="Calibri"/>
               </a:rPr>
-              <a:t>•   Columns in the file: Date, Year, Month and Price.</a:t>
+              <a:t>•   api.gold-api.com/price/XAG  -  live silver price in US dollars per troy ounce.</a:t>
             </a:r>
           </a:p>
           <a:p>
             <a:pPr algn="l">
               <a:spcAft>
-                <a:spcPts val="2200"/>
-              </a:spcAft>
-            </a:pPr>
-            <a:r>
-              <a:rPr sz="2000" b="0">
+                <a:spcPts val="1800"/>
+              </a:spcAft>
+            </a:pPr>
+            <a:r>
+              <a:rPr sz="1900" b="0">
                 <a:solidFill>
                   <a:srgbClr val="222222"/>
                 </a:solidFill>
                 <a:latin typeface="Calibri"/>
               </a:rPr>
-              <a:t>•   Built from public annual-average anchors with a small momentum effect added.</a:t>
+              <a:t>•   open.er-api.com  -  today's US dollar to Indian rupee exchange rate.</a:t>
             </a:r>
           </a:p>
           <a:p>
             <a:pPr algn="l">
               <a:spcAft>
-                <a:spcPts val="2200"/>
-              </a:spcAft>
-            </a:pPr>
-            <a:r>
-              <a:rPr sz="2000" b="0">
+                <a:spcPts val="1800"/>
+              </a:spcAft>
+            </a:pPr>
+            <a:r>
+              <a:rPr sz="1900" b="0">
                 <a:solidFill>
                   <a:srgbClr val="222222"/>
                 </a:solidFill>
                 <a:latin typeface="Calibri"/>
               </a:rPr>
-              <a:t>•   Model features: the last 3 monthly returns, plus the month and the year.</a:t>
+              <a:t>•   All three are free public feeds, so no key or login is needed.</a:t>
+            </a:r>
+          </a:p>
+          <a:p>
+            <a:pPr algn="l">
+              <a:spcAft>
+                <a:spcPts val="1800"/>
+              </a:spcAft>
+            </a:pPr>
+            <a:r>
+              <a:rPr sz="1900" b="0">
+                <a:solidFill>
+                  <a:srgbClr val="222222"/>
+                </a:solidFill>
+                <a:latin typeface="Calibri"/>
+              </a:rPr>
+              <a:t>•   Conversion:  Rs per gram = US$ per ounce x USD-INR rate / 31.1035  (one troy ounce = 31.1035 g).</a:t>
             </a:r>
           </a:p>
         </p:txBody>
@@ -7081,7 +7957,7 @@
                 </a:solidFill>
                 <a:latin typeface="Calibri"/>
               </a:rPr>
-              <a:t>Methodology</a:t>
+              <a:t>Dataset</a:t>
             </a:r>
           </a:p>
         </p:txBody>
@@ -7120,7 +7996,7 @@
                 </a:solidFill>
                 <a:latin typeface="Calibri"/>
               </a:rPr>
-              <a:t>Gold Price Prediction</a:t>
+              <a:t>Gold &amp; Silver Predictor</a:t>
             </a:r>
           </a:p>
         </p:txBody>
@@ -7359,81 +8235,81 @@
           <a:p>
             <a:pPr algn="l">
               <a:spcAft>
-                <a:spcPts val="2200"/>
-              </a:spcAft>
-            </a:pPr>
-            <a:r>
-              <a:rPr sz="2000" b="0">
+                <a:spcPts val="1800"/>
+              </a:spcAft>
+            </a:pPr>
+            <a:r>
+              <a:rPr sz="1900" b="0">
                 <a:solidFill>
                   <a:srgbClr val="222222"/>
                 </a:solidFill>
                 <a:latin typeface="Calibri"/>
               </a:rPr>
-              <a:t>•   The model predicts the month-to-month RETURN, not the raw price.</a:t>
+              <a:t>•   Two files: gold_prices.csv and silver_prices.csv - one row per month since January 2000.</a:t>
             </a:r>
           </a:p>
           <a:p>
             <a:pPr algn="l">
               <a:spcAft>
-                <a:spcPts val="2200"/>
-              </a:spcAft>
-            </a:pPr>
-            <a:r>
-              <a:rPr sz="2000" b="0">
+                <a:spcPts val="1800"/>
+              </a:spcAft>
+            </a:pPr>
+            <a:r>
+              <a:rPr sz="1900" b="0">
                 <a:solidFill>
                   <a:srgbClr val="222222"/>
                 </a:solidFill>
                 <a:latin typeface="Calibri"/>
               </a:rPr>
-              <a:t>•   Why: tree models cannot guess a price higher than they have seen, so a rising trend breaks them.</a:t>
+              <a:t>•   Columns: Date, Year, Month and Price (US dollars per troy ounce).</a:t>
             </a:r>
           </a:p>
           <a:p>
             <a:pPr algn="l">
               <a:spcAft>
-                <a:spcPts val="2200"/>
-              </a:spcAft>
-            </a:pPr>
-            <a:r>
-              <a:rPr sz="2000" b="0">
+                <a:spcPts val="1800"/>
+              </a:spcAft>
+            </a:pPr>
+            <a:r>
+              <a:rPr sz="1900" b="0">
                 <a:solidFill>
                   <a:srgbClr val="222222"/>
                 </a:solidFill>
                 <a:latin typeface="Calibri"/>
               </a:rPr>
-              <a:t>•   Price is rebuilt as   next price = last price x (1 + predicted return).</a:t>
+              <a:t>•   Yearly anchors are approximate LBMA annual averages, interpolated month to month with momentum.</a:t>
             </a:r>
           </a:p>
           <a:p>
             <a:pPr algn="l">
               <a:spcAft>
-                <a:spcPts val="2200"/>
-              </a:spcAft>
-            </a:pPr>
-            <a:r>
-              <a:rPr sz="2000" b="0">
+                <a:spcPts val="1800"/>
+              </a:spcAft>
+            </a:pPr>
+            <a:r>
+              <a:rPr sz="1900" b="0">
                 <a:solidFill>
                   <a:srgbClr val="222222"/>
                 </a:solidFill>
                 <a:latin typeface="Calibri"/>
               </a:rPr>
-              <a:t>•   Forecasting rolls forward one month at a time, feeding each answer back as the next input.</a:t>
+              <a:t>•   Model features: the last 3 monthly returns, plus the month and the year.</a:t>
             </a:r>
           </a:p>
           <a:p>
             <a:pPr algn="l">
               <a:spcAft>
-                <a:spcPts val="2200"/>
-              </a:spcAft>
-            </a:pPr>
-            <a:r>
-              <a:rPr sz="2000" b="0">
+                <a:spcPts val="1800"/>
+              </a:spcAft>
+            </a:pPr>
+            <a:r>
+              <a:rPr sz="1900" b="0">
                 <a:solidFill>
                   <a:srgbClr val="222222"/>
                 </a:solidFill>
                 <a:latin typeface="Calibri"/>
               </a:rPr>
-              <a:t>•   A chronological split is used - the last 60 months are kept for testing.</a:t>
+              <a:t>•   The live API price is appended as the latest point, so the forecast always starts from today.</a:t>
             </a:r>
           </a:p>
         </p:txBody>
@@ -7578,7 +8454,7 @@
                 </a:solidFill>
                 <a:latin typeface="Calibri"/>
               </a:rPr>
-              <a:t>Technology Used</a:t>
+              <a:t>Methodology</a:t>
             </a:r>
           </a:p>
         </p:txBody>
@@ -7617,7 +8493,7 @@
                 </a:solidFill>
                 <a:latin typeface="Calibri"/>
               </a:rPr>
-              <a:t>Gold Price Prediction</a:t>
+              <a:t>Gold &amp; Silver Predictor</a:t>
             </a:r>
           </a:p>
         </p:txBody>
@@ -7856,81 +8732,81 @@
           <a:p>
             <a:pPr algn="l">
               <a:spcAft>
-                <a:spcPts val="2200"/>
-              </a:spcAft>
-            </a:pPr>
-            <a:r>
-              <a:rPr sz="2000" b="0">
+                <a:spcPts val="1800"/>
+              </a:spcAft>
+            </a:pPr>
+            <a:r>
+              <a:rPr sz="1900" b="0">
                 <a:solidFill>
                   <a:srgbClr val="222222"/>
                 </a:solidFill>
                 <a:latin typeface="Calibri"/>
               </a:rPr>
-              <a:t>•   Language: Python.</a:t>
+              <a:t>•   The model predicts the month-to-month RETURN, never the raw price.</a:t>
             </a:r>
           </a:p>
           <a:p>
             <a:pPr algn="l">
               <a:spcAft>
-                <a:spcPts val="2200"/>
-              </a:spcAft>
-            </a:pPr>
-            <a:r>
-              <a:rPr sz="2000" b="0">
+                <a:spcPts val="1800"/>
+              </a:spcAft>
+            </a:pPr>
+            <a:r>
+              <a:rPr sz="1900" b="0">
                 <a:solidFill>
                   <a:srgbClr val="222222"/>
                 </a:solidFill>
                 <a:latin typeface="Calibri"/>
               </a:rPr>
-              <a:t>•   Data handling: pandas and NumPy.</a:t>
+              <a:t>•   Why: a tree model cannot guess a price higher than anything it saw, so a 25 year rising trend breaks it.</a:t>
             </a:r>
           </a:p>
           <a:p>
             <a:pPr algn="l">
               <a:spcAft>
-                <a:spcPts val="2200"/>
-              </a:spcAft>
-            </a:pPr>
-            <a:r>
-              <a:rPr sz="2000" b="0">
+                <a:spcPts val="1800"/>
+              </a:spcAft>
+            </a:pPr>
+            <a:r>
+              <a:rPr sz="1900" b="0">
                 <a:solidFill>
                   <a:srgbClr val="222222"/>
                 </a:solidFill>
                 <a:latin typeface="Calibri"/>
               </a:rPr>
-              <a:t>•   Models: scikit-learn - RandomForest, Linear Regression, Ridge.</a:t>
+              <a:t>•   Price is rebuilt as   next price = last price x (1 + predicted return).</a:t>
             </a:r>
           </a:p>
           <a:p>
             <a:pPr algn="l">
               <a:spcAft>
-                <a:spcPts val="2200"/>
-              </a:spcAft>
-            </a:pPr>
-            <a:r>
-              <a:rPr sz="2000" b="0">
+                <a:spcPts val="1800"/>
+              </a:spcAft>
+            </a:pPr>
+            <a:r>
+              <a:rPr sz="1900" b="0">
                 <a:solidFill>
                   <a:srgbClr val="222222"/>
                 </a:solidFill>
                 <a:latin typeface="Calibri"/>
               </a:rPr>
-              <a:t>•   Charts: Matplotlib.</a:t>
+              <a:t>•   Forecasting rolls forward one month at a time, feeding each answer back as the next input.</a:t>
             </a:r>
           </a:p>
           <a:p>
             <a:pPr algn="l">
               <a:spcAft>
-                <a:spcPts val="2200"/>
-              </a:spcAft>
-            </a:pPr>
-            <a:r>
-              <a:rPr sz="2000" b="0">
+                <a:spcPts val="1800"/>
+              </a:spcAft>
+            </a:pPr>
+            <a:r>
+              <a:rPr sz="1900" b="0">
                 <a:solidFill>
                   <a:srgbClr val="222222"/>
                 </a:solidFill>
                 <a:latin typeface="Calibri"/>
               </a:rPr>
-              <a:t>•   Interface: Tkinter.   Save / Load: Joblib.</a:t>
+              <a:t>•   The split is chronological - the last 60 months are held out and never used for fitting.</a:t>
             </a:r>
           </a:p>
         </p:txBody>
@@ -8075,7 +8951,7 @@
                 </a:solidFill>
                 <a:latin typeface="Calibri"/>
               </a:rPr>
-              <a:t>Results</a:t>
+              <a:t>Technology Used</a:t>
             </a:r>
           </a:p>
         </p:txBody>
@@ -8114,7 +8990,7 @@
                 </a:solidFill>
                 <a:latin typeface="Calibri"/>
               </a:rPr>
-              <a:t>Gold Price Prediction</a:t>
+              <a:t>Gold &amp; Silver Predictor</a:t>
             </a:r>
           </a:p>
         </p:txBody>
@@ -8285,6 +9161,503 @@
           </a:p>
         </p:txBody>
       </p:sp>
+      <p:sp>
+        <p:nvSpPr>
+          <p:cNvPr id="10" name="Rectangle 9"/>
+          <p:cNvSpPr/>
+          <p:nvPr/>
+        </p:nvSpPr>
+        <p:spPr>
+          <a:xfrm>
+            <a:off x="502920" y="1554480"/>
+            <a:ext cx="82296" cy="4297680"/>
+          </a:xfrm>
+          <a:prstGeom prst="rect">
+            <a:avLst/>
+          </a:prstGeom>
+          <a:solidFill>
+            <a:srgbClr val="C9A227"/>
+          </a:solidFill>
+          <a:ln>
+            <a:noFill/>
+          </a:ln>
+          <a:effectLst/>
+        </p:spPr>
+        <p:style>
+          <a:lnRef idx="1">
+            <a:schemeClr val="accent1"/>
+          </a:lnRef>
+          <a:fillRef idx="3">
+            <a:schemeClr val="accent1"/>
+          </a:fillRef>
+          <a:effectRef idx="2">
+            <a:schemeClr val="accent1"/>
+          </a:effectRef>
+          <a:fontRef idx="minor">
+            <a:schemeClr val="lt1"/>
+          </a:fontRef>
+        </p:style>
+        <p:txBody>
+          <a:bodyPr rtlCol="0" anchor="ctr"/>
+          <a:lstStyle/>
+          <a:p>
+            <a:pPr algn="ctr"/>
+          </a:p>
+        </p:txBody>
+      </p:sp>
+      <p:sp>
+        <p:nvSpPr>
+          <p:cNvPr id="11" name="TextBox 10"/>
+          <p:cNvSpPr txBox="1"/>
+          <p:nvPr/>
+        </p:nvSpPr>
+        <p:spPr>
+          <a:xfrm>
+            <a:off x="868680" y="1371600"/>
+            <a:ext cx="10728655" cy="4663440"/>
+          </a:xfrm>
+          <a:prstGeom prst="rect">
+            <a:avLst/>
+          </a:prstGeom>
+          <a:noFill/>
+        </p:spPr>
+        <p:txBody>
+          <a:bodyPr wrap="square" anchor="ctr">
+            <a:spAutoFit/>
+          </a:bodyPr>
+          <a:lstStyle/>
+          <a:p>
+            <a:pPr algn="l">
+              <a:spcAft>
+                <a:spcPts val="1800"/>
+              </a:spcAft>
+            </a:pPr>
+            <a:r>
+              <a:rPr sz="1900" b="0">
+                <a:solidFill>
+                  <a:srgbClr val="222222"/>
+                </a:solidFill>
+                <a:latin typeface="Calibri"/>
+              </a:rPr>
+              <a:t>•   Language: Python.</a:t>
+            </a:r>
+          </a:p>
+          <a:p>
+            <a:pPr algn="l">
+              <a:spcAft>
+                <a:spcPts val="1800"/>
+              </a:spcAft>
+            </a:pPr>
+            <a:r>
+              <a:rPr sz="1900" b="0">
+                <a:solidFill>
+                  <a:srgbClr val="222222"/>
+                </a:solidFill>
+                <a:latin typeface="Calibri"/>
+              </a:rPr>
+              <a:t>•   Data handling: pandas and NumPy.</a:t>
+            </a:r>
+          </a:p>
+          <a:p>
+            <a:pPr algn="l">
+              <a:spcAft>
+                <a:spcPts val="1800"/>
+              </a:spcAft>
+            </a:pPr>
+            <a:r>
+              <a:rPr sz="1900" b="0">
+                <a:solidFill>
+                  <a:srgbClr val="222222"/>
+                </a:solidFill>
+                <a:latin typeface="Calibri"/>
+              </a:rPr>
+              <a:t>•   Models: scikit-learn - Random Forest, Linear Regression, Ridge.</a:t>
+            </a:r>
+          </a:p>
+          <a:p>
+            <a:pPr algn="l">
+              <a:spcAft>
+                <a:spcPts val="1800"/>
+              </a:spcAft>
+            </a:pPr>
+            <a:r>
+              <a:rPr sz="1900" b="0">
+                <a:solidFill>
+                  <a:srgbClr val="222222"/>
+                </a:solidFill>
+                <a:latin typeface="Calibri"/>
+              </a:rPr>
+              <a:t>•   Backend: Flask, serving one JSON summary to the page.</a:t>
+            </a:r>
+          </a:p>
+          <a:p>
+            <a:pPr algn="l">
+              <a:spcAft>
+                <a:spcPts val="1800"/>
+              </a:spcAft>
+            </a:pPr>
+            <a:r>
+              <a:rPr sz="1900" b="0">
+                <a:solidFill>
+                  <a:srgbClr val="222222"/>
+                </a:solidFill>
+                <a:latin typeface="Calibri"/>
+              </a:rPr>
+              <a:t>•   Frontend: Chart.js on a dark dashboard.   Model save / load: Joblib.</a:t>
+            </a:r>
+          </a:p>
+        </p:txBody>
+      </p:sp>
+    </p:spTree>
+  </p:cSld>
+  <p:clrMapOvr>
+    <a:masterClrMapping/>
+  </p:clrMapOvr>
+</p:sld>
+</file>
+
+<file path=ppt/slides/slide9.xml><?xml version="1.0" encoding="utf-8"?>
+<p:sld xmlns:a="http://schemas.openxmlformats.org/drawingml/2006/main" xmlns:p="http://schemas.openxmlformats.org/presentationml/2006/main" xmlns:r="http://schemas.openxmlformats.org/officeDocument/2006/relationships">
+  <p:cSld>
+    <p:spTree>
+      <p:nvGrpSpPr>
+        <p:cNvPr id="1" name=""/>
+        <p:cNvGrpSpPr/>
+        <p:nvPr/>
+      </p:nvGrpSpPr>
+      <p:grpSpPr/>
+      <p:sp>
+        <p:nvSpPr>
+          <p:cNvPr id="2" name="Rectangle 1"/>
+          <p:cNvSpPr/>
+          <p:nvPr/>
+        </p:nvSpPr>
+        <p:spPr>
+          <a:xfrm>
+            <a:off x="0" y="0"/>
+            <a:ext cx="12191695" cy="960120"/>
+          </a:xfrm>
+          <a:prstGeom prst="rect">
+            <a:avLst/>
+          </a:prstGeom>
+          <a:solidFill>
+            <a:srgbClr val="1F3864"/>
+          </a:solidFill>
+          <a:ln>
+            <a:noFill/>
+          </a:ln>
+          <a:effectLst/>
+        </p:spPr>
+        <p:style>
+          <a:lnRef idx="1">
+            <a:schemeClr val="accent1"/>
+          </a:lnRef>
+          <a:fillRef idx="3">
+            <a:schemeClr val="accent1"/>
+          </a:fillRef>
+          <a:effectRef idx="2">
+            <a:schemeClr val="accent1"/>
+          </a:effectRef>
+          <a:fontRef idx="minor">
+            <a:schemeClr val="lt1"/>
+          </a:fontRef>
+        </p:style>
+        <p:txBody>
+          <a:bodyPr rtlCol="0" anchor="ctr"/>
+          <a:lstStyle/>
+          <a:p>
+            <a:pPr algn="ctr"/>
+          </a:p>
+        </p:txBody>
+      </p:sp>
+      <p:sp>
+        <p:nvSpPr>
+          <p:cNvPr id="3" name="Rectangle 2"/>
+          <p:cNvSpPr/>
+          <p:nvPr/>
+        </p:nvSpPr>
+        <p:spPr>
+          <a:xfrm>
+            <a:off x="0" y="960120"/>
+            <a:ext cx="12191695" cy="64008"/>
+          </a:xfrm>
+          <a:prstGeom prst="rect">
+            <a:avLst/>
+          </a:prstGeom>
+          <a:solidFill>
+            <a:srgbClr val="C9A227"/>
+          </a:solidFill>
+          <a:ln>
+            <a:noFill/>
+          </a:ln>
+          <a:effectLst/>
+        </p:spPr>
+        <p:style>
+          <a:lnRef idx="1">
+            <a:schemeClr val="accent1"/>
+          </a:lnRef>
+          <a:fillRef idx="3">
+            <a:schemeClr val="accent1"/>
+          </a:fillRef>
+          <a:effectRef idx="2">
+            <a:schemeClr val="accent1"/>
+          </a:effectRef>
+          <a:fontRef idx="minor">
+            <a:schemeClr val="lt1"/>
+          </a:fontRef>
+        </p:style>
+        <p:txBody>
+          <a:bodyPr rtlCol="0" anchor="ctr"/>
+          <a:lstStyle/>
+          <a:p>
+            <a:pPr algn="ctr"/>
+          </a:p>
+        </p:txBody>
+      </p:sp>
+      <p:sp>
+        <p:nvSpPr>
+          <p:cNvPr id="4" name="TextBox 3"/>
+          <p:cNvSpPr txBox="1"/>
+          <p:nvPr/>
+        </p:nvSpPr>
+        <p:spPr>
+          <a:xfrm>
+            <a:off x="457200" y="137160"/>
+            <a:ext cx="8351215" cy="731520"/>
+          </a:xfrm>
+          <a:prstGeom prst="rect">
+            <a:avLst/>
+          </a:prstGeom>
+          <a:noFill/>
+        </p:spPr>
+        <p:txBody>
+          <a:bodyPr wrap="square" anchor="ctr">
+            <a:spAutoFit/>
+          </a:bodyPr>
+          <a:lstStyle/>
+          <a:p>
+            <a:pPr algn="l">
+              <a:spcAft>
+                <a:spcPts val="600"/>
+              </a:spcAft>
+            </a:pPr>
+            <a:r>
+              <a:rPr sz="2600" b="1">
+                <a:solidFill>
+                  <a:srgbClr val="FFFFFF"/>
+                </a:solidFill>
+                <a:latin typeface="Calibri"/>
+              </a:rPr>
+              <a:t>Results</a:t>
+            </a:r>
+          </a:p>
+        </p:txBody>
+      </p:sp>
+      <p:sp>
+        <p:nvSpPr>
+          <p:cNvPr id="5" name="TextBox 4"/>
+          <p:cNvSpPr txBox="1"/>
+          <p:nvPr/>
+        </p:nvSpPr>
+        <p:spPr>
+          <a:xfrm>
+            <a:off x="8534095" y="137160"/>
+            <a:ext cx="3200400" cy="731520"/>
+          </a:xfrm>
+          <a:prstGeom prst="rect">
+            <a:avLst/>
+          </a:prstGeom>
+          <a:noFill/>
+        </p:spPr>
+        <p:txBody>
+          <a:bodyPr wrap="square" anchor="ctr">
+            <a:spAutoFit/>
+          </a:bodyPr>
+          <a:lstStyle/>
+          <a:p>
+            <a:pPr algn="r">
+              <a:spcAft>
+                <a:spcPts val="600"/>
+              </a:spcAft>
+            </a:pPr>
+            <a:r>
+              <a:rPr sz="1200" b="1">
+                <a:solidFill>
+                  <a:srgbClr val="C9A227"/>
+                </a:solidFill>
+                <a:latin typeface="Calibri"/>
+              </a:rPr>
+              <a:t>Gold &amp; Silver Predictor</a:t>
+            </a:r>
+          </a:p>
+        </p:txBody>
+      </p:sp>
+      <p:sp>
+        <p:nvSpPr>
+          <p:cNvPr id="6" name="Rectangle 5"/>
+          <p:cNvSpPr/>
+          <p:nvPr/>
+        </p:nvSpPr>
+        <p:spPr>
+          <a:xfrm>
+            <a:off x="0" y="6473952"/>
+            <a:ext cx="12191695" cy="384048"/>
+          </a:xfrm>
+          <a:prstGeom prst="rect">
+            <a:avLst/>
+          </a:prstGeom>
+          <a:solidFill>
+            <a:srgbClr val="1F3864"/>
+          </a:solidFill>
+          <a:ln>
+            <a:noFill/>
+          </a:ln>
+          <a:effectLst/>
+        </p:spPr>
+        <p:style>
+          <a:lnRef idx="1">
+            <a:schemeClr val="accent1"/>
+          </a:lnRef>
+          <a:fillRef idx="3">
+            <a:schemeClr val="accent1"/>
+          </a:fillRef>
+          <a:effectRef idx="2">
+            <a:schemeClr val="accent1"/>
+          </a:effectRef>
+          <a:fontRef idx="minor">
+            <a:schemeClr val="lt1"/>
+          </a:fontRef>
+        </p:style>
+        <p:txBody>
+          <a:bodyPr rtlCol="0" anchor="ctr"/>
+          <a:lstStyle/>
+          <a:p>
+            <a:pPr algn="ctr"/>
+          </a:p>
+        </p:txBody>
+      </p:sp>
+      <p:sp>
+        <p:nvSpPr>
+          <p:cNvPr id="7" name="Rectangle 6"/>
+          <p:cNvSpPr/>
+          <p:nvPr/>
+        </p:nvSpPr>
+        <p:spPr>
+          <a:xfrm>
+            <a:off x="0" y="6473952"/>
+            <a:ext cx="128016" cy="384048"/>
+          </a:xfrm>
+          <a:prstGeom prst="rect">
+            <a:avLst/>
+          </a:prstGeom>
+          <a:solidFill>
+            <a:srgbClr val="C9A227"/>
+          </a:solidFill>
+          <a:ln>
+            <a:noFill/>
+          </a:ln>
+          <a:effectLst/>
+        </p:spPr>
+        <p:style>
+          <a:lnRef idx="1">
+            <a:schemeClr val="accent1"/>
+          </a:lnRef>
+          <a:fillRef idx="3">
+            <a:schemeClr val="accent1"/>
+          </a:fillRef>
+          <a:effectRef idx="2">
+            <a:schemeClr val="accent1"/>
+          </a:effectRef>
+          <a:fontRef idx="minor">
+            <a:schemeClr val="lt1"/>
+          </a:fontRef>
+        </p:style>
+        <p:txBody>
+          <a:bodyPr rtlCol="0" anchor="ctr"/>
+          <a:lstStyle/>
+          <a:p>
+            <a:pPr algn="ctr"/>
+          </a:p>
+        </p:txBody>
+      </p:sp>
+      <p:sp>
+        <p:nvSpPr>
+          <p:cNvPr id="8" name="TextBox 7"/>
+          <p:cNvSpPr txBox="1"/>
+          <p:nvPr/>
+        </p:nvSpPr>
+        <p:spPr>
+          <a:xfrm>
+            <a:off x="274320" y="6473952"/>
+            <a:ext cx="10362895" cy="384048"/>
+          </a:xfrm>
+          <a:prstGeom prst="rect">
+            <a:avLst/>
+          </a:prstGeom>
+          <a:noFill/>
+        </p:spPr>
+        <p:txBody>
+          <a:bodyPr wrap="square" anchor="ctr">
+            <a:spAutoFit/>
+          </a:bodyPr>
+          <a:lstStyle/>
+          <a:p>
+            <a:pPr algn="l">
+              <a:spcAft>
+                <a:spcPts val="600"/>
+              </a:spcAft>
+            </a:pPr>
+            <a:r>
+              <a:rPr sz="900" b="0">
+                <a:solidFill>
+                  <a:srgbClr val="FFFFFF"/>
+                </a:solidFill>
+                <a:latin typeface="Calibri"/>
+              </a:rPr>
+              <a:t>Sanchay Bhardwaj (2300650100104)  |  B.S.A. College of Engineering &amp; Technology, Mathura</a:t>
+            </a:r>
+          </a:p>
+        </p:txBody>
+      </p:sp>
+      <p:sp>
+        <p:nvSpPr>
+          <p:cNvPr id="9" name="TextBox 8"/>
+          <p:cNvSpPr txBox="1"/>
+          <p:nvPr/>
+        </p:nvSpPr>
+        <p:spPr>
+          <a:xfrm>
+            <a:off x="10728655" y="6473952"/>
+            <a:ext cx="1188720" cy="384048"/>
+          </a:xfrm>
+          <a:prstGeom prst="rect">
+            <a:avLst/>
+          </a:prstGeom>
+          <a:noFill/>
+        </p:spPr>
+        <p:txBody>
+          <a:bodyPr wrap="square" anchor="ctr">
+            <a:spAutoFit/>
+          </a:bodyPr>
+          <a:lstStyle/>
+          <a:p>
+            <a:pPr algn="r">
+              <a:spcAft>
+                <a:spcPts val="600"/>
+              </a:spcAft>
+            </a:pPr>
+            <a:r>
+              <a:rPr sz="900" b="1">
+                <a:solidFill>
+                  <a:srgbClr val="C9A227"/>
+                </a:solidFill>
+                <a:latin typeface="Calibri"/>
+              </a:rPr>
+              <a:t>Slide 9</a:t>
+            </a:r>
+          </a:p>
+        </p:txBody>
+      </p:sp>
       <p:graphicFrame>
         <p:nvGraphicFramePr>
           <p:cNvPr id="10" name="Table 9"/>
@@ -8294,8 +9667,8 @@
           <p:nvPr/>
         </p:nvGraphicFramePr>
         <p:xfrm>
-          <a:off x="640080" y="1737360"/>
-          <a:ext cx="6675120" cy="3108960"/>
+          <a:off x="502920" y="1828800"/>
+          <a:ext cx="7406640" cy="2926080"/>
         </p:xfrm>
         <a:graphic>
           <a:graphicData uri="http://schemas.openxmlformats.org/drawingml/2006/table">
@@ -8304,12 +9677,13 @@
                 <a:tableStyleId>{5C22544A-7EE6-4342-B048-85BDC9FD1C3A}</a:tableStyleId>
               </a:tblPr>
               <a:tblGrid>
-                <a:gridCol w="1668780"/>
-                <a:gridCol w="1668780"/>
-                <a:gridCol w="1668780"/>
-                <a:gridCol w="1668780"/>
+                <a:gridCol w="1481328"/>
+                <a:gridCol w="1481328"/>
+                <a:gridCol w="1481328"/>
+                <a:gridCol w="1481328"/>
+                <a:gridCol w="1481328"/>
               </a:tblGrid>
-              <a:tr h="621792">
+              <a:tr h="585216">
                 <a:tc>
                   <a:txBody>
                     <a:bodyPr anchor="ctr"/>
@@ -8321,7 +9695,7 @@
                         </a:spcAft>
                       </a:pPr>
                       <a:r>
-                        <a:rPr sz="1500" b="1">
+                        <a:rPr sz="1200" b="1">
                           <a:solidFill>
                             <a:srgbClr val="FFFFFF"/>
                           </a:solidFill>
@@ -8348,13 +9722,13 @@
                         </a:spcAft>
                       </a:pPr>
                       <a:r>
-                        <a:rPr sz="1500" b="1">
+                        <a:rPr sz="1200" b="1">
                           <a:solidFill>
                             <a:srgbClr val="FFFFFF"/>
                           </a:solidFill>
                           <a:latin typeface="Calibri"/>
                         </a:rPr>
-                        <a:t>MAE (USD)</a:t>
+                        <a:t>Gold MAE (US$/oz)</a:t>
                       </a:r>
                     </a:p>
                   </a:txBody>
@@ -8375,13 +9749,13 @@
                         </a:spcAft>
                       </a:pPr>
                       <a:r>
-                        <a:rPr sz="1500" b="1">
+                        <a:rPr sz="1200" b="1">
                           <a:solidFill>
                             <a:srgbClr val="FFFFFF"/>
                           </a:solidFill>
                           <a:latin typeface="Calibri"/>
                         </a:rPr>
-                        <a:t>RMSE (USD)</a:t>
+                        <a:t>Gold R-sq</a:t>
                       </a:r>
                     </a:p>
                   </a:txBody>
@@ -8402,13 +9776,40 @@
                         </a:spcAft>
                       </a:pPr>
                       <a:r>
-                        <a:rPr sz="1500" b="1">
+                        <a:rPr sz="1200" b="1">
                           <a:solidFill>
                             <a:srgbClr val="FFFFFF"/>
                           </a:solidFill>
                           <a:latin typeface="Calibri"/>
                         </a:rPr>
-                        <a:t>R-squared</a:t>
+                        <a:t>Silver MAE (US$/oz)</a:t>
+                      </a:r>
+                    </a:p>
+                  </a:txBody>
+                  <a:tcPr>
+                    <a:solidFill>
+                      <a:srgbClr val="1F3864"/>
+                    </a:solidFill>
+                  </a:tcPr>
+                </a:tc>
+                <a:tc>
+                  <a:txBody>
+                    <a:bodyPr anchor="ctr"/>
+                    <a:lstStyle/>
+                    <a:p>
+                      <a:pPr algn="ctr">
+                        <a:spcAft>
+                          <a:spcPts val="600"/>
+                        </a:spcAft>
+                      </a:pPr>
+                      <a:r>
+                        <a:rPr sz="1200" b="1">
+                          <a:solidFill>
+                            <a:srgbClr val="FFFFFF"/>
+                          </a:solidFill>
+                          <a:latin typeface="Calibri"/>
+                        </a:rPr>
+                        <a:t>Silver R-sq</a:t>
                       </a:r>
                     </a:p>
                   </a:txBody>
@@ -8419,7 +9820,7 @@
                   </a:tcPr>
                 </a:tc>
               </a:tr>
-              <a:tr h="621792">
+              <a:tr h="585216">
                 <a:tc>
                   <a:txBody>
                     <a:bodyPr anchor="ctr"/>
@@ -8431,13 +9832,13 @@
                         </a:spcAft>
                       </a:pPr>
                       <a:r>
-                        <a:rPr sz="1400" b="1">
+                        <a:rPr sz="1200" b="1">
                           <a:solidFill>
                             <a:srgbClr val="C9A227"/>
                           </a:solidFill>
                           <a:latin typeface="Calibri"/>
                         </a:rPr>
-                        <a:t>RandomForest</a:t>
+                        <a:t>Random Forest</a:t>
                       </a:r>
                     </a:p>
                   </a:txBody>
@@ -8458,13 +9859,13 @@
                         </a:spcAft>
                       </a:pPr>
                       <a:r>
-                        <a:rPr sz="1400" b="1">
+                        <a:rPr sz="1200" b="1">
                           <a:solidFill>
                             <a:srgbClr val="C9A227"/>
                           </a:solidFill>
                           <a:latin typeface="Calibri"/>
                         </a:rPr>
-                        <a:t>32.71</a:t>
+                        <a:t>44.34</a:t>
                       </a:r>
                     </a:p>
                   </a:txBody>
@@ -8485,13 +9886,13 @@
                         </a:spcAft>
                       </a:pPr>
                       <a:r>
-                        <a:rPr sz="1400" b="1">
+                        <a:rPr sz="1200" b="1">
                           <a:solidFill>
                             <a:srgbClr val="C9A227"/>
                           </a:solidFill>
                           <a:latin typeface="Calibri"/>
                         </a:rPr>
-                        <a:t>44.47</a:t>
+                        <a:t>0.9910</a:t>
                       </a:r>
                     </a:p>
                   </a:txBody>
@@ -8512,13 +9913,40 @@
                         </a:spcAft>
                       </a:pPr>
                       <a:r>
-                        <a:rPr sz="1400" b="1">
+                        <a:rPr sz="1200" b="1">
                           <a:solidFill>
                             <a:srgbClr val="C9A227"/>
                           </a:solidFill>
                           <a:latin typeface="Calibri"/>
                         </a:rPr>
-                        <a:t>0.9613</a:t>
+                        <a:t>0.54</a:t>
+                      </a:r>
+                    </a:p>
+                  </a:txBody>
+                  <a:tcPr>
+                    <a:solidFill>
+                      <a:srgbClr val="EEF3FA"/>
+                    </a:solidFill>
+                  </a:tcPr>
+                </a:tc>
+                <a:tc>
+                  <a:txBody>
+                    <a:bodyPr anchor="ctr"/>
+                    <a:lstStyle/>
+                    <a:p>
+                      <a:pPr algn="ctr">
+                        <a:spcAft>
+                          <a:spcPts val="600"/>
+                        </a:spcAft>
+                      </a:pPr>
+                      <a:r>
+                        <a:rPr sz="1200" b="1">
+                          <a:solidFill>
+                            <a:srgbClr val="C9A227"/>
+                          </a:solidFill>
+                          <a:latin typeface="Calibri"/>
+                        </a:rPr>
+                        <a:t>0.9942</a:t>
                       </a:r>
                     </a:p>
                   </a:txBody>
@@ -8529,7 +9957,7 @@
                   </a:tcPr>
                 </a:tc>
               </a:tr>
-              <a:tr h="621792">
+              <a:tr h="585216">
                 <a:tc>
                   <a:txBody>
                     <a:bodyPr anchor="ctr"/>
@@ -8541,7 +9969,7 @@
                         </a:spcAft>
                       </a:pPr>
                       <a:r>
-                        <a:rPr sz="1400" b="0">
+                        <a:rPr sz="1200" b="0">
                           <a:solidFill>
                             <a:srgbClr val="222222"/>
                           </a:solidFill>
@@ -8568,13 +9996,13 @@
                         </a:spcAft>
                       </a:pPr>
                       <a:r>
-                        <a:rPr sz="1400" b="0">
+                        <a:rPr sz="1200" b="0">
                           <a:solidFill>
                             <a:srgbClr val="222222"/>
                           </a:solidFill>
                           <a:latin typeface="Calibri"/>
                         </a:rPr>
-                        <a:t>32.91</a:t>
+                        <a:t>54.12</a:t>
                       </a:r>
                     </a:p>
                   </a:txBody>
@@ -8595,13 +10023,13 @@
                         </a:spcAft>
                       </a:pPr>
                       <a:r>
-                        <a:rPr sz="1400" b="0">
+                        <a:rPr sz="1200" b="0">
                           <a:solidFill>
                             <a:srgbClr val="222222"/>
                           </a:solidFill>
                           <a:latin typeface="Calibri"/>
                         </a:rPr>
-                        <a:t>44.60</a:t>
+                        <a:t>0.9889</a:t>
                       </a:r>
                     </a:p>
                   </a:txBody>
@@ -8622,13 +10050,40 @@
                         </a:spcAft>
                       </a:pPr>
                       <a:r>
-                        <a:rPr sz="1400" b="0">
+                        <a:rPr sz="1200" b="0">
                           <a:solidFill>
                             <a:srgbClr val="222222"/>
                           </a:solidFill>
                           <a:latin typeface="Calibri"/>
                         </a:rPr>
-                        <a:t>0.9611</a:t>
+                        <a:t>0.62</a:t>
+                      </a:r>
+                    </a:p>
+                  </a:txBody>
+                  <a:tcPr>
+                    <a:solidFill>
+                      <a:srgbClr val="FFFFFF"/>
+                    </a:solidFill>
+                  </a:tcPr>
+                </a:tc>
+                <a:tc>
+                  <a:txBody>
+                    <a:bodyPr anchor="ctr"/>
+                    <a:lstStyle/>
+                    <a:p>
+                      <a:pPr algn="ctr">
+                        <a:spcAft>
+                          <a:spcPts val="600"/>
+                        </a:spcAft>
+                      </a:pPr>
+                      <a:r>
+                        <a:rPr sz="1200" b="0">
+                          <a:solidFill>
+                            <a:srgbClr val="222222"/>
+                          </a:solidFill>
+                          <a:latin typeface="Calibri"/>
+                        </a:rPr>
+                        <a:t>0.9909</a:t>
                       </a:r>
                     </a:p>
                   </a:txBody>
@@ -8639,7 +10094,7 @@
                   </a:tcPr>
                 </a:tc>
               </a:tr>
-              <a:tr h="621792">
+              <a:tr h="585216">
                 <a:tc>
                   <a:txBody>
                     <a:bodyPr anchor="ctr"/>
@@ -8651,7 +10106,7 @@
                         </a:spcAft>
                       </a:pPr>
                       <a:r>
-                        <a:rPr sz="1400" b="0">
+                        <a:rPr sz="1200" b="0">
                           <a:solidFill>
                             <a:srgbClr val="222222"/>
                           </a:solidFill>
@@ -8678,13 +10133,13 @@
                         </a:spcAft>
                       </a:pPr>
                       <a:r>
-                        <a:rPr sz="1400" b="0">
+                        <a:rPr sz="1200" b="0">
                           <a:solidFill>
                             <a:srgbClr val="222222"/>
                           </a:solidFill>
                           <a:latin typeface="Calibri"/>
                         </a:rPr>
-                        <a:t>33.33</a:t>
+                        <a:t>53.54</a:t>
                       </a:r>
                     </a:p>
                   </a:txBody>
@@ -8705,13 +10160,13 @@
                         </a:spcAft>
                       </a:pPr>
                       <a:r>
-                        <a:rPr sz="1400" b="0">
+                        <a:rPr sz="1200" b="0">
                           <a:solidFill>
                             <a:srgbClr val="222222"/>
                           </a:solidFill>
                           <a:latin typeface="Calibri"/>
                         </a:rPr>
-                        <a:t>45.50</a:t>
+                        <a:t>0.9889</a:t>
                       </a:r>
                     </a:p>
                   </a:txBody>
@@ -8732,13 +10187,40 @@
                         </a:spcAft>
                       </a:pPr>
                       <a:r>
-                        <a:rPr sz="1400" b="0">
+                        <a:rPr sz="1200" b="0">
                           <a:solidFill>
                             <a:srgbClr val="222222"/>
                           </a:solidFill>
                           <a:latin typeface="Calibri"/>
                         </a:rPr>
-                        <a:t>0.9595</a:t>
+                        <a:t>0.64</a:t>
+                      </a:r>
+                    </a:p>
+                  </a:txBody>
+                  <a:tcPr>
+                    <a:solidFill>
+                      <a:srgbClr val="EEF3FA"/>
+                    </a:solidFill>
+                  </a:tcPr>
+                </a:tc>
+                <a:tc>
+                  <a:txBody>
+                    <a:bodyPr anchor="ctr"/>
+                    <a:lstStyle/>
+                    <a:p>
+                      <a:pPr algn="ctr">
+                        <a:spcAft>
+                          <a:spcPts val="600"/>
+                        </a:spcAft>
+                      </a:pPr>
+                      <a:r>
+                        <a:rPr sz="1200" b="0">
+                          <a:solidFill>
+                            <a:srgbClr val="222222"/>
+                          </a:solidFill>
+                          <a:latin typeface="Calibri"/>
+                        </a:rPr>
+                        <a:t>0.9903</a:t>
                       </a:r>
                     </a:p>
                   </a:txBody>
@@ -8749,7 +10231,7 @@
                   </a:tcPr>
                 </a:tc>
               </a:tr>
-              <a:tr h="621792">
+              <a:tr h="585216">
                 <a:tc>
                   <a:txBody>
                     <a:bodyPr anchor="ctr"/>
@@ -8761,7 +10243,7 @@
                         </a:spcAft>
                       </a:pPr>
                       <a:r>
-                        <a:rPr sz="1400" b="0">
+                        <a:rPr sz="1200" b="0">
                           <a:solidFill>
                             <a:srgbClr val="222222"/>
                           </a:solidFill>
@@ -8788,13 +10270,13 @@
                         </a:spcAft>
                       </a:pPr>
                       <a:r>
-                        <a:rPr sz="1400" b="0">
+                        <a:rPr sz="1200" b="0">
                           <a:solidFill>
                             <a:srgbClr val="222222"/>
                           </a:solidFill>
                           <a:latin typeface="Calibri"/>
                         </a:rPr>
-                        <a:t>36.14</a:t>
+                        <a:t>56.93</a:t>
                       </a:r>
                     </a:p>
                   </a:txBody>
@@ -8815,13 +10297,13 @@
                         </a:spcAft>
                       </a:pPr>
                       <a:r>
-                        <a:rPr sz="1400" b="0">
+                        <a:rPr sz="1200" b="0">
                           <a:solidFill>
                             <a:srgbClr val="222222"/>
                           </a:solidFill>
                           <a:latin typeface="Calibri"/>
                         </a:rPr>
-                        <a:t>47.97</a:t>
+                        <a:t>0.9875</a:t>
                       </a:r>
                     </a:p>
                   </a:txBody>
@@ -8842,13 +10324,40 @@
                         </a:spcAft>
                       </a:pPr>
                       <a:r>
-                        <a:rPr sz="1400" b="0">
+                        <a:rPr sz="1200" b="0">
                           <a:solidFill>
                             <a:srgbClr val="222222"/>
                           </a:solidFill>
                           <a:latin typeface="Calibri"/>
                         </a:rPr>
-                        <a:t>0.9549</a:t>
+                        <a:t>0.64</a:t>
+                      </a:r>
+                    </a:p>
+                  </a:txBody>
+                  <a:tcPr>
+                    <a:solidFill>
+                      <a:srgbClr val="FFFFFF"/>
+                    </a:solidFill>
+                  </a:tcPr>
+                </a:tc>
+                <a:tc>
+                  <a:txBody>
+                    <a:bodyPr anchor="ctr"/>
+                    <a:lstStyle/>
+                    <a:p>
+                      <a:pPr algn="ctr">
+                        <a:spcAft>
+                          <a:spcPts val="600"/>
+                        </a:spcAft>
+                      </a:pPr>
+                      <a:r>
+                        <a:rPr sz="1200" b="0">
+                          <a:solidFill>
+                            <a:srgbClr val="222222"/>
+                          </a:solidFill>
+                          <a:latin typeface="Calibri"/>
+                        </a:rPr>
+                        <a:t>0.9897</a:t>
                       </a:r>
                     </a:p>
                   </a:txBody>
@@ -8879,8 +10388,8 @@
         </p:blipFill>
         <p:spPr>
           <a:xfrm>
-            <a:off x="7680960" y="1554480"/>
-            <a:ext cx="3931920" cy="3291840"/>
+            <a:off x="8092440" y="1600200"/>
+            <a:ext cx="3749039" cy="3200400"/>
           </a:xfrm>
           <a:prstGeom prst="rect">
             <a:avLst/>
@@ -8895,8 +10404,8 @@
         </p:nvSpPr>
         <p:spPr>
           <a:xfrm>
-            <a:off x="640080" y="5212080"/>
-            <a:ext cx="6675120" cy="914400"/>
+            <a:off x="502920" y="5120640"/>
+            <a:ext cx="7406640" cy="1097280"/>
           </a:xfrm>
           <a:prstGeom prst="rect">
             <a:avLst/>
@@ -8921,420 +10430,7 @@
                 </a:solidFill>
                 <a:latin typeface="Calibri"/>
               </a:rPr>
-              <a:t>RandomForest wins on every metric. Test window: last 60 months (from Jan 2020). Lower MAE / RMSE and higher R-squared are better.</a:t>
-            </a:r>
-          </a:p>
-        </p:txBody>
-      </p:sp>
-    </p:spTree>
-  </p:cSld>
-  <p:clrMapOvr>
-    <a:masterClrMapping/>
-  </p:clrMapOvr>
-</p:sld>
-</file>
-
-<file path=ppt/slides/slide9.xml><?xml version="1.0" encoding="utf-8"?>
-<p:sld xmlns:a="http://schemas.openxmlformats.org/drawingml/2006/main" xmlns:p="http://schemas.openxmlformats.org/presentationml/2006/main" xmlns:r="http://schemas.openxmlformats.org/officeDocument/2006/relationships">
-  <p:cSld>
-    <p:spTree>
-      <p:nvGrpSpPr>
-        <p:cNvPr id="1" name=""/>
-        <p:cNvGrpSpPr/>
-        <p:nvPr/>
-      </p:nvGrpSpPr>
-      <p:grpSpPr/>
-      <p:sp>
-        <p:nvSpPr>
-          <p:cNvPr id="2" name="Rectangle 1"/>
-          <p:cNvSpPr/>
-          <p:nvPr/>
-        </p:nvSpPr>
-        <p:spPr>
-          <a:xfrm>
-            <a:off x="0" y="0"/>
-            <a:ext cx="12191695" cy="960120"/>
-          </a:xfrm>
-          <a:prstGeom prst="rect">
-            <a:avLst/>
-          </a:prstGeom>
-          <a:solidFill>
-            <a:srgbClr val="1F3864"/>
-          </a:solidFill>
-          <a:ln>
-            <a:noFill/>
-          </a:ln>
-          <a:effectLst/>
-        </p:spPr>
-        <p:style>
-          <a:lnRef idx="1">
-            <a:schemeClr val="accent1"/>
-          </a:lnRef>
-          <a:fillRef idx="3">
-            <a:schemeClr val="accent1"/>
-          </a:fillRef>
-          <a:effectRef idx="2">
-            <a:schemeClr val="accent1"/>
-          </a:effectRef>
-          <a:fontRef idx="minor">
-            <a:schemeClr val="lt1"/>
-          </a:fontRef>
-        </p:style>
-        <p:txBody>
-          <a:bodyPr rtlCol="0" anchor="ctr"/>
-          <a:lstStyle/>
-          <a:p>
-            <a:pPr algn="ctr"/>
-          </a:p>
-        </p:txBody>
-      </p:sp>
-      <p:sp>
-        <p:nvSpPr>
-          <p:cNvPr id="3" name="Rectangle 2"/>
-          <p:cNvSpPr/>
-          <p:nvPr/>
-        </p:nvSpPr>
-        <p:spPr>
-          <a:xfrm>
-            <a:off x="0" y="960120"/>
-            <a:ext cx="12191695" cy="64008"/>
-          </a:xfrm>
-          <a:prstGeom prst="rect">
-            <a:avLst/>
-          </a:prstGeom>
-          <a:solidFill>
-            <a:srgbClr val="C9A227"/>
-          </a:solidFill>
-          <a:ln>
-            <a:noFill/>
-          </a:ln>
-          <a:effectLst/>
-        </p:spPr>
-        <p:style>
-          <a:lnRef idx="1">
-            <a:schemeClr val="accent1"/>
-          </a:lnRef>
-          <a:fillRef idx="3">
-            <a:schemeClr val="accent1"/>
-          </a:fillRef>
-          <a:effectRef idx="2">
-            <a:schemeClr val="accent1"/>
-          </a:effectRef>
-          <a:fontRef idx="minor">
-            <a:schemeClr val="lt1"/>
-          </a:fontRef>
-        </p:style>
-        <p:txBody>
-          <a:bodyPr rtlCol="0" anchor="ctr"/>
-          <a:lstStyle/>
-          <a:p>
-            <a:pPr algn="ctr"/>
-          </a:p>
-        </p:txBody>
-      </p:sp>
-      <p:sp>
-        <p:nvSpPr>
-          <p:cNvPr id="4" name="TextBox 3"/>
-          <p:cNvSpPr txBox="1"/>
-          <p:nvPr/>
-        </p:nvSpPr>
-        <p:spPr>
-          <a:xfrm>
-            <a:off x="457200" y="137160"/>
-            <a:ext cx="8351215" cy="731520"/>
-          </a:xfrm>
-          <a:prstGeom prst="rect">
-            <a:avLst/>
-          </a:prstGeom>
-          <a:noFill/>
-        </p:spPr>
-        <p:txBody>
-          <a:bodyPr wrap="square" anchor="ctr">
-            <a:spAutoFit/>
-          </a:bodyPr>
-          <a:lstStyle/>
-          <a:p>
-            <a:pPr algn="l">
-              <a:spcAft>
-                <a:spcPts val="600"/>
-              </a:spcAft>
-            </a:pPr>
-            <a:r>
-              <a:rPr sz="2600" b="1">
-                <a:solidFill>
-                  <a:srgbClr val="FFFFFF"/>
-                </a:solidFill>
-                <a:latin typeface="Calibri"/>
-              </a:rPr>
-              <a:t>Application - Prediction</a:t>
-            </a:r>
-          </a:p>
-        </p:txBody>
-      </p:sp>
-      <p:sp>
-        <p:nvSpPr>
-          <p:cNvPr id="5" name="TextBox 4"/>
-          <p:cNvSpPr txBox="1"/>
-          <p:nvPr/>
-        </p:nvSpPr>
-        <p:spPr>
-          <a:xfrm>
-            <a:off x="8534095" y="137160"/>
-            <a:ext cx="3200400" cy="731520"/>
-          </a:xfrm>
-          <a:prstGeom prst="rect">
-            <a:avLst/>
-          </a:prstGeom>
-          <a:noFill/>
-        </p:spPr>
-        <p:txBody>
-          <a:bodyPr wrap="square" anchor="ctr">
-            <a:spAutoFit/>
-          </a:bodyPr>
-          <a:lstStyle/>
-          <a:p>
-            <a:pPr algn="r">
-              <a:spcAft>
-                <a:spcPts val="600"/>
-              </a:spcAft>
-            </a:pPr>
-            <a:r>
-              <a:rPr sz="1200" b="1">
-                <a:solidFill>
-                  <a:srgbClr val="C9A227"/>
-                </a:solidFill>
-                <a:latin typeface="Calibri"/>
-              </a:rPr>
-              <a:t>Gold Price Prediction</a:t>
-            </a:r>
-          </a:p>
-        </p:txBody>
-      </p:sp>
-      <p:sp>
-        <p:nvSpPr>
-          <p:cNvPr id="6" name="Rectangle 5"/>
-          <p:cNvSpPr/>
-          <p:nvPr/>
-        </p:nvSpPr>
-        <p:spPr>
-          <a:xfrm>
-            <a:off x="0" y="6473952"/>
-            <a:ext cx="12191695" cy="384048"/>
-          </a:xfrm>
-          <a:prstGeom prst="rect">
-            <a:avLst/>
-          </a:prstGeom>
-          <a:solidFill>
-            <a:srgbClr val="1F3864"/>
-          </a:solidFill>
-          <a:ln>
-            <a:noFill/>
-          </a:ln>
-          <a:effectLst/>
-        </p:spPr>
-        <p:style>
-          <a:lnRef idx="1">
-            <a:schemeClr val="accent1"/>
-          </a:lnRef>
-          <a:fillRef idx="3">
-            <a:schemeClr val="accent1"/>
-          </a:fillRef>
-          <a:effectRef idx="2">
-            <a:schemeClr val="accent1"/>
-          </a:effectRef>
-          <a:fontRef idx="minor">
-            <a:schemeClr val="lt1"/>
-          </a:fontRef>
-        </p:style>
-        <p:txBody>
-          <a:bodyPr rtlCol="0" anchor="ctr"/>
-          <a:lstStyle/>
-          <a:p>
-            <a:pPr algn="ctr"/>
-          </a:p>
-        </p:txBody>
-      </p:sp>
-      <p:sp>
-        <p:nvSpPr>
-          <p:cNvPr id="7" name="Rectangle 6"/>
-          <p:cNvSpPr/>
-          <p:nvPr/>
-        </p:nvSpPr>
-        <p:spPr>
-          <a:xfrm>
-            <a:off x="0" y="6473952"/>
-            <a:ext cx="128016" cy="384048"/>
-          </a:xfrm>
-          <a:prstGeom prst="rect">
-            <a:avLst/>
-          </a:prstGeom>
-          <a:solidFill>
-            <a:srgbClr val="C9A227"/>
-          </a:solidFill>
-          <a:ln>
-            <a:noFill/>
-          </a:ln>
-          <a:effectLst/>
-        </p:spPr>
-        <p:style>
-          <a:lnRef idx="1">
-            <a:schemeClr val="accent1"/>
-          </a:lnRef>
-          <a:fillRef idx="3">
-            <a:schemeClr val="accent1"/>
-          </a:fillRef>
-          <a:effectRef idx="2">
-            <a:schemeClr val="accent1"/>
-          </a:effectRef>
-          <a:fontRef idx="minor">
-            <a:schemeClr val="lt1"/>
-          </a:fontRef>
-        </p:style>
-        <p:txBody>
-          <a:bodyPr rtlCol="0" anchor="ctr"/>
-          <a:lstStyle/>
-          <a:p>
-            <a:pPr algn="ctr"/>
-          </a:p>
-        </p:txBody>
-      </p:sp>
-      <p:sp>
-        <p:nvSpPr>
-          <p:cNvPr id="8" name="TextBox 7"/>
-          <p:cNvSpPr txBox="1"/>
-          <p:nvPr/>
-        </p:nvSpPr>
-        <p:spPr>
-          <a:xfrm>
-            <a:off x="274320" y="6473952"/>
-            <a:ext cx="10362895" cy="384048"/>
-          </a:xfrm>
-          <a:prstGeom prst="rect">
-            <a:avLst/>
-          </a:prstGeom>
-          <a:noFill/>
-        </p:spPr>
-        <p:txBody>
-          <a:bodyPr wrap="square" anchor="ctr">
-            <a:spAutoFit/>
-          </a:bodyPr>
-          <a:lstStyle/>
-          <a:p>
-            <a:pPr algn="l">
-              <a:spcAft>
-                <a:spcPts val="600"/>
-              </a:spcAft>
-            </a:pPr>
-            <a:r>
-              <a:rPr sz="900" b="0">
-                <a:solidFill>
-                  <a:srgbClr val="FFFFFF"/>
-                </a:solidFill>
-                <a:latin typeface="Calibri"/>
-              </a:rPr>
-              <a:t>Sanchay Bhardwaj (2300650100104)  |  B.S.A. College of Engineering &amp; Technology, Mathura</a:t>
-            </a:r>
-          </a:p>
-        </p:txBody>
-      </p:sp>
-      <p:sp>
-        <p:nvSpPr>
-          <p:cNvPr id="9" name="TextBox 8"/>
-          <p:cNvSpPr txBox="1"/>
-          <p:nvPr/>
-        </p:nvSpPr>
-        <p:spPr>
-          <a:xfrm>
-            <a:off x="10728655" y="6473952"/>
-            <a:ext cx="1188720" cy="384048"/>
-          </a:xfrm>
-          <a:prstGeom prst="rect">
-            <a:avLst/>
-          </a:prstGeom>
-          <a:noFill/>
-        </p:spPr>
-        <p:txBody>
-          <a:bodyPr wrap="square" anchor="ctr">
-            <a:spAutoFit/>
-          </a:bodyPr>
-          <a:lstStyle/>
-          <a:p>
-            <a:pPr algn="r">
-              <a:spcAft>
-                <a:spcPts val="600"/>
-              </a:spcAft>
-            </a:pPr>
-            <a:r>
-              <a:rPr sz="900" b="1">
-                <a:solidFill>
-                  <a:srgbClr val="C9A227"/>
-                </a:solidFill>
-                <a:latin typeface="Calibri"/>
-              </a:rPr>
-              <a:t>Slide 9</a:t>
-            </a:r>
-          </a:p>
-        </p:txBody>
-      </p:sp>
-      <p:pic>
-        <p:nvPicPr>
-          <p:cNvPr id="10" name="Picture 9" descr="screenshot_predict.png"/>
-          <p:cNvPicPr>
-            <a:picLocks noChangeAspect="1"/>
-          </p:cNvPicPr>
-          <p:nvPr/>
-        </p:nvPicPr>
-        <p:blipFill>
-          <a:blip r:embed="rId2"/>
-          <a:stretch>
-            <a:fillRect/>
-          </a:stretch>
-        </p:blipFill>
-        <p:spPr>
-          <a:xfrm>
-            <a:off x="2703423" y="1325880"/>
-            <a:ext cx="6784848" cy="4480560"/>
-          </a:xfrm>
-          <a:prstGeom prst="rect">
-            <a:avLst/>
-          </a:prstGeom>
-        </p:spPr>
-      </p:pic>
-      <p:sp>
-        <p:nvSpPr>
-          <p:cNvPr id="11" name="TextBox 10"/>
-          <p:cNvSpPr txBox="1"/>
-          <p:nvPr/>
-        </p:nvSpPr>
-        <p:spPr>
-          <a:xfrm>
-            <a:off x="914400" y="5623560"/>
-            <a:ext cx="10362895" cy="640080"/>
-          </a:xfrm>
-          <a:prstGeom prst="rect">
-            <a:avLst/>
-          </a:prstGeom>
-          <a:noFill/>
-        </p:spPr>
-        <p:txBody>
-          <a:bodyPr wrap="square">
-            <a:spAutoFit/>
-          </a:bodyPr>
-          <a:lstStyle/>
-          <a:p>
-            <a:pPr algn="ctr">
-              <a:spcAft>
-                <a:spcPts val="600"/>
-              </a:spcAft>
-            </a:pPr>
-            <a:r>
-              <a:rPr sz="1300" b="0">
-                <a:solidFill>
-                  <a:srgbClr val="6B7280"/>
-                </a:solidFill>
-                <a:latin typeface="Calibri"/>
-              </a:rPr>
-              <a:t>Desktop GUI: choose a horizon and forecast the gold price month by month.</a:t>
+              <a:t>Random Forest wins on both metals and beats the naive baseline. Test window: last 60 months, from Oct 2021. Lower MAE and higher R-squared are better.</a:t>
             </a:r>
           </a:p>
         </p:txBody>

--- a/docs/Gold-Price-Prediction-Presentation.pptx
+++ b/docs/Gold-Price-Prediction-Presentation.pptx
@@ -3678,7 +3678,7 @@
                 </a:solidFill>
                 <a:latin typeface="Calibri"/>
               </a:rPr>
-              <a:t>Sanchay Bhardwaj (2300650100104)  |  B.S.A. College of Engineering &amp; Technology, Mathura</a:t>
+              <a:t>Developed by Sanchay Bhardwaj (2300650100104)  |  B.S.A. College of Engineering &amp; Technology, Mathura</a:t>
             </a:r>
           </a:p>
         </p:txBody>
@@ -3738,8 +3738,8 @@
         </p:blipFill>
         <p:spPr>
           <a:xfrm>
-            <a:off x="2053237" y="1325880"/>
-            <a:ext cx="8085221" cy="4480560"/>
+            <a:off x="2047466" y="1325880"/>
+            <a:ext cx="8096762" cy="4389120"/>
           </a:xfrm>
           <a:prstGeom prst="rect">
             <a:avLst/>
@@ -3754,7 +3754,7 @@
         </p:nvSpPr>
         <p:spPr>
           <a:xfrm>
-            <a:off x="914400" y="5623560"/>
+            <a:off x="914400" y="5897880"/>
             <a:ext cx="10362895" cy="640080"/>
           </a:xfrm>
           <a:prstGeom prst="rect">
@@ -3780,7 +3780,7 @@
                 </a:solidFill>
                 <a:latin typeface="Calibri"/>
               </a:rPr>
-              <a:t>Today's live gold and silver price in rupees per gram, per kg and per 10 gram, with the monthly history since 2000.</a:t>
+              <a:t>The complete app on one screen: today's live gold and silver rate in rupees per gram, per 10 gram and per kg, the history since 2000, the 12 month outlook and the accuracy table.</a:t>
             </a:r>
           </a:p>
         </p:txBody>
@@ -3925,7 +3925,7 @@
                 </a:solidFill>
                 <a:latin typeface="Calibri"/>
               </a:rPr>
-              <a:t>Application - 12 Month Forecast</a:t>
+              <a:t>Application - History and Forecast</a:t>
             </a:r>
           </a:p>
         </p:txBody>
@@ -4091,7 +4091,7 @@
                 </a:solidFill>
                 <a:latin typeface="Calibri"/>
               </a:rPr>
-              <a:t>Sanchay Bhardwaj (2300650100104)  |  B.S.A. College of Engineering &amp; Technology, Mathura</a:t>
+              <a:t>Developed by Sanchay Bhardwaj (2300650100104)  |  B.S.A. College of Engineering &amp; Technology, Mathura</a:t>
             </a:r>
           </a:p>
         </p:txBody>
@@ -4151,8 +4151,8 @@
         </p:blipFill>
         <p:spPr>
           <a:xfrm>
-            <a:off x="2535138" y="1325880"/>
-            <a:ext cx="7121419" cy="4480560"/>
+            <a:off x="2676768" y="1325880"/>
+            <a:ext cx="6838158" cy="4389120"/>
           </a:xfrm>
           <a:prstGeom prst="rect">
             <a:avLst/>
@@ -4167,7 +4167,7 @@
         </p:nvSpPr>
         <p:spPr>
           <a:xfrm>
-            <a:off x="914400" y="5623560"/>
+            <a:off x="914400" y="5897880"/>
             <a:ext cx="10362895" cy="640080"/>
           </a:xfrm>
           <a:prstGeom prst="rect">
@@ -4193,7 +4193,7 @@
                 </a:solidFill>
                 <a:latin typeface="Calibri"/>
               </a:rPr>
-              <a:t>Solid line = actual price, dashed line = model forecast, plus the month by month expected price in rupees.</a:t>
+              <a:t>Top: monthly price history of both metals since 2000. Bottom: solid line is the actual price, dashed line is what the model expects for the next 12 months.</a:t>
             </a:r>
           </a:p>
         </p:txBody>
@@ -4338,7 +4338,7 @@
                 </a:solidFill>
                 <a:latin typeface="Calibri"/>
               </a:rPr>
-              <a:t>Application - Model Accuracy</a:t>
+              <a:t>Application - Expected Price and Accuracy</a:t>
             </a:r>
           </a:p>
         </p:txBody>
@@ -4504,7 +4504,7 @@
                 </a:solidFill>
                 <a:latin typeface="Calibri"/>
               </a:rPr>
-              <a:t>Sanchay Bhardwaj (2300650100104)  |  B.S.A. College of Engineering &amp; Technology, Mathura</a:t>
+              <a:t>Developed by Sanchay Bhardwaj (2300650100104)  |  B.S.A. College of Engineering &amp; Technology, Mathura</a:t>
             </a:r>
           </a:p>
         </p:txBody>
@@ -4564,8 +4564,8 @@
         </p:blipFill>
         <p:spPr>
           <a:xfrm>
-            <a:off x="731520" y="1325880"/>
-            <a:ext cx="10728655" cy="4269110"/>
+            <a:off x="3588859" y="1325880"/>
+            <a:ext cx="5013977" cy="4389120"/>
           </a:xfrm>
           <a:prstGeom prst="rect">
             <a:avLst/>
@@ -4580,7 +4580,7 @@
         </p:nvSpPr>
         <p:spPr>
           <a:xfrm>
-            <a:off x="914400" y="5623560"/>
+            <a:off x="914400" y="5897880"/>
             <a:ext cx="10362895" cy="640080"/>
           </a:xfrm>
           <a:prstGeom prst="rect">
@@ -4606,7 +4606,7 @@
                 </a:solidFill>
                 <a:latin typeface="Calibri"/>
               </a:rPr>
-              <a:t>Error of every model on 60 unseen months, compared against the naive 'next month = this month' baseline.</a:t>
+              <a:t>Top: expected gold and silver price after 1, 3, 6 and 12 months in rupees. Bottom: error of every model on 60 unseen months against the naive baseline.</a:t>
             </a:r>
           </a:p>
         </p:txBody>
@@ -4917,7 +4917,7 @@
                 </a:solidFill>
                 <a:latin typeface="Calibri"/>
               </a:rPr>
-              <a:t>Sanchay Bhardwaj (2300650100104)  |  B.S.A. College of Engineering &amp; Technology, Mathura</a:t>
+              <a:t>Developed by Sanchay Bhardwaj (2300650100104)  |  B.S.A. College of Engineering &amp; Technology, Mathura</a:t>
             </a:r>
           </a:p>
         </p:txBody>
@@ -5398,7 +5398,7 @@
                 </a:solidFill>
                 <a:latin typeface="Calibri"/>
               </a:rPr>
-              <a:t>Sanchay Bhardwaj (2300650100104)  |  B.S.A. College of Engineering &amp; Technology, Mathura</a:t>
+              <a:t>Developed by Sanchay Bhardwaj (2300650100104)  |  B.S.A. College of Engineering &amp; Technology, Mathura</a:t>
             </a:r>
           </a:p>
         </p:txBody>
@@ -6151,7 +6151,7 @@
                 </a:solidFill>
                 <a:latin typeface="Calibri"/>
               </a:rPr>
-              <a:t>Sanchay Bhardwaj (2300650100104)  |  B.S.A. College of Engineering &amp; Technology, Mathura</a:t>
+              <a:t>Developed by Sanchay Bhardwaj (2300650100104)  |  B.S.A. College of Engineering &amp; Technology, Mathura</a:t>
             </a:r>
           </a:p>
         </p:txBody>
@@ -6648,7 +6648,7 @@
                 </a:solidFill>
                 <a:latin typeface="Calibri"/>
               </a:rPr>
-              <a:t>Sanchay Bhardwaj (2300650100104)  |  B.S.A. College of Engineering &amp; Technology, Mathura</a:t>
+              <a:t>Developed by Sanchay Bhardwaj (2300650100104)  |  B.S.A. College of Engineering &amp; Technology, Mathura</a:t>
             </a:r>
           </a:p>
         </p:txBody>
@@ -7129,7 +7129,7 @@
                 </a:solidFill>
                 <a:latin typeface="Calibri"/>
               </a:rPr>
-              <a:t>Sanchay Bhardwaj (2300650100104)  |  B.S.A. College of Engineering &amp; Technology, Mathura</a:t>
+              <a:t>Developed by Sanchay Bhardwaj (2300650100104)  |  B.S.A. College of Engineering &amp; Technology, Mathura</a:t>
             </a:r>
           </a:p>
         </p:txBody>
@@ -7626,7 +7626,7 @@
                 </a:solidFill>
                 <a:latin typeface="Calibri"/>
               </a:rPr>
-              <a:t>Sanchay Bhardwaj (2300650100104)  |  B.S.A. College of Engineering &amp; Technology, Mathura</a:t>
+              <a:t>Developed by Sanchay Bhardwaj (2300650100104)  |  B.S.A. College of Engineering &amp; Technology, Mathura</a:t>
             </a:r>
           </a:p>
         </p:txBody>
@@ -8123,7 +8123,7 @@
                 </a:solidFill>
                 <a:latin typeface="Calibri"/>
               </a:rPr>
-              <a:t>Sanchay Bhardwaj (2300650100104)  |  B.S.A. College of Engineering &amp; Technology, Mathura</a:t>
+              <a:t>Developed by Sanchay Bhardwaj (2300650100104)  |  B.S.A. College of Engineering &amp; Technology, Mathura</a:t>
             </a:r>
           </a:p>
         </p:txBody>
@@ -8620,7 +8620,7 @@
                 </a:solidFill>
                 <a:latin typeface="Calibri"/>
               </a:rPr>
-              <a:t>Sanchay Bhardwaj (2300650100104)  |  B.S.A. College of Engineering &amp; Technology, Mathura</a:t>
+              <a:t>Developed by Sanchay Bhardwaj (2300650100104)  |  B.S.A. College of Engineering &amp; Technology, Mathura</a:t>
             </a:r>
           </a:p>
         </p:txBody>
@@ -9117,7 +9117,7 @@
                 </a:solidFill>
                 <a:latin typeface="Calibri"/>
               </a:rPr>
-              <a:t>Sanchay Bhardwaj (2300650100104)  |  B.S.A. College of Engineering &amp; Technology, Mathura</a:t>
+              <a:t>Developed by Sanchay Bhardwaj (2300650100104)  |  B.S.A. College of Engineering &amp; Technology, Mathura</a:t>
             </a:r>
           </a:p>
         </p:txBody>
@@ -9614,7 +9614,7 @@
                 </a:solidFill>
                 <a:latin typeface="Calibri"/>
               </a:rPr>
-              <a:t>Sanchay Bhardwaj (2300650100104)  |  B.S.A. College of Engineering &amp; Technology, Mathura</a:t>
+              <a:t>Developed by Sanchay Bhardwaj (2300650100104)  |  B.S.A. College of Engineering &amp; Technology, Mathura</a:t>
             </a:r>
           </a:p>
         </p:txBody>

--- a/docs/Gold-Price-Prediction-Presentation.pptx
+++ b/docs/Gold-Price-Prediction-Presentation.pptx
@@ -3738,8 +3738,8 @@
         </p:blipFill>
         <p:spPr>
           <a:xfrm>
-            <a:off x="2047466" y="1325880"/>
-            <a:ext cx="8096762" cy="4389120"/>
+            <a:off x="1499910" y="1325880"/>
+            <a:ext cx="9191874" cy="4389120"/>
           </a:xfrm>
           <a:prstGeom prst="rect">
             <a:avLst/>
@@ -4151,8 +4151,8 @@
         </p:blipFill>
         <p:spPr>
           <a:xfrm>
-            <a:off x="2676768" y="1325880"/>
-            <a:ext cx="6838158" cy="4389120"/>
+            <a:off x="2302194" y="1325880"/>
+            <a:ext cx="7587306" cy="4389120"/>
           </a:xfrm>
           <a:prstGeom prst="rect">
             <a:avLst/>
@@ -4564,8 +4564,8 @@
         </p:blipFill>
         <p:spPr>
           <a:xfrm>
-            <a:off x="3588859" y="1325880"/>
-            <a:ext cx="5013977" cy="4389120"/>
+            <a:off x="3314208" y="1325880"/>
+            <a:ext cx="5563279" cy="4389120"/>
           </a:xfrm>
           <a:prstGeom prst="rect">
             <a:avLst/>
